--- a/00_オリエンテーション/【AI Native研修-提案】研修の概要.pptx
+++ b/00_オリエンテーション/【AI Native研修-提案】研修の概要.pptx
@@ -8251,7 +8251,7 @@
         </p:spPr>
         <p:txBody>
           <a:bodyPr>
-            <a:normAutofit/>
+            <a:normAutofit lnSpcReduction="10000"/>
           </a:bodyPr>
           <a:lstStyle/>
           <a:p>
@@ -8349,7 +8349,14 @@
             </a:r>
             <a:r>
               <a:rPr lang="ja-JP" altLang="en-US" dirty="0"/>
-              <a:t>を利用し、解決したい課題、サービスや機能、利用者を整理する。</a:t>
+              <a:t>を利用し、解決したい課題、サービスや機能、</a:t>
+            </a:r>
+            <a:br>
+              <a:rPr lang="en-US" altLang="ja-JP" dirty="0"/>
+            </a:br>
+            <a:r>
+              <a:rPr lang="ja-JP" altLang="en-US" dirty="0"/>
+              <a:t>利用者を整理する。</a:t>
             </a:r>
             <a:endParaRPr lang="en-US" altLang="ja-JP" dirty="0"/>
           </a:p>
@@ -8403,10 +8410,10 @@
       </p:sp>
       <p:pic>
         <p:nvPicPr>
-          <p:cNvPr id="2" name="図 1">
-            <a:extLst>
-              <a:ext uri="{FF2B5EF4-FFF2-40B4-BE49-F238E27FC236}">
-                <a16:creationId xmlns:a16="http://schemas.microsoft.com/office/drawing/2014/main" id="{A62C77E1-33C1-DA68-B4D9-15F12D65EC1E}"/>
+          <p:cNvPr id="4" name="図 3">
+            <a:extLst>
+              <a:ext uri="{FF2B5EF4-FFF2-40B4-BE49-F238E27FC236}">
+                <a16:creationId xmlns:a16="http://schemas.microsoft.com/office/drawing/2014/main" id="{AC9ABA23-1FFA-CEBD-58E2-8A7798AB1607}"/>
               </a:ext>
             </a:extLst>
           </p:cNvPr>
@@ -8423,8 +8430,8 @@
         </p:blipFill>
         <p:spPr>
           <a:xfrm>
-            <a:off x="9298800" y="532800"/>
-            <a:ext cx="2520000" cy="2596749"/>
+            <a:off x="8420677" y="1073150"/>
+            <a:ext cx="3603048" cy="3712786"/>
           </a:xfrm>
           <a:prstGeom prst="rect">
             <a:avLst/>
@@ -8591,42 +8598,19 @@
             <a:pPr lvl="2"/>
             <a:r>
               <a:rPr lang="ja-JP" altLang="en-US" dirty="0"/>
-              <a:t>提案資料や提案方法についてのフィードバック（改善点、アドバイス）を受ける。</a:t>
+              <a:t>提案資料や提案方法についての</a:t>
+            </a:r>
+            <a:br>
+              <a:rPr lang="en-US" altLang="ja-JP" dirty="0"/>
+            </a:br>
+            <a:r>
+              <a:rPr lang="ja-JP" altLang="en-US" dirty="0"/>
+              <a:t>フィードバック（改善点、アドバイス）を受ける。</a:t>
             </a:r>
             <a:endParaRPr lang="en-US" altLang="ja-JP" dirty="0"/>
           </a:p>
         </p:txBody>
       </p:sp>
-      <p:pic>
-        <p:nvPicPr>
-          <p:cNvPr id="2" name="図 1">
-            <a:extLst>
-              <a:ext uri="{FF2B5EF4-FFF2-40B4-BE49-F238E27FC236}">
-                <a16:creationId xmlns:a16="http://schemas.microsoft.com/office/drawing/2014/main" id="{A3BCB6E3-F5DE-E9A6-75CB-968843BAB04D}"/>
-              </a:ext>
-            </a:extLst>
-          </p:cNvPr>
-          <p:cNvPicPr>
-            <a:picLocks noChangeAspect="1"/>
-          </p:cNvPicPr>
-          <p:nvPr/>
-        </p:nvPicPr>
-        <p:blipFill>
-          <a:blip r:embed="rId3"/>
-          <a:stretch>
-            <a:fillRect/>
-          </a:stretch>
-        </p:blipFill>
-        <p:spPr>
-          <a:xfrm>
-            <a:off x="9298800" y="532800"/>
-            <a:ext cx="2520000" cy="1577665"/>
-          </a:xfrm>
-          <a:prstGeom prst="rect">
-            <a:avLst/>
-          </a:prstGeom>
-        </p:spPr>
-      </p:pic>
       <p:sp>
         <p:nvSpPr>
           <p:cNvPr id="6" name="コンテンツ プレースホルダー 2">
@@ -8891,6 +8875,36 @@
           </a:p>
         </p:txBody>
       </p:sp>
+      <p:pic>
+        <p:nvPicPr>
+          <p:cNvPr id="4" name="図 3">
+            <a:extLst>
+              <a:ext uri="{FF2B5EF4-FFF2-40B4-BE49-F238E27FC236}">
+                <a16:creationId xmlns:a16="http://schemas.microsoft.com/office/drawing/2014/main" id="{262107C3-E327-AFFB-C60E-9055CA3A19C7}"/>
+              </a:ext>
+            </a:extLst>
+          </p:cNvPr>
+          <p:cNvPicPr>
+            <a:picLocks noChangeAspect="1"/>
+          </p:cNvPicPr>
+          <p:nvPr/>
+        </p:nvPicPr>
+        <p:blipFill>
+          <a:blip r:embed="rId3"/>
+          <a:stretch>
+            <a:fillRect/>
+          </a:stretch>
+        </p:blipFill>
+        <p:spPr>
+          <a:xfrm>
+            <a:off x="8420677" y="1073150"/>
+            <a:ext cx="3603048" cy="2255716"/>
+          </a:xfrm>
+          <a:prstGeom prst="rect">
+            <a:avLst/>
+          </a:prstGeom>
+        </p:spPr>
+      </p:pic>
     </p:spTree>
     <p:extLst>
       <p:ext uri="{BB962C8B-B14F-4D97-AF65-F5344CB8AC3E}">
@@ -9013,7 +9027,14 @@
             <a:pPr lvl="2"/>
             <a:r>
               <a:rPr lang="ja-JP" altLang="en-US" dirty="0"/>
-              <a:t>フィードバックの内容を整理し、どの内容を反映するかを決定する。</a:t>
+              <a:t>フィードバックの内容を整理し、</a:t>
+            </a:r>
+            <a:br>
+              <a:rPr lang="en-US" altLang="ja-JP" dirty="0"/>
+            </a:br>
+            <a:r>
+              <a:rPr lang="ja-JP" altLang="en-US" dirty="0"/>
+              <a:t>どの内容を反映するかを決定する。</a:t>
             </a:r>
             <a:endParaRPr lang="en-US" altLang="ja-JP" dirty="0"/>
           </a:p>
@@ -9059,7 +9080,14 @@
             </a:r>
             <a:r>
               <a:rPr lang="ja-JP" altLang="en-US" dirty="0"/>
-              <a:t>を利用し、修正内容がフィードバック内容を適切に反映しているかを確認する。</a:t>
+              <a:t>を利用し、</a:t>
+            </a:r>
+            <a:br>
+              <a:rPr lang="en-US" altLang="ja-JP" dirty="0"/>
+            </a:br>
+            <a:r>
+              <a:rPr lang="ja-JP" altLang="en-US" dirty="0"/>
+              <a:t>フィードバック内容が適切に反映されているかを確認する。</a:t>
             </a:r>
             <a:endParaRPr lang="en-US" altLang="ja-JP" dirty="0"/>
           </a:p>
@@ -9083,16 +9111,30 @@
             <a:endParaRPr lang="en-US" altLang="ja-JP" dirty="0"/>
           </a:p>
           <a:p>
-            <a:pPr lvl="3"/>
-            <a:r>
-              <a:rPr lang="en-US" altLang="ja-JP" dirty="0"/>
+            <a:pPr marL="1371600" lvl="3" indent="0">
+              <a:buNone/>
+            </a:pPr>
+            <a:r>
+              <a:rPr lang="en-US" altLang="ja-JP" dirty="0">
+                <a:solidFill>
+                  <a:srgbClr val="FF0000"/>
+                </a:solidFill>
+              </a:rPr>
               <a:t>※</a:t>
             </a:r>
             <a:r>
-              <a:rPr lang="ja-JP" altLang="en-US" dirty="0"/>
+              <a:rPr lang="ja-JP" altLang="en-US" dirty="0">
+                <a:solidFill>
+                  <a:srgbClr val="FF0000"/>
+                </a:solidFill>
+              </a:rPr>
               <a:t>修正前の提案資料は不要です。</a:t>
             </a:r>
-            <a:endParaRPr lang="en-US" altLang="ja-JP" dirty="0"/>
+            <a:endParaRPr lang="en-US" altLang="ja-JP" dirty="0">
+              <a:solidFill>
+                <a:srgbClr val="FF0000"/>
+              </a:solidFill>
+            </a:endParaRPr>
           </a:p>
           <a:p>
             <a:pPr marL="914400" lvl="1" indent="-457200">
@@ -9117,10 +9159,10 @@
       </p:sp>
       <p:pic>
         <p:nvPicPr>
-          <p:cNvPr id="2" name="図 1">
-            <a:extLst>
-              <a:ext uri="{FF2B5EF4-FFF2-40B4-BE49-F238E27FC236}">
-                <a16:creationId xmlns:a16="http://schemas.microsoft.com/office/drawing/2014/main" id="{33A09ACE-EF3F-A953-7559-395D06BDD8F9}"/>
+          <p:cNvPr id="4" name="図 3">
+            <a:extLst>
+              <a:ext uri="{FF2B5EF4-FFF2-40B4-BE49-F238E27FC236}">
+                <a16:creationId xmlns:a16="http://schemas.microsoft.com/office/drawing/2014/main" id="{3DACEAB6-4B33-8C68-8C72-D921E61E0A29}"/>
               </a:ext>
             </a:extLst>
           </p:cNvPr>
@@ -9137,8 +9179,8 @@
         </p:blipFill>
         <p:spPr>
           <a:xfrm>
-            <a:off x="9298800" y="532800"/>
-            <a:ext cx="2520000" cy="2268426"/>
+            <a:off x="8420677" y="1073150"/>
+            <a:ext cx="3603048" cy="3243353"/>
           </a:xfrm>
           <a:prstGeom prst="rect">
             <a:avLst/>

--- a/00_オリエンテーション/【AI Native研修-提案】研修の概要.pptx
+++ b/00_オリエンテーション/【AI Native研修-提案】研修の概要.pptx
@@ -9151,7 +9151,7 @@
             <a:pPr lvl="2"/>
             <a:r>
               <a:rPr lang="ja-JP" altLang="en-US" dirty="0"/>
-              <a:t>最終発表に向けた準備を行う。</a:t>
+              <a:t>最終発表（研修終了後に事業部で実施する成果発表）に向けた準備を行います。</a:t>
             </a:r>
             <a:endParaRPr lang="en-US" altLang="ja-JP" dirty="0"/>
           </a:p>

--- a/00_オリエンテーション/【AI Native研修-提案】研修の概要.pptx
+++ b/00_オリエンテーション/【AI Native研修-提案】研修の概要.pptx
@@ -4637,13 +4637,13 @@
           <p:nvPr>
             <p:extLst>
               <p:ext uri="{D42A27DB-BD31-4B8C-83A1-F6EECF244321}">
-                <p14:modId xmlns:p14="http://schemas.microsoft.com/office/powerpoint/2010/main" val="2209702255"/>
+                <p14:modId xmlns:p14="http://schemas.microsoft.com/office/powerpoint/2010/main" val="1833374111"/>
               </p:ext>
             </p:extLst>
           </p:nvPr>
         </p:nvGraphicFramePr>
         <p:xfrm>
-          <a:off x="111443" y="858159"/>
+          <a:off x="111443" y="878037"/>
           <a:ext cx="11966713" cy="5546035"/>
         </p:xfrm>
         <a:graphic>
@@ -9064,7 +9064,7 @@
             </a:pPr>
             <a:r>
               <a:rPr lang="ja-JP" altLang="en-US" dirty="0"/>
-              <a:t>提案資料の確認</a:t>
+              <a:t>提案資料の確認（任意）</a:t>
             </a:r>
             <a:endParaRPr lang="en-US" altLang="ja-JP" dirty="0"/>
           </a:p>

--- a/00_オリエンテーション/【AI Native研修-提案】研修の概要.pptx
+++ b/00_オリエンテーション/【AI Native研修-提案】研修の概要.pptx
@@ -1143,64 +1143,10 @@
       </p:sp>
       <p:sp>
         <p:nvSpPr>
-          <p:cNvPr id="4" name="日付プレースホルダー 3">
+          <p:cNvPr id="9" name="スライド番号プレースホルダー 8">
             <a:extLst>
               <a:ext uri="{FF2B5EF4-FFF2-40B4-BE49-F238E27FC236}">
-                <a16:creationId xmlns:a16="http://schemas.microsoft.com/office/drawing/2014/main" id="{FFE4C389-7303-F6E2-A905-B7D704D1F620}"/>
-              </a:ext>
-            </a:extLst>
-          </p:cNvPr>
-          <p:cNvSpPr>
-            <a:spLocks noGrp="1"/>
-          </p:cNvSpPr>
-          <p:nvPr>
-            <p:ph type="dt" sz="half" idx="10"/>
-          </p:nvPr>
-        </p:nvSpPr>
-        <p:spPr/>
-        <p:txBody>
-          <a:bodyPr/>
-          <a:lstStyle/>
-          <a:p>
-            <a:fld id="{E3EFBC31-9ECA-48C0-910F-E09377915FB8}" type="datetimeFigureOut">
-              <a:rPr kumimoji="1" lang="ja-JP" altLang="en-US" smtClean="0"/>
-              <a:t>2026/7/5</a:t>
-            </a:fld>
-            <a:endParaRPr kumimoji="1" lang="ja-JP" altLang="en-US"/>
-          </a:p>
-        </p:txBody>
-      </p:sp>
-      <p:sp>
-        <p:nvSpPr>
-          <p:cNvPr id="5" name="フッター プレースホルダー 4">
-            <a:extLst>
-              <a:ext uri="{FF2B5EF4-FFF2-40B4-BE49-F238E27FC236}">
-                <a16:creationId xmlns:a16="http://schemas.microsoft.com/office/drawing/2014/main" id="{2CA5D6D8-D495-753D-963F-D2031F5490DC}"/>
-              </a:ext>
-            </a:extLst>
-          </p:cNvPr>
-          <p:cNvSpPr>
-            <a:spLocks noGrp="1"/>
-          </p:cNvSpPr>
-          <p:nvPr>
-            <p:ph type="ftr" sz="quarter" idx="11"/>
-          </p:nvPr>
-        </p:nvSpPr>
-        <p:spPr/>
-        <p:txBody>
-          <a:bodyPr/>
-          <a:lstStyle/>
-          <a:p>
-            <a:endParaRPr kumimoji="1" lang="ja-JP" altLang="en-US"/>
-          </a:p>
-        </p:txBody>
-      </p:sp>
-      <p:sp>
-        <p:nvSpPr>
-          <p:cNvPr id="6" name="スライド番号プレースホルダー 5">
-            <a:extLst>
-              <a:ext uri="{FF2B5EF4-FFF2-40B4-BE49-F238E27FC236}">
-                <a16:creationId xmlns:a16="http://schemas.microsoft.com/office/drawing/2014/main" id="{06B97719-44F6-07B6-2299-44CDBEF7F25E}"/>
+                <a16:creationId xmlns:a16="http://schemas.microsoft.com/office/drawing/2014/main" id="{7B0E450B-CE2B-C31B-FDFE-065FEE3F092C}"/>
               </a:ext>
             </a:extLst>
           </p:cNvPr>
@@ -1211,16 +1157,26 @@
             <p:ph type="sldNum" sz="quarter" idx="12"/>
           </p:nvPr>
         </p:nvSpPr>
-        <p:spPr/>
+        <p:spPr>
+          <a:xfrm>
+            <a:off x="8610600" y="6421667"/>
+            <a:ext cx="2743200" cy="365125"/>
+          </a:xfrm>
+        </p:spPr>
         <p:txBody>
           <a:bodyPr/>
-          <a:lstStyle/>
+          <a:lstStyle>
+            <a:lvl1pPr>
+              <a:defRPr sz="800"/>
+            </a:lvl1pPr>
+          </a:lstStyle>
           <a:p>
             <a:fld id="{9EBFBC76-F46F-4ADD-8228-9529630895ED}" type="slidenum">
-              <a:rPr kumimoji="1" lang="ja-JP" altLang="en-US" smtClean="0"/>
+              <a:rPr lang="ja-JP" altLang="en-US" smtClean="0"/>
+              <a:pPr/>
               <a:t>‹#›</a:t>
             </a:fld>
-            <a:endParaRPr kumimoji="1" lang="ja-JP" altLang="en-US"/>
+            <a:endParaRPr lang="ja-JP" altLang="en-US" dirty="0"/>
           </a:p>
         </p:txBody>
       </p:sp>
@@ -1228,476 +1184,6 @@
     <p:extLst>
       <p:ext uri="{BB962C8B-B14F-4D97-AF65-F5344CB8AC3E}">
         <p14:creationId xmlns:p14="http://schemas.microsoft.com/office/powerpoint/2010/main" val="2975453224"/>
-      </p:ext>
-    </p:extLst>
-  </p:cSld>
-  <p:clrMapOvr>
-    <a:masterClrMapping/>
-  </p:clrMapOvr>
-</p:sldLayout>
-</file>
-
-<file path=ppt/slideLayouts/slideLayout10.xml><?xml version="1.0" encoding="utf-8"?>
-<p:sldLayout xmlns:a="http://schemas.openxmlformats.org/drawingml/2006/main" xmlns:r="http://schemas.openxmlformats.org/officeDocument/2006/relationships" xmlns:p="http://schemas.openxmlformats.org/presentationml/2006/main" type="vertTx" preserve="1">
-  <p:cSld name="タイトルと縦書きテキスト">
-    <p:spTree>
-      <p:nvGrpSpPr>
-        <p:cNvPr id="1" name=""/>
-        <p:cNvGrpSpPr/>
-        <p:nvPr/>
-      </p:nvGrpSpPr>
-      <p:grpSpPr>
-        <a:xfrm>
-          <a:off x="0" y="0"/>
-          <a:ext cx="0" cy="0"/>
-          <a:chOff x="0" y="0"/>
-          <a:chExt cx="0" cy="0"/>
-        </a:xfrm>
-      </p:grpSpPr>
-      <p:sp>
-        <p:nvSpPr>
-          <p:cNvPr id="2" name="タイトル 1">
-            <a:extLst>
-              <a:ext uri="{FF2B5EF4-FFF2-40B4-BE49-F238E27FC236}">
-                <a16:creationId xmlns:a16="http://schemas.microsoft.com/office/drawing/2014/main" id="{B3D948F8-A898-A22B-7EF3-84E85241D754}"/>
-              </a:ext>
-            </a:extLst>
-          </p:cNvPr>
-          <p:cNvSpPr>
-            <a:spLocks noGrp="1"/>
-          </p:cNvSpPr>
-          <p:nvPr>
-            <p:ph type="title"/>
-          </p:nvPr>
-        </p:nvSpPr>
-        <p:spPr/>
-        <p:txBody>
-          <a:bodyPr/>
-          <a:lstStyle/>
-          <a:p>
-            <a:r>
-              <a:rPr kumimoji="1" lang="ja-JP" altLang="en-US"/>
-              <a:t>マスター タイトルの書式設定</a:t>
-            </a:r>
-          </a:p>
-        </p:txBody>
-      </p:sp>
-      <p:sp>
-        <p:nvSpPr>
-          <p:cNvPr id="3" name="縦書きテキスト プレースホルダー 2">
-            <a:extLst>
-              <a:ext uri="{FF2B5EF4-FFF2-40B4-BE49-F238E27FC236}">
-                <a16:creationId xmlns:a16="http://schemas.microsoft.com/office/drawing/2014/main" id="{EDB9CE3F-DD4B-FBB0-0358-E359990CFAE5}"/>
-              </a:ext>
-            </a:extLst>
-          </p:cNvPr>
-          <p:cNvSpPr>
-            <a:spLocks noGrp="1"/>
-          </p:cNvSpPr>
-          <p:nvPr>
-            <p:ph type="body" orient="vert" idx="1"/>
-          </p:nvPr>
-        </p:nvSpPr>
-        <p:spPr/>
-        <p:txBody>
-          <a:bodyPr vert="eaVert"/>
-          <a:lstStyle/>
-          <a:p>
-            <a:pPr lvl="0"/>
-            <a:r>
-              <a:rPr kumimoji="1" lang="ja-JP" altLang="en-US"/>
-              <a:t>マスター テキストの書式設定</a:t>
-            </a:r>
-          </a:p>
-          <a:p>
-            <a:pPr lvl="1"/>
-            <a:r>
-              <a:rPr kumimoji="1" lang="ja-JP" altLang="en-US"/>
-              <a:t>第 </a:t>
-            </a:r>
-            <a:r>
-              <a:rPr kumimoji="1" lang="en-US" altLang="ja-JP"/>
-              <a:t>2 </a:t>
-            </a:r>
-            <a:r>
-              <a:rPr kumimoji="1" lang="ja-JP" altLang="en-US"/>
-              <a:t>レベル</a:t>
-            </a:r>
-          </a:p>
-          <a:p>
-            <a:pPr lvl="2"/>
-            <a:r>
-              <a:rPr kumimoji="1" lang="ja-JP" altLang="en-US"/>
-              <a:t>第 </a:t>
-            </a:r>
-            <a:r>
-              <a:rPr kumimoji="1" lang="en-US" altLang="ja-JP"/>
-              <a:t>3 </a:t>
-            </a:r>
-            <a:r>
-              <a:rPr kumimoji="1" lang="ja-JP" altLang="en-US"/>
-              <a:t>レベル</a:t>
-            </a:r>
-          </a:p>
-          <a:p>
-            <a:pPr lvl="3"/>
-            <a:r>
-              <a:rPr kumimoji="1" lang="ja-JP" altLang="en-US"/>
-              <a:t>第 </a:t>
-            </a:r>
-            <a:r>
-              <a:rPr kumimoji="1" lang="en-US" altLang="ja-JP"/>
-              <a:t>4 </a:t>
-            </a:r>
-            <a:r>
-              <a:rPr kumimoji="1" lang="ja-JP" altLang="en-US"/>
-              <a:t>レベル</a:t>
-            </a:r>
-          </a:p>
-          <a:p>
-            <a:pPr lvl="4"/>
-            <a:r>
-              <a:rPr kumimoji="1" lang="ja-JP" altLang="en-US"/>
-              <a:t>第 </a:t>
-            </a:r>
-            <a:r>
-              <a:rPr kumimoji="1" lang="en-US" altLang="ja-JP"/>
-              <a:t>5 </a:t>
-            </a:r>
-            <a:r>
-              <a:rPr kumimoji="1" lang="ja-JP" altLang="en-US"/>
-              <a:t>レベル</a:t>
-            </a:r>
-          </a:p>
-        </p:txBody>
-      </p:sp>
-      <p:sp>
-        <p:nvSpPr>
-          <p:cNvPr id="4" name="日付プレースホルダー 3">
-            <a:extLst>
-              <a:ext uri="{FF2B5EF4-FFF2-40B4-BE49-F238E27FC236}">
-                <a16:creationId xmlns:a16="http://schemas.microsoft.com/office/drawing/2014/main" id="{D8A1EFE8-83F8-C673-6466-09628A8801F9}"/>
-              </a:ext>
-            </a:extLst>
-          </p:cNvPr>
-          <p:cNvSpPr>
-            <a:spLocks noGrp="1"/>
-          </p:cNvSpPr>
-          <p:nvPr>
-            <p:ph type="dt" sz="half" idx="10"/>
-          </p:nvPr>
-        </p:nvSpPr>
-        <p:spPr/>
-        <p:txBody>
-          <a:bodyPr/>
-          <a:lstStyle/>
-          <a:p>
-            <a:fld id="{E3EFBC31-9ECA-48C0-910F-E09377915FB8}" type="datetimeFigureOut">
-              <a:rPr kumimoji="1" lang="ja-JP" altLang="en-US" smtClean="0"/>
-              <a:t>2026/7/5</a:t>
-            </a:fld>
-            <a:endParaRPr kumimoji="1" lang="ja-JP" altLang="en-US"/>
-          </a:p>
-        </p:txBody>
-      </p:sp>
-      <p:sp>
-        <p:nvSpPr>
-          <p:cNvPr id="5" name="フッター プレースホルダー 4">
-            <a:extLst>
-              <a:ext uri="{FF2B5EF4-FFF2-40B4-BE49-F238E27FC236}">
-                <a16:creationId xmlns:a16="http://schemas.microsoft.com/office/drawing/2014/main" id="{18A29062-6AC9-DD4E-C20C-3568B001C141}"/>
-              </a:ext>
-            </a:extLst>
-          </p:cNvPr>
-          <p:cNvSpPr>
-            <a:spLocks noGrp="1"/>
-          </p:cNvSpPr>
-          <p:nvPr>
-            <p:ph type="ftr" sz="quarter" idx="11"/>
-          </p:nvPr>
-        </p:nvSpPr>
-        <p:spPr/>
-        <p:txBody>
-          <a:bodyPr/>
-          <a:lstStyle/>
-          <a:p>
-            <a:endParaRPr kumimoji="1" lang="ja-JP" altLang="en-US"/>
-          </a:p>
-        </p:txBody>
-      </p:sp>
-      <p:sp>
-        <p:nvSpPr>
-          <p:cNvPr id="6" name="スライド番号プレースホルダー 5">
-            <a:extLst>
-              <a:ext uri="{FF2B5EF4-FFF2-40B4-BE49-F238E27FC236}">
-                <a16:creationId xmlns:a16="http://schemas.microsoft.com/office/drawing/2014/main" id="{6FC21EC4-135A-AB14-091E-CA0A0AA389BF}"/>
-              </a:ext>
-            </a:extLst>
-          </p:cNvPr>
-          <p:cNvSpPr>
-            <a:spLocks noGrp="1"/>
-          </p:cNvSpPr>
-          <p:nvPr>
-            <p:ph type="sldNum" sz="quarter" idx="12"/>
-          </p:nvPr>
-        </p:nvSpPr>
-        <p:spPr/>
-        <p:txBody>
-          <a:bodyPr/>
-          <a:lstStyle/>
-          <a:p>
-            <a:fld id="{9EBFBC76-F46F-4ADD-8228-9529630895ED}" type="slidenum">
-              <a:rPr kumimoji="1" lang="ja-JP" altLang="en-US" smtClean="0"/>
-              <a:t>‹#›</a:t>
-            </a:fld>
-            <a:endParaRPr kumimoji="1" lang="ja-JP" altLang="en-US"/>
-          </a:p>
-        </p:txBody>
-      </p:sp>
-    </p:spTree>
-    <p:extLst>
-      <p:ext uri="{BB962C8B-B14F-4D97-AF65-F5344CB8AC3E}">
-        <p14:creationId xmlns:p14="http://schemas.microsoft.com/office/powerpoint/2010/main" val="2011069350"/>
-      </p:ext>
-    </p:extLst>
-  </p:cSld>
-  <p:clrMapOvr>
-    <a:masterClrMapping/>
-  </p:clrMapOvr>
-</p:sldLayout>
-</file>
-
-<file path=ppt/slideLayouts/slideLayout11.xml><?xml version="1.0" encoding="utf-8"?>
-<p:sldLayout xmlns:a="http://schemas.openxmlformats.org/drawingml/2006/main" xmlns:r="http://schemas.openxmlformats.org/officeDocument/2006/relationships" xmlns:p="http://schemas.openxmlformats.org/presentationml/2006/main" type="vertTitleAndTx" preserve="1">
-  <p:cSld name="縦書きタイトルと&#10;縦書きテキスト">
-    <p:spTree>
-      <p:nvGrpSpPr>
-        <p:cNvPr id="1" name=""/>
-        <p:cNvGrpSpPr/>
-        <p:nvPr/>
-      </p:nvGrpSpPr>
-      <p:grpSpPr>
-        <a:xfrm>
-          <a:off x="0" y="0"/>
-          <a:ext cx="0" cy="0"/>
-          <a:chOff x="0" y="0"/>
-          <a:chExt cx="0" cy="0"/>
-        </a:xfrm>
-      </p:grpSpPr>
-      <p:sp>
-        <p:nvSpPr>
-          <p:cNvPr id="2" name="縦書きタイトル 1">
-            <a:extLst>
-              <a:ext uri="{FF2B5EF4-FFF2-40B4-BE49-F238E27FC236}">
-                <a16:creationId xmlns:a16="http://schemas.microsoft.com/office/drawing/2014/main" id="{28A78528-6686-7717-9395-A6791781DC1D}"/>
-              </a:ext>
-            </a:extLst>
-          </p:cNvPr>
-          <p:cNvSpPr>
-            <a:spLocks noGrp="1"/>
-          </p:cNvSpPr>
-          <p:nvPr>
-            <p:ph type="title" orient="vert"/>
-          </p:nvPr>
-        </p:nvSpPr>
-        <p:spPr>
-          <a:xfrm>
-            <a:off x="8724900" y="365125"/>
-            <a:ext cx="2628900" cy="5811838"/>
-          </a:xfrm>
-        </p:spPr>
-        <p:txBody>
-          <a:bodyPr vert="eaVert"/>
-          <a:lstStyle/>
-          <a:p>
-            <a:r>
-              <a:rPr kumimoji="1" lang="ja-JP" altLang="en-US"/>
-              <a:t>マスター タイトルの書式設定</a:t>
-            </a:r>
-          </a:p>
-        </p:txBody>
-      </p:sp>
-      <p:sp>
-        <p:nvSpPr>
-          <p:cNvPr id="3" name="縦書きテキスト プレースホルダー 2">
-            <a:extLst>
-              <a:ext uri="{FF2B5EF4-FFF2-40B4-BE49-F238E27FC236}">
-                <a16:creationId xmlns:a16="http://schemas.microsoft.com/office/drawing/2014/main" id="{A8779115-C3F1-5580-1C82-172ACF121ED1}"/>
-              </a:ext>
-            </a:extLst>
-          </p:cNvPr>
-          <p:cNvSpPr>
-            <a:spLocks noGrp="1"/>
-          </p:cNvSpPr>
-          <p:nvPr>
-            <p:ph type="body" orient="vert" idx="1"/>
-          </p:nvPr>
-        </p:nvSpPr>
-        <p:spPr>
-          <a:xfrm>
-            <a:off x="838200" y="365125"/>
-            <a:ext cx="7734300" cy="5811838"/>
-          </a:xfrm>
-        </p:spPr>
-        <p:txBody>
-          <a:bodyPr vert="eaVert"/>
-          <a:lstStyle/>
-          <a:p>
-            <a:pPr lvl="0"/>
-            <a:r>
-              <a:rPr kumimoji="1" lang="ja-JP" altLang="en-US"/>
-              <a:t>マスター テキストの書式設定</a:t>
-            </a:r>
-          </a:p>
-          <a:p>
-            <a:pPr lvl="1"/>
-            <a:r>
-              <a:rPr kumimoji="1" lang="ja-JP" altLang="en-US"/>
-              <a:t>第 </a:t>
-            </a:r>
-            <a:r>
-              <a:rPr kumimoji="1" lang="en-US" altLang="ja-JP"/>
-              <a:t>2 </a:t>
-            </a:r>
-            <a:r>
-              <a:rPr kumimoji="1" lang="ja-JP" altLang="en-US"/>
-              <a:t>レベル</a:t>
-            </a:r>
-          </a:p>
-          <a:p>
-            <a:pPr lvl="2"/>
-            <a:r>
-              <a:rPr kumimoji="1" lang="ja-JP" altLang="en-US"/>
-              <a:t>第 </a:t>
-            </a:r>
-            <a:r>
-              <a:rPr kumimoji="1" lang="en-US" altLang="ja-JP"/>
-              <a:t>3 </a:t>
-            </a:r>
-            <a:r>
-              <a:rPr kumimoji="1" lang="ja-JP" altLang="en-US"/>
-              <a:t>レベル</a:t>
-            </a:r>
-          </a:p>
-          <a:p>
-            <a:pPr lvl="3"/>
-            <a:r>
-              <a:rPr kumimoji="1" lang="ja-JP" altLang="en-US"/>
-              <a:t>第 </a:t>
-            </a:r>
-            <a:r>
-              <a:rPr kumimoji="1" lang="en-US" altLang="ja-JP"/>
-              <a:t>4 </a:t>
-            </a:r>
-            <a:r>
-              <a:rPr kumimoji="1" lang="ja-JP" altLang="en-US"/>
-              <a:t>レベル</a:t>
-            </a:r>
-          </a:p>
-          <a:p>
-            <a:pPr lvl="4"/>
-            <a:r>
-              <a:rPr kumimoji="1" lang="ja-JP" altLang="en-US"/>
-              <a:t>第 </a:t>
-            </a:r>
-            <a:r>
-              <a:rPr kumimoji="1" lang="en-US" altLang="ja-JP"/>
-              <a:t>5 </a:t>
-            </a:r>
-            <a:r>
-              <a:rPr kumimoji="1" lang="ja-JP" altLang="en-US"/>
-              <a:t>レベル</a:t>
-            </a:r>
-          </a:p>
-        </p:txBody>
-      </p:sp>
-      <p:sp>
-        <p:nvSpPr>
-          <p:cNvPr id="4" name="日付プレースホルダー 3">
-            <a:extLst>
-              <a:ext uri="{FF2B5EF4-FFF2-40B4-BE49-F238E27FC236}">
-                <a16:creationId xmlns:a16="http://schemas.microsoft.com/office/drawing/2014/main" id="{7227D618-FA30-2F16-A3BA-1C48127BFE97}"/>
-              </a:ext>
-            </a:extLst>
-          </p:cNvPr>
-          <p:cNvSpPr>
-            <a:spLocks noGrp="1"/>
-          </p:cNvSpPr>
-          <p:nvPr>
-            <p:ph type="dt" sz="half" idx="10"/>
-          </p:nvPr>
-        </p:nvSpPr>
-        <p:spPr/>
-        <p:txBody>
-          <a:bodyPr/>
-          <a:lstStyle/>
-          <a:p>
-            <a:fld id="{E3EFBC31-9ECA-48C0-910F-E09377915FB8}" type="datetimeFigureOut">
-              <a:rPr kumimoji="1" lang="ja-JP" altLang="en-US" smtClean="0"/>
-              <a:t>2026/7/5</a:t>
-            </a:fld>
-            <a:endParaRPr kumimoji="1" lang="ja-JP" altLang="en-US"/>
-          </a:p>
-        </p:txBody>
-      </p:sp>
-      <p:sp>
-        <p:nvSpPr>
-          <p:cNvPr id="5" name="フッター プレースホルダー 4">
-            <a:extLst>
-              <a:ext uri="{FF2B5EF4-FFF2-40B4-BE49-F238E27FC236}">
-                <a16:creationId xmlns:a16="http://schemas.microsoft.com/office/drawing/2014/main" id="{0C6D16EA-23E0-4DB0-E96D-371B623EEC34}"/>
-              </a:ext>
-            </a:extLst>
-          </p:cNvPr>
-          <p:cNvSpPr>
-            <a:spLocks noGrp="1"/>
-          </p:cNvSpPr>
-          <p:nvPr>
-            <p:ph type="ftr" sz="quarter" idx="11"/>
-          </p:nvPr>
-        </p:nvSpPr>
-        <p:spPr/>
-        <p:txBody>
-          <a:bodyPr/>
-          <a:lstStyle/>
-          <a:p>
-            <a:endParaRPr kumimoji="1" lang="ja-JP" altLang="en-US"/>
-          </a:p>
-        </p:txBody>
-      </p:sp>
-      <p:sp>
-        <p:nvSpPr>
-          <p:cNvPr id="6" name="スライド番号プレースホルダー 5">
-            <a:extLst>
-              <a:ext uri="{FF2B5EF4-FFF2-40B4-BE49-F238E27FC236}">
-                <a16:creationId xmlns:a16="http://schemas.microsoft.com/office/drawing/2014/main" id="{1F350307-06A9-2F31-4E2F-74756A586547}"/>
-              </a:ext>
-            </a:extLst>
-          </p:cNvPr>
-          <p:cNvSpPr>
-            <a:spLocks noGrp="1"/>
-          </p:cNvSpPr>
-          <p:nvPr>
-            <p:ph type="sldNum" sz="quarter" idx="12"/>
-          </p:nvPr>
-        </p:nvSpPr>
-        <p:spPr/>
-        <p:txBody>
-          <a:bodyPr/>
-          <a:lstStyle/>
-          <a:p>
-            <a:fld id="{9EBFBC76-F46F-4ADD-8228-9529630895ED}" type="slidenum">
-              <a:rPr kumimoji="1" lang="ja-JP" altLang="en-US" smtClean="0"/>
-              <a:t>‹#›</a:t>
-            </a:fld>
-            <a:endParaRPr kumimoji="1" lang="ja-JP" altLang="en-US"/>
-          </a:p>
-        </p:txBody>
-      </p:sp>
-    </p:spTree>
-    <p:extLst>
-      <p:ext uri="{BB962C8B-B14F-4D97-AF65-F5344CB8AC3E}">
-        <p14:creationId xmlns:p14="http://schemas.microsoft.com/office/powerpoint/2010/main" val="1693637340"/>
       </p:ext>
     </p:extLst>
   </p:cSld>
@@ -1724,89 +1210,6 @@
           <a:chExt cx="0" cy="0"/>
         </a:xfrm>
       </p:grpSpPr>
-      <p:sp>
-        <p:nvSpPr>
-          <p:cNvPr id="4" name="日付プレースホルダー 3">
-            <a:extLst>
-              <a:ext uri="{FF2B5EF4-FFF2-40B4-BE49-F238E27FC236}">
-                <a16:creationId xmlns:a16="http://schemas.microsoft.com/office/drawing/2014/main" id="{311DBD3B-56FD-917A-7F5A-3015D9774F18}"/>
-              </a:ext>
-            </a:extLst>
-          </p:cNvPr>
-          <p:cNvSpPr>
-            <a:spLocks noGrp="1"/>
-          </p:cNvSpPr>
-          <p:nvPr>
-            <p:ph type="dt" sz="half" idx="10"/>
-          </p:nvPr>
-        </p:nvSpPr>
-        <p:spPr/>
-        <p:txBody>
-          <a:bodyPr/>
-          <a:lstStyle/>
-          <a:p>
-            <a:fld id="{E3EFBC31-9ECA-48C0-910F-E09377915FB8}" type="datetimeFigureOut">
-              <a:rPr kumimoji="1" lang="ja-JP" altLang="en-US" smtClean="0"/>
-              <a:t>2026/7/5</a:t>
-            </a:fld>
-            <a:endParaRPr kumimoji="1" lang="ja-JP" altLang="en-US"/>
-          </a:p>
-        </p:txBody>
-      </p:sp>
-      <p:sp>
-        <p:nvSpPr>
-          <p:cNvPr id="5" name="フッター プレースホルダー 4">
-            <a:extLst>
-              <a:ext uri="{FF2B5EF4-FFF2-40B4-BE49-F238E27FC236}">
-                <a16:creationId xmlns:a16="http://schemas.microsoft.com/office/drawing/2014/main" id="{8F2DC64E-F29E-D854-BEF0-3070C545D5CA}"/>
-              </a:ext>
-            </a:extLst>
-          </p:cNvPr>
-          <p:cNvSpPr>
-            <a:spLocks noGrp="1"/>
-          </p:cNvSpPr>
-          <p:nvPr>
-            <p:ph type="ftr" sz="quarter" idx="11"/>
-          </p:nvPr>
-        </p:nvSpPr>
-        <p:spPr/>
-        <p:txBody>
-          <a:bodyPr/>
-          <a:lstStyle/>
-          <a:p>
-            <a:endParaRPr kumimoji="1" lang="ja-JP" altLang="en-US"/>
-          </a:p>
-        </p:txBody>
-      </p:sp>
-      <p:sp>
-        <p:nvSpPr>
-          <p:cNvPr id="6" name="スライド番号プレースホルダー 5">
-            <a:extLst>
-              <a:ext uri="{FF2B5EF4-FFF2-40B4-BE49-F238E27FC236}">
-                <a16:creationId xmlns:a16="http://schemas.microsoft.com/office/drawing/2014/main" id="{7548F59C-A5D5-E9EE-6BFB-1E812ECDBA45}"/>
-              </a:ext>
-            </a:extLst>
-          </p:cNvPr>
-          <p:cNvSpPr>
-            <a:spLocks noGrp="1"/>
-          </p:cNvSpPr>
-          <p:nvPr>
-            <p:ph type="sldNum" sz="quarter" idx="12"/>
-          </p:nvPr>
-        </p:nvSpPr>
-        <p:spPr/>
-        <p:txBody>
-          <a:bodyPr/>
-          <a:lstStyle/>
-          <a:p>
-            <a:fld id="{9EBFBC76-F46F-4ADD-8228-9529630895ED}" type="slidenum">
-              <a:rPr kumimoji="1" lang="ja-JP" altLang="en-US" smtClean="0"/>
-              <a:t>‹#›</a:t>
-            </a:fld>
-            <a:endParaRPr kumimoji="1" lang="ja-JP" altLang="en-US"/>
-          </a:p>
-        </p:txBody>
-      </p:sp>
       <p:sp>
         <p:nvSpPr>
           <p:cNvPr id="7" name="タイトル 1">
@@ -1873,7 +1276,13 @@
         </p:spPr>
         <p:txBody>
           <a:bodyPr/>
-          <a:lstStyle/>
+          <a:lstStyle>
+            <a:lvl2pPr marL="914400" indent="-457200">
+              <a:buFont typeface="+mj-lt"/>
+              <a:buAutoNum type="arabicPeriod"/>
+              <a:defRPr/>
+            </a:lvl2pPr>
+          </a:lstStyle>
           <a:p>
             <a:pPr lvl="0"/>
             <a:r>
@@ -1940,6 +1349,45 @@
               <a:rPr kumimoji="1" lang="ja-JP" altLang="en-US" dirty="0"/>
               <a:t>レベル</a:t>
             </a:r>
+          </a:p>
+        </p:txBody>
+      </p:sp>
+      <p:sp>
+        <p:nvSpPr>
+          <p:cNvPr id="10" name="スライド番号プレースホルダー 8">
+            <a:extLst>
+              <a:ext uri="{FF2B5EF4-FFF2-40B4-BE49-F238E27FC236}">
+                <a16:creationId xmlns:a16="http://schemas.microsoft.com/office/drawing/2014/main" id="{22D7A308-0628-F881-8567-86E4E9532F9D}"/>
+              </a:ext>
+            </a:extLst>
+          </p:cNvPr>
+          <p:cNvSpPr>
+            <a:spLocks noGrp="1"/>
+          </p:cNvSpPr>
+          <p:nvPr>
+            <p:ph type="sldNum" sz="quarter" idx="12"/>
+          </p:nvPr>
+        </p:nvSpPr>
+        <p:spPr>
+          <a:xfrm>
+            <a:off x="8610600" y="6421667"/>
+            <a:ext cx="2743200" cy="365125"/>
+          </a:xfrm>
+        </p:spPr>
+        <p:txBody>
+          <a:bodyPr/>
+          <a:lstStyle>
+            <a:lvl1pPr>
+              <a:defRPr sz="800"/>
+            </a:lvl1pPr>
+          </a:lstStyle>
+          <a:p>
+            <a:fld id="{9EBFBC76-F46F-4ADD-8228-9529630895ED}" type="slidenum">
+              <a:rPr lang="ja-JP" altLang="en-US" smtClean="0"/>
+              <a:pPr/>
+              <a:t>‹#›</a:t>
+            </a:fld>
+            <a:endParaRPr lang="ja-JP" altLang="en-US" dirty="0"/>
           </a:p>
         </p:txBody>
       </p:sp>
@@ -1957,6 +1405,217 @@
 </file>
 
 <file path=ppt/slideLayouts/slideLayout3.xml><?xml version="1.0" encoding="utf-8"?>
+<p:sldLayout xmlns:a="http://schemas.openxmlformats.org/drawingml/2006/main" xmlns:r="http://schemas.openxmlformats.org/officeDocument/2006/relationships" xmlns:p="http://schemas.openxmlformats.org/presentationml/2006/main" preserve="1" userDrawn="1">
+  <p:cSld name="1_タイトルとコンテンツ">
+    <p:spTree>
+      <p:nvGrpSpPr>
+        <p:cNvPr id="1" name=""/>
+        <p:cNvGrpSpPr/>
+        <p:nvPr/>
+      </p:nvGrpSpPr>
+      <p:grpSpPr>
+        <a:xfrm>
+          <a:off x="0" y="0"/>
+          <a:ext cx="0" cy="0"/>
+          <a:chOff x="0" y="0"/>
+          <a:chExt cx="0" cy="0"/>
+        </a:xfrm>
+      </p:grpSpPr>
+      <p:sp>
+        <p:nvSpPr>
+          <p:cNvPr id="7" name="タイトル 1">
+            <a:extLst>
+              <a:ext uri="{FF2B5EF4-FFF2-40B4-BE49-F238E27FC236}">
+                <a16:creationId xmlns:a16="http://schemas.microsoft.com/office/drawing/2014/main" id="{01664F20-F7C0-E482-4CCD-A50874056B4D}"/>
+              </a:ext>
+            </a:extLst>
+          </p:cNvPr>
+          <p:cNvSpPr>
+            <a:spLocks noGrp="1"/>
+          </p:cNvSpPr>
+          <p:nvPr>
+            <p:ph type="title"/>
+          </p:nvPr>
+        </p:nvSpPr>
+        <p:spPr>
+          <a:xfrm>
+            <a:off x="167951" y="365124"/>
+            <a:ext cx="11877869" cy="540000"/>
+          </a:xfrm>
+        </p:spPr>
+        <p:txBody>
+          <a:bodyPr>
+            <a:normAutofit/>
+          </a:bodyPr>
+          <a:lstStyle>
+            <a:lvl1pPr>
+              <a:defRPr sz="2400" b="1">
+                <a:latin typeface="Meiryo UI" panose="020B0604030504040204" pitchFamily="50" charset="-128"/>
+                <a:ea typeface="Meiryo UI" panose="020B0604030504040204" pitchFamily="50" charset="-128"/>
+              </a:defRPr>
+            </a:lvl1pPr>
+          </a:lstStyle>
+          <a:p>
+            <a:r>
+              <a:rPr kumimoji="1" lang="ja-JP" altLang="en-US" dirty="0"/>
+              <a:t>マスター タイトルの書式設定</a:t>
+            </a:r>
+          </a:p>
+        </p:txBody>
+      </p:sp>
+      <p:sp>
+        <p:nvSpPr>
+          <p:cNvPr id="8" name="コンテンツ プレースホルダー 2">
+            <a:extLst>
+              <a:ext uri="{FF2B5EF4-FFF2-40B4-BE49-F238E27FC236}">
+                <a16:creationId xmlns:a16="http://schemas.microsoft.com/office/drawing/2014/main" id="{759E38C0-9660-9A49-7A90-097EDCC0796E}"/>
+              </a:ext>
+            </a:extLst>
+          </p:cNvPr>
+          <p:cNvSpPr>
+            <a:spLocks noGrp="1"/>
+          </p:cNvSpPr>
+          <p:nvPr>
+            <p:ph idx="1"/>
+          </p:nvPr>
+        </p:nvSpPr>
+        <p:spPr>
+          <a:xfrm>
+            <a:off x="167951" y="1073020"/>
+            <a:ext cx="11877869" cy="5103943"/>
+          </a:xfrm>
+        </p:spPr>
+        <p:txBody>
+          <a:bodyPr/>
+          <a:lstStyle>
+            <a:lvl2pPr marL="914400" indent="-457200">
+              <a:buFont typeface="Arial" panose="020B0604020202020204" pitchFamily="34" charset="0"/>
+              <a:buChar char="•"/>
+              <a:defRPr/>
+            </a:lvl2pPr>
+          </a:lstStyle>
+          <a:p>
+            <a:pPr lvl="0"/>
+            <a:r>
+              <a:rPr kumimoji="1" lang="ja-JP" altLang="en-US" dirty="0"/>
+              <a:t>マスター テキストの書式設定</a:t>
+            </a:r>
+          </a:p>
+          <a:p>
+            <a:pPr lvl="1"/>
+            <a:r>
+              <a:rPr kumimoji="1" lang="ja-JP" altLang="en-US" dirty="0"/>
+              <a:t>第 </a:t>
+            </a:r>
+            <a:r>
+              <a:rPr kumimoji="1" lang="en-US" altLang="ja-JP" dirty="0"/>
+              <a:t>2 </a:t>
+            </a:r>
+            <a:r>
+              <a:rPr kumimoji="1" lang="ja-JP" altLang="en-US" dirty="0"/>
+              <a:t>レベル</a:t>
+            </a:r>
+          </a:p>
+          <a:p>
+            <a:pPr lvl="2"/>
+            <a:r>
+              <a:rPr kumimoji="1" lang="ja-JP" altLang="en-US" dirty="0"/>
+              <a:t>第 </a:t>
+            </a:r>
+            <a:r>
+              <a:rPr kumimoji="1" lang="en-US" altLang="ja-JP" dirty="0"/>
+              <a:t>3 </a:t>
+            </a:r>
+            <a:r>
+              <a:rPr kumimoji="1" lang="ja-JP" altLang="en-US" dirty="0"/>
+              <a:t>レベル</a:t>
+            </a:r>
+          </a:p>
+          <a:p>
+            <a:pPr lvl="3"/>
+            <a:r>
+              <a:rPr kumimoji="1" lang="ja-JP" altLang="en-US" dirty="0"/>
+              <a:t>第 </a:t>
+            </a:r>
+            <a:r>
+              <a:rPr kumimoji="1" lang="en-US" altLang="ja-JP" dirty="0"/>
+              <a:t>4 </a:t>
+            </a:r>
+            <a:r>
+              <a:rPr kumimoji="1" lang="ja-JP" altLang="en-US" dirty="0"/>
+              <a:t>レベル</a:t>
+            </a:r>
+          </a:p>
+          <a:p>
+            <a:pPr lvl="4"/>
+            <a:r>
+              <a:rPr kumimoji="1" lang="ja-JP" altLang="en-US" dirty="0"/>
+              <a:t>第 </a:t>
+            </a:r>
+            <a:r>
+              <a:rPr kumimoji="1" lang="en-US" altLang="ja-JP" dirty="0"/>
+              <a:t>5 </a:t>
+            </a:r>
+            <a:r>
+              <a:rPr kumimoji="1" lang="ja-JP" altLang="en-US" dirty="0"/>
+              <a:t>レベル</a:t>
+            </a:r>
+          </a:p>
+        </p:txBody>
+      </p:sp>
+      <p:sp>
+        <p:nvSpPr>
+          <p:cNvPr id="10" name="スライド番号プレースホルダー 8">
+            <a:extLst>
+              <a:ext uri="{FF2B5EF4-FFF2-40B4-BE49-F238E27FC236}">
+                <a16:creationId xmlns:a16="http://schemas.microsoft.com/office/drawing/2014/main" id="{22D7A308-0628-F881-8567-86E4E9532F9D}"/>
+              </a:ext>
+            </a:extLst>
+          </p:cNvPr>
+          <p:cNvSpPr>
+            <a:spLocks noGrp="1"/>
+          </p:cNvSpPr>
+          <p:nvPr>
+            <p:ph type="sldNum" sz="quarter" idx="12"/>
+          </p:nvPr>
+        </p:nvSpPr>
+        <p:spPr>
+          <a:xfrm>
+            <a:off x="8610600" y="6421667"/>
+            <a:ext cx="2743200" cy="365125"/>
+          </a:xfrm>
+        </p:spPr>
+        <p:txBody>
+          <a:bodyPr/>
+          <a:lstStyle>
+            <a:lvl1pPr>
+              <a:defRPr sz="800"/>
+            </a:lvl1pPr>
+          </a:lstStyle>
+          <a:p>
+            <a:fld id="{9EBFBC76-F46F-4ADD-8228-9529630895ED}" type="slidenum">
+              <a:rPr lang="ja-JP" altLang="en-US" smtClean="0"/>
+              <a:pPr/>
+              <a:t>‹#›</a:t>
+            </a:fld>
+            <a:endParaRPr lang="ja-JP" altLang="en-US" dirty="0"/>
+          </a:p>
+        </p:txBody>
+      </p:sp>
+    </p:spTree>
+    <p:extLst>
+      <p:ext uri="{BB962C8B-B14F-4D97-AF65-F5344CB8AC3E}">
+        <p14:creationId xmlns:p14="http://schemas.microsoft.com/office/powerpoint/2010/main" val="2384987877"/>
+      </p:ext>
+    </p:extLst>
+  </p:cSld>
+  <p:clrMapOvr>
+    <a:masterClrMapping/>
+  </p:clrMapOvr>
+</p:sldLayout>
+</file>
+
+<file path=ppt/slideLayouts/slideLayout4.xml><?xml version="1.0" encoding="utf-8"?>
 <p:sldLayout xmlns:a="http://schemas.openxmlformats.org/drawingml/2006/main" xmlns:r="http://schemas.openxmlformats.org/officeDocument/2006/relationships" xmlns:p="http://schemas.openxmlformats.org/presentationml/2006/main" type="secHead" preserve="1">
   <p:cSld name="セクション見出し">
     <p:spTree>
@@ -2137,64 +1796,10 @@
       </p:sp>
       <p:sp>
         <p:nvSpPr>
-          <p:cNvPr id="4" name="日付プレースホルダー 3">
+          <p:cNvPr id="7" name="スライド番号プレースホルダー 8">
             <a:extLst>
               <a:ext uri="{FF2B5EF4-FFF2-40B4-BE49-F238E27FC236}">
-                <a16:creationId xmlns:a16="http://schemas.microsoft.com/office/drawing/2014/main" id="{2AC23C55-8327-924C-2B72-D685D3026055}"/>
-              </a:ext>
-            </a:extLst>
-          </p:cNvPr>
-          <p:cNvSpPr>
-            <a:spLocks noGrp="1"/>
-          </p:cNvSpPr>
-          <p:nvPr>
-            <p:ph type="dt" sz="half" idx="10"/>
-          </p:nvPr>
-        </p:nvSpPr>
-        <p:spPr/>
-        <p:txBody>
-          <a:bodyPr/>
-          <a:lstStyle/>
-          <a:p>
-            <a:fld id="{E3EFBC31-9ECA-48C0-910F-E09377915FB8}" type="datetimeFigureOut">
-              <a:rPr kumimoji="1" lang="ja-JP" altLang="en-US" smtClean="0"/>
-              <a:t>2026/7/5</a:t>
-            </a:fld>
-            <a:endParaRPr kumimoji="1" lang="ja-JP" altLang="en-US"/>
-          </a:p>
-        </p:txBody>
-      </p:sp>
-      <p:sp>
-        <p:nvSpPr>
-          <p:cNvPr id="5" name="フッター プレースホルダー 4">
-            <a:extLst>
-              <a:ext uri="{FF2B5EF4-FFF2-40B4-BE49-F238E27FC236}">
-                <a16:creationId xmlns:a16="http://schemas.microsoft.com/office/drawing/2014/main" id="{AB1B9B42-5325-6348-7A2E-823A20CCF2C1}"/>
-              </a:ext>
-            </a:extLst>
-          </p:cNvPr>
-          <p:cNvSpPr>
-            <a:spLocks noGrp="1"/>
-          </p:cNvSpPr>
-          <p:nvPr>
-            <p:ph type="ftr" sz="quarter" idx="11"/>
-          </p:nvPr>
-        </p:nvSpPr>
-        <p:spPr/>
-        <p:txBody>
-          <a:bodyPr/>
-          <a:lstStyle/>
-          <a:p>
-            <a:endParaRPr kumimoji="1" lang="ja-JP" altLang="en-US"/>
-          </a:p>
-        </p:txBody>
-      </p:sp>
-      <p:sp>
-        <p:nvSpPr>
-          <p:cNvPr id="6" name="スライド番号プレースホルダー 5">
-            <a:extLst>
-              <a:ext uri="{FF2B5EF4-FFF2-40B4-BE49-F238E27FC236}">
-                <a16:creationId xmlns:a16="http://schemas.microsoft.com/office/drawing/2014/main" id="{0B0BB805-FA2B-03EC-E53A-E3CA558927B4}"/>
+                <a16:creationId xmlns:a16="http://schemas.microsoft.com/office/drawing/2014/main" id="{51D98275-5521-9186-79B1-A367B515DB90}"/>
               </a:ext>
             </a:extLst>
           </p:cNvPr>
@@ -2205,16 +1810,26 @@
             <p:ph type="sldNum" sz="quarter" idx="12"/>
           </p:nvPr>
         </p:nvSpPr>
-        <p:spPr/>
+        <p:spPr>
+          <a:xfrm>
+            <a:off x="8610600" y="6421667"/>
+            <a:ext cx="2743200" cy="365125"/>
+          </a:xfrm>
+        </p:spPr>
         <p:txBody>
           <a:bodyPr/>
-          <a:lstStyle/>
+          <a:lstStyle>
+            <a:lvl1pPr>
+              <a:defRPr sz="800"/>
+            </a:lvl1pPr>
+          </a:lstStyle>
           <a:p>
             <a:fld id="{9EBFBC76-F46F-4ADD-8228-9529630895ED}" type="slidenum">
-              <a:rPr kumimoji="1" lang="ja-JP" altLang="en-US" smtClean="0"/>
+              <a:rPr lang="ja-JP" altLang="en-US" smtClean="0"/>
+              <a:pPr/>
               <a:t>‹#›</a:t>
             </a:fld>
-            <a:endParaRPr kumimoji="1" lang="ja-JP" altLang="en-US"/>
+            <a:endParaRPr lang="ja-JP" altLang="en-US" dirty="0"/>
           </a:p>
         </p:txBody>
       </p:sp>
@@ -2222,1696 +1837,6 @@
     <p:extLst>
       <p:ext uri="{BB962C8B-B14F-4D97-AF65-F5344CB8AC3E}">
         <p14:creationId xmlns:p14="http://schemas.microsoft.com/office/powerpoint/2010/main" val="3841387114"/>
-      </p:ext>
-    </p:extLst>
-  </p:cSld>
-  <p:clrMapOvr>
-    <a:masterClrMapping/>
-  </p:clrMapOvr>
-</p:sldLayout>
-</file>
-
-<file path=ppt/slideLayouts/slideLayout4.xml><?xml version="1.0" encoding="utf-8"?>
-<p:sldLayout xmlns:a="http://schemas.openxmlformats.org/drawingml/2006/main" xmlns:r="http://schemas.openxmlformats.org/officeDocument/2006/relationships" xmlns:p="http://schemas.openxmlformats.org/presentationml/2006/main" type="twoObj" preserve="1">
-  <p:cSld name="2 つのコンテンツ">
-    <p:spTree>
-      <p:nvGrpSpPr>
-        <p:cNvPr id="1" name=""/>
-        <p:cNvGrpSpPr/>
-        <p:nvPr/>
-      </p:nvGrpSpPr>
-      <p:grpSpPr>
-        <a:xfrm>
-          <a:off x="0" y="0"/>
-          <a:ext cx="0" cy="0"/>
-          <a:chOff x="0" y="0"/>
-          <a:chExt cx="0" cy="0"/>
-        </a:xfrm>
-      </p:grpSpPr>
-      <p:sp>
-        <p:nvSpPr>
-          <p:cNvPr id="2" name="タイトル 1">
-            <a:extLst>
-              <a:ext uri="{FF2B5EF4-FFF2-40B4-BE49-F238E27FC236}">
-                <a16:creationId xmlns:a16="http://schemas.microsoft.com/office/drawing/2014/main" id="{C82A8F03-F9A4-C9E1-8930-9B9AF0D34BE7}"/>
-              </a:ext>
-            </a:extLst>
-          </p:cNvPr>
-          <p:cNvSpPr>
-            <a:spLocks noGrp="1"/>
-          </p:cNvSpPr>
-          <p:nvPr>
-            <p:ph type="title"/>
-          </p:nvPr>
-        </p:nvSpPr>
-        <p:spPr/>
-        <p:txBody>
-          <a:bodyPr/>
-          <a:lstStyle/>
-          <a:p>
-            <a:r>
-              <a:rPr kumimoji="1" lang="ja-JP" altLang="en-US"/>
-              <a:t>マスター タイトルの書式設定</a:t>
-            </a:r>
-          </a:p>
-        </p:txBody>
-      </p:sp>
-      <p:sp>
-        <p:nvSpPr>
-          <p:cNvPr id="3" name="コンテンツ プレースホルダー 2">
-            <a:extLst>
-              <a:ext uri="{FF2B5EF4-FFF2-40B4-BE49-F238E27FC236}">
-                <a16:creationId xmlns:a16="http://schemas.microsoft.com/office/drawing/2014/main" id="{AE9B11C5-849D-9104-8534-05B157123DC0}"/>
-              </a:ext>
-            </a:extLst>
-          </p:cNvPr>
-          <p:cNvSpPr>
-            <a:spLocks noGrp="1"/>
-          </p:cNvSpPr>
-          <p:nvPr>
-            <p:ph sz="half" idx="1"/>
-          </p:nvPr>
-        </p:nvSpPr>
-        <p:spPr>
-          <a:xfrm>
-            <a:off x="838200" y="1825625"/>
-            <a:ext cx="5181600" cy="4351338"/>
-          </a:xfrm>
-        </p:spPr>
-        <p:txBody>
-          <a:bodyPr/>
-          <a:lstStyle/>
-          <a:p>
-            <a:pPr lvl="0"/>
-            <a:r>
-              <a:rPr kumimoji="1" lang="ja-JP" altLang="en-US"/>
-              <a:t>マスター テキストの書式設定</a:t>
-            </a:r>
-          </a:p>
-          <a:p>
-            <a:pPr lvl="1"/>
-            <a:r>
-              <a:rPr kumimoji="1" lang="ja-JP" altLang="en-US"/>
-              <a:t>第 </a:t>
-            </a:r>
-            <a:r>
-              <a:rPr kumimoji="1" lang="en-US" altLang="ja-JP"/>
-              <a:t>2 </a:t>
-            </a:r>
-            <a:r>
-              <a:rPr kumimoji="1" lang="ja-JP" altLang="en-US"/>
-              <a:t>レベル</a:t>
-            </a:r>
-          </a:p>
-          <a:p>
-            <a:pPr lvl="2"/>
-            <a:r>
-              <a:rPr kumimoji="1" lang="ja-JP" altLang="en-US"/>
-              <a:t>第 </a:t>
-            </a:r>
-            <a:r>
-              <a:rPr kumimoji="1" lang="en-US" altLang="ja-JP"/>
-              <a:t>3 </a:t>
-            </a:r>
-            <a:r>
-              <a:rPr kumimoji="1" lang="ja-JP" altLang="en-US"/>
-              <a:t>レベル</a:t>
-            </a:r>
-          </a:p>
-          <a:p>
-            <a:pPr lvl="3"/>
-            <a:r>
-              <a:rPr kumimoji="1" lang="ja-JP" altLang="en-US"/>
-              <a:t>第 </a:t>
-            </a:r>
-            <a:r>
-              <a:rPr kumimoji="1" lang="en-US" altLang="ja-JP"/>
-              <a:t>4 </a:t>
-            </a:r>
-            <a:r>
-              <a:rPr kumimoji="1" lang="ja-JP" altLang="en-US"/>
-              <a:t>レベル</a:t>
-            </a:r>
-          </a:p>
-          <a:p>
-            <a:pPr lvl="4"/>
-            <a:r>
-              <a:rPr kumimoji="1" lang="ja-JP" altLang="en-US"/>
-              <a:t>第 </a:t>
-            </a:r>
-            <a:r>
-              <a:rPr kumimoji="1" lang="en-US" altLang="ja-JP"/>
-              <a:t>5 </a:t>
-            </a:r>
-            <a:r>
-              <a:rPr kumimoji="1" lang="ja-JP" altLang="en-US"/>
-              <a:t>レベル</a:t>
-            </a:r>
-          </a:p>
-        </p:txBody>
-      </p:sp>
-      <p:sp>
-        <p:nvSpPr>
-          <p:cNvPr id="4" name="コンテンツ プレースホルダー 3">
-            <a:extLst>
-              <a:ext uri="{FF2B5EF4-FFF2-40B4-BE49-F238E27FC236}">
-                <a16:creationId xmlns:a16="http://schemas.microsoft.com/office/drawing/2014/main" id="{1E1E799F-E1CC-CC44-0753-6D7D0C923800}"/>
-              </a:ext>
-            </a:extLst>
-          </p:cNvPr>
-          <p:cNvSpPr>
-            <a:spLocks noGrp="1"/>
-          </p:cNvSpPr>
-          <p:nvPr>
-            <p:ph sz="half" idx="2"/>
-          </p:nvPr>
-        </p:nvSpPr>
-        <p:spPr>
-          <a:xfrm>
-            <a:off x="6172200" y="1825625"/>
-            <a:ext cx="5181600" cy="4351338"/>
-          </a:xfrm>
-        </p:spPr>
-        <p:txBody>
-          <a:bodyPr/>
-          <a:lstStyle/>
-          <a:p>
-            <a:pPr lvl="0"/>
-            <a:r>
-              <a:rPr kumimoji="1" lang="ja-JP" altLang="en-US"/>
-              <a:t>マスター テキストの書式設定</a:t>
-            </a:r>
-          </a:p>
-          <a:p>
-            <a:pPr lvl="1"/>
-            <a:r>
-              <a:rPr kumimoji="1" lang="ja-JP" altLang="en-US"/>
-              <a:t>第 </a:t>
-            </a:r>
-            <a:r>
-              <a:rPr kumimoji="1" lang="en-US" altLang="ja-JP"/>
-              <a:t>2 </a:t>
-            </a:r>
-            <a:r>
-              <a:rPr kumimoji="1" lang="ja-JP" altLang="en-US"/>
-              <a:t>レベル</a:t>
-            </a:r>
-          </a:p>
-          <a:p>
-            <a:pPr lvl="2"/>
-            <a:r>
-              <a:rPr kumimoji="1" lang="ja-JP" altLang="en-US"/>
-              <a:t>第 </a:t>
-            </a:r>
-            <a:r>
-              <a:rPr kumimoji="1" lang="en-US" altLang="ja-JP"/>
-              <a:t>3 </a:t>
-            </a:r>
-            <a:r>
-              <a:rPr kumimoji="1" lang="ja-JP" altLang="en-US"/>
-              <a:t>レベル</a:t>
-            </a:r>
-          </a:p>
-          <a:p>
-            <a:pPr lvl="3"/>
-            <a:r>
-              <a:rPr kumimoji="1" lang="ja-JP" altLang="en-US"/>
-              <a:t>第 </a:t>
-            </a:r>
-            <a:r>
-              <a:rPr kumimoji="1" lang="en-US" altLang="ja-JP"/>
-              <a:t>4 </a:t>
-            </a:r>
-            <a:r>
-              <a:rPr kumimoji="1" lang="ja-JP" altLang="en-US"/>
-              <a:t>レベル</a:t>
-            </a:r>
-          </a:p>
-          <a:p>
-            <a:pPr lvl="4"/>
-            <a:r>
-              <a:rPr kumimoji="1" lang="ja-JP" altLang="en-US"/>
-              <a:t>第 </a:t>
-            </a:r>
-            <a:r>
-              <a:rPr kumimoji="1" lang="en-US" altLang="ja-JP"/>
-              <a:t>5 </a:t>
-            </a:r>
-            <a:r>
-              <a:rPr kumimoji="1" lang="ja-JP" altLang="en-US"/>
-              <a:t>レベル</a:t>
-            </a:r>
-          </a:p>
-        </p:txBody>
-      </p:sp>
-      <p:sp>
-        <p:nvSpPr>
-          <p:cNvPr id="5" name="日付プレースホルダー 4">
-            <a:extLst>
-              <a:ext uri="{FF2B5EF4-FFF2-40B4-BE49-F238E27FC236}">
-                <a16:creationId xmlns:a16="http://schemas.microsoft.com/office/drawing/2014/main" id="{F4315350-56EC-072A-EE57-7D7FD671B06C}"/>
-              </a:ext>
-            </a:extLst>
-          </p:cNvPr>
-          <p:cNvSpPr>
-            <a:spLocks noGrp="1"/>
-          </p:cNvSpPr>
-          <p:nvPr>
-            <p:ph type="dt" sz="half" idx="10"/>
-          </p:nvPr>
-        </p:nvSpPr>
-        <p:spPr/>
-        <p:txBody>
-          <a:bodyPr/>
-          <a:lstStyle/>
-          <a:p>
-            <a:fld id="{E3EFBC31-9ECA-48C0-910F-E09377915FB8}" type="datetimeFigureOut">
-              <a:rPr kumimoji="1" lang="ja-JP" altLang="en-US" smtClean="0"/>
-              <a:t>2026/7/5</a:t>
-            </a:fld>
-            <a:endParaRPr kumimoji="1" lang="ja-JP" altLang="en-US"/>
-          </a:p>
-        </p:txBody>
-      </p:sp>
-      <p:sp>
-        <p:nvSpPr>
-          <p:cNvPr id="6" name="フッター プレースホルダー 5">
-            <a:extLst>
-              <a:ext uri="{FF2B5EF4-FFF2-40B4-BE49-F238E27FC236}">
-                <a16:creationId xmlns:a16="http://schemas.microsoft.com/office/drawing/2014/main" id="{39CFC015-F252-9E7E-F23E-9859CCF4238C}"/>
-              </a:ext>
-            </a:extLst>
-          </p:cNvPr>
-          <p:cNvSpPr>
-            <a:spLocks noGrp="1"/>
-          </p:cNvSpPr>
-          <p:nvPr>
-            <p:ph type="ftr" sz="quarter" idx="11"/>
-          </p:nvPr>
-        </p:nvSpPr>
-        <p:spPr/>
-        <p:txBody>
-          <a:bodyPr/>
-          <a:lstStyle/>
-          <a:p>
-            <a:endParaRPr kumimoji="1" lang="ja-JP" altLang="en-US"/>
-          </a:p>
-        </p:txBody>
-      </p:sp>
-      <p:sp>
-        <p:nvSpPr>
-          <p:cNvPr id="7" name="スライド番号プレースホルダー 6">
-            <a:extLst>
-              <a:ext uri="{FF2B5EF4-FFF2-40B4-BE49-F238E27FC236}">
-                <a16:creationId xmlns:a16="http://schemas.microsoft.com/office/drawing/2014/main" id="{3F775C56-D7A0-4254-A2E6-4CA99D50A303}"/>
-              </a:ext>
-            </a:extLst>
-          </p:cNvPr>
-          <p:cNvSpPr>
-            <a:spLocks noGrp="1"/>
-          </p:cNvSpPr>
-          <p:nvPr>
-            <p:ph type="sldNum" sz="quarter" idx="12"/>
-          </p:nvPr>
-        </p:nvSpPr>
-        <p:spPr/>
-        <p:txBody>
-          <a:bodyPr/>
-          <a:lstStyle/>
-          <a:p>
-            <a:fld id="{9EBFBC76-F46F-4ADD-8228-9529630895ED}" type="slidenum">
-              <a:rPr kumimoji="1" lang="ja-JP" altLang="en-US" smtClean="0"/>
-              <a:t>‹#›</a:t>
-            </a:fld>
-            <a:endParaRPr kumimoji="1" lang="ja-JP" altLang="en-US"/>
-          </a:p>
-        </p:txBody>
-      </p:sp>
-    </p:spTree>
-    <p:extLst>
-      <p:ext uri="{BB962C8B-B14F-4D97-AF65-F5344CB8AC3E}">
-        <p14:creationId xmlns:p14="http://schemas.microsoft.com/office/powerpoint/2010/main" val="3546901665"/>
-      </p:ext>
-    </p:extLst>
-  </p:cSld>
-  <p:clrMapOvr>
-    <a:masterClrMapping/>
-  </p:clrMapOvr>
-</p:sldLayout>
-</file>
-
-<file path=ppt/slideLayouts/slideLayout5.xml><?xml version="1.0" encoding="utf-8"?>
-<p:sldLayout xmlns:a="http://schemas.openxmlformats.org/drawingml/2006/main" xmlns:r="http://schemas.openxmlformats.org/officeDocument/2006/relationships" xmlns:p="http://schemas.openxmlformats.org/presentationml/2006/main" type="twoTxTwoObj" preserve="1">
-  <p:cSld name="比較">
-    <p:spTree>
-      <p:nvGrpSpPr>
-        <p:cNvPr id="1" name=""/>
-        <p:cNvGrpSpPr/>
-        <p:nvPr/>
-      </p:nvGrpSpPr>
-      <p:grpSpPr>
-        <a:xfrm>
-          <a:off x="0" y="0"/>
-          <a:ext cx="0" cy="0"/>
-          <a:chOff x="0" y="0"/>
-          <a:chExt cx="0" cy="0"/>
-        </a:xfrm>
-      </p:grpSpPr>
-      <p:sp>
-        <p:nvSpPr>
-          <p:cNvPr id="2" name="タイトル 1">
-            <a:extLst>
-              <a:ext uri="{FF2B5EF4-FFF2-40B4-BE49-F238E27FC236}">
-                <a16:creationId xmlns:a16="http://schemas.microsoft.com/office/drawing/2014/main" id="{0F87F651-F4E6-22A7-969C-361E7EB82358}"/>
-              </a:ext>
-            </a:extLst>
-          </p:cNvPr>
-          <p:cNvSpPr>
-            <a:spLocks noGrp="1"/>
-          </p:cNvSpPr>
-          <p:nvPr>
-            <p:ph type="title"/>
-          </p:nvPr>
-        </p:nvSpPr>
-        <p:spPr>
-          <a:xfrm>
-            <a:off x="839788" y="365125"/>
-            <a:ext cx="10515600" cy="1325563"/>
-          </a:xfrm>
-        </p:spPr>
-        <p:txBody>
-          <a:bodyPr/>
-          <a:lstStyle/>
-          <a:p>
-            <a:r>
-              <a:rPr kumimoji="1" lang="ja-JP" altLang="en-US"/>
-              <a:t>マスター タイトルの書式設定</a:t>
-            </a:r>
-          </a:p>
-        </p:txBody>
-      </p:sp>
-      <p:sp>
-        <p:nvSpPr>
-          <p:cNvPr id="3" name="テキスト プレースホルダー 2">
-            <a:extLst>
-              <a:ext uri="{FF2B5EF4-FFF2-40B4-BE49-F238E27FC236}">
-                <a16:creationId xmlns:a16="http://schemas.microsoft.com/office/drawing/2014/main" id="{D1D87F37-09C8-1C47-DA85-89348412F3DE}"/>
-              </a:ext>
-            </a:extLst>
-          </p:cNvPr>
-          <p:cNvSpPr>
-            <a:spLocks noGrp="1"/>
-          </p:cNvSpPr>
-          <p:nvPr>
-            <p:ph type="body" idx="1"/>
-          </p:nvPr>
-        </p:nvSpPr>
-        <p:spPr>
-          <a:xfrm>
-            <a:off x="839788" y="1681163"/>
-            <a:ext cx="5157787" cy="823912"/>
-          </a:xfrm>
-        </p:spPr>
-        <p:txBody>
-          <a:bodyPr anchor="b"/>
-          <a:lstStyle>
-            <a:lvl1pPr marL="0" indent="0">
-              <a:buNone/>
-              <a:defRPr sz="2400" b="1"/>
-            </a:lvl1pPr>
-            <a:lvl2pPr marL="457200" indent="0">
-              <a:buNone/>
-              <a:defRPr sz="2000" b="1"/>
-            </a:lvl2pPr>
-            <a:lvl3pPr marL="914400" indent="0">
-              <a:buNone/>
-              <a:defRPr sz="1800" b="1"/>
-            </a:lvl3pPr>
-            <a:lvl4pPr marL="1371600" indent="0">
-              <a:buNone/>
-              <a:defRPr sz="1600" b="1"/>
-            </a:lvl4pPr>
-            <a:lvl5pPr marL="1828800" indent="0">
-              <a:buNone/>
-              <a:defRPr sz="1600" b="1"/>
-            </a:lvl5pPr>
-            <a:lvl6pPr marL="2286000" indent="0">
-              <a:buNone/>
-              <a:defRPr sz="1600" b="1"/>
-            </a:lvl6pPr>
-            <a:lvl7pPr marL="2743200" indent="0">
-              <a:buNone/>
-              <a:defRPr sz="1600" b="1"/>
-            </a:lvl7pPr>
-            <a:lvl8pPr marL="3200400" indent="0">
-              <a:buNone/>
-              <a:defRPr sz="1600" b="1"/>
-            </a:lvl8pPr>
-            <a:lvl9pPr marL="3657600" indent="0">
-              <a:buNone/>
-              <a:defRPr sz="1600" b="1"/>
-            </a:lvl9pPr>
-          </a:lstStyle>
-          <a:p>
-            <a:pPr lvl="0"/>
-            <a:r>
-              <a:rPr kumimoji="1" lang="ja-JP" altLang="en-US"/>
-              <a:t>マスター テキストの書式設定</a:t>
-            </a:r>
-          </a:p>
-        </p:txBody>
-      </p:sp>
-      <p:sp>
-        <p:nvSpPr>
-          <p:cNvPr id="4" name="コンテンツ プレースホルダー 3">
-            <a:extLst>
-              <a:ext uri="{FF2B5EF4-FFF2-40B4-BE49-F238E27FC236}">
-                <a16:creationId xmlns:a16="http://schemas.microsoft.com/office/drawing/2014/main" id="{041EDEFF-D785-4B71-7114-49A611C895D8}"/>
-              </a:ext>
-            </a:extLst>
-          </p:cNvPr>
-          <p:cNvSpPr>
-            <a:spLocks noGrp="1"/>
-          </p:cNvSpPr>
-          <p:nvPr>
-            <p:ph sz="half" idx="2"/>
-          </p:nvPr>
-        </p:nvSpPr>
-        <p:spPr>
-          <a:xfrm>
-            <a:off x="839788" y="2505075"/>
-            <a:ext cx="5157787" cy="3684588"/>
-          </a:xfrm>
-        </p:spPr>
-        <p:txBody>
-          <a:bodyPr/>
-          <a:lstStyle/>
-          <a:p>
-            <a:pPr lvl="0"/>
-            <a:r>
-              <a:rPr kumimoji="1" lang="ja-JP" altLang="en-US"/>
-              <a:t>マスター テキストの書式設定</a:t>
-            </a:r>
-          </a:p>
-          <a:p>
-            <a:pPr lvl="1"/>
-            <a:r>
-              <a:rPr kumimoji="1" lang="ja-JP" altLang="en-US"/>
-              <a:t>第 </a:t>
-            </a:r>
-            <a:r>
-              <a:rPr kumimoji="1" lang="en-US" altLang="ja-JP"/>
-              <a:t>2 </a:t>
-            </a:r>
-            <a:r>
-              <a:rPr kumimoji="1" lang="ja-JP" altLang="en-US"/>
-              <a:t>レベル</a:t>
-            </a:r>
-          </a:p>
-          <a:p>
-            <a:pPr lvl="2"/>
-            <a:r>
-              <a:rPr kumimoji="1" lang="ja-JP" altLang="en-US"/>
-              <a:t>第 </a:t>
-            </a:r>
-            <a:r>
-              <a:rPr kumimoji="1" lang="en-US" altLang="ja-JP"/>
-              <a:t>3 </a:t>
-            </a:r>
-            <a:r>
-              <a:rPr kumimoji="1" lang="ja-JP" altLang="en-US"/>
-              <a:t>レベル</a:t>
-            </a:r>
-          </a:p>
-          <a:p>
-            <a:pPr lvl="3"/>
-            <a:r>
-              <a:rPr kumimoji="1" lang="ja-JP" altLang="en-US"/>
-              <a:t>第 </a:t>
-            </a:r>
-            <a:r>
-              <a:rPr kumimoji="1" lang="en-US" altLang="ja-JP"/>
-              <a:t>4 </a:t>
-            </a:r>
-            <a:r>
-              <a:rPr kumimoji="1" lang="ja-JP" altLang="en-US"/>
-              <a:t>レベル</a:t>
-            </a:r>
-          </a:p>
-          <a:p>
-            <a:pPr lvl="4"/>
-            <a:r>
-              <a:rPr kumimoji="1" lang="ja-JP" altLang="en-US"/>
-              <a:t>第 </a:t>
-            </a:r>
-            <a:r>
-              <a:rPr kumimoji="1" lang="en-US" altLang="ja-JP"/>
-              <a:t>5 </a:t>
-            </a:r>
-            <a:r>
-              <a:rPr kumimoji="1" lang="ja-JP" altLang="en-US"/>
-              <a:t>レベル</a:t>
-            </a:r>
-          </a:p>
-        </p:txBody>
-      </p:sp>
-      <p:sp>
-        <p:nvSpPr>
-          <p:cNvPr id="5" name="テキスト プレースホルダー 4">
-            <a:extLst>
-              <a:ext uri="{FF2B5EF4-FFF2-40B4-BE49-F238E27FC236}">
-                <a16:creationId xmlns:a16="http://schemas.microsoft.com/office/drawing/2014/main" id="{A4CF3450-F545-1FFD-F875-8DE3CCB76B8D}"/>
-              </a:ext>
-            </a:extLst>
-          </p:cNvPr>
-          <p:cNvSpPr>
-            <a:spLocks noGrp="1"/>
-          </p:cNvSpPr>
-          <p:nvPr>
-            <p:ph type="body" sz="quarter" idx="3"/>
-          </p:nvPr>
-        </p:nvSpPr>
-        <p:spPr>
-          <a:xfrm>
-            <a:off x="6172200" y="1681163"/>
-            <a:ext cx="5183188" cy="823912"/>
-          </a:xfrm>
-        </p:spPr>
-        <p:txBody>
-          <a:bodyPr anchor="b"/>
-          <a:lstStyle>
-            <a:lvl1pPr marL="0" indent="0">
-              <a:buNone/>
-              <a:defRPr sz="2400" b="1"/>
-            </a:lvl1pPr>
-            <a:lvl2pPr marL="457200" indent="0">
-              <a:buNone/>
-              <a:defRPr sz="2000" b="1"/>
-            </a:lvl2pPr>
-            <a:lvl3pPr marL="914400" indent="0">
-              <a:buNone/>
-              <a:defRPr sz="1800" b="1"/>
-            </a:lvl3pPr>
-            <a:lvl4pPr marL="1371600" indent="0">
-              <a:buNone/>
-              <a:defRPr sz="1600" b="1"/>
-            </a:lvl4pPr>
-            <a:lvl5pPr marL="1828800" indent="0">
-              <a:buNone/>
-              <a:defRPr sz="1600" b="1"/>
-            </a:lvl5pPr>
-            <a:lvl6pPr marL="2286000" indent="0">
-              <a:buNone/>
-              <a:defRPr sz="1600" b="1"/>
-            </a:lvl6pPr>
-            <a:lvl7pPr marL="2743200" indent="0">
-              <a:buNone/>
-              <a:defRPr sz="1600" b="1"/>
-            </a:lvl7pPr>
-            <a:lvl8pPr marL="3200400" indent="0">
-              <a:buNone/>
-              <a:defRPr sz="1600" b="1"/>
-            </a:lvl8pPr>
-            <a:lvl9pPr marL="3657600" indent="0">
-              <a:buNone/>
-              <a:defRPr sz="1600" b="1"/>
-            </a:lvl9pPr>
-          </a:lstStyle>
-          <a:p>
-            <a:pPr lvl="0"/>
-            <a:r>
-              <a:rPr kumimoji="1" lang="ja-JP" altLang="en-US"/>
-              <a:t>マスター テキストの書式設定</a:t>
-            </a:r>
-          </a:p>
-        </p:txBody>
-      </p:sp>
-      <p:sp>
-        <p:nvSpPr>
-          <p:cNvPr id="6" name="コンテンツ プレースホルダー 5">
-            <a:extLst>
-              <a:ext uri="{FF2B5EF4-FFF2-40B4-BE49-F238E27FC236}">
-                <a16:creationId xmlns:a16="http://schemas.microsoft.com/office/drawing/2014/main" id="{95E611BD-461C-12F4-A3BC-6154F6BA1EDA}"/>
-              </a:ext>
-            </a:extLst>
-          </p:cNvPr>
-          <p:cNvSpPr>
-            <a:spLocks noGrp="1"/>
-          </p:cNvSpPr>
-          <p:nvPr>
-            <p:ph sz="quarter" idx="4"/>
-          </p:nvPr>
-        </p:nvSpPr>
-        <p:spPr>
-          <a:xfrm>
-            <a:off x="6172200" y="2505075"/>
-            <a:ext cx="5183188" cy="3684588"/>
-          </a:xfrm>
-        </p:spPr>
-        <p:txBody>
-          <a:bodyPr/>
-          <a:lstStyle/>
-          <a:p>
-            <a:pPr lvl="0"/>
-            <a:r>
-              <a:rPr kumimoji="1" lang="ja-JP" altLang="en-US"/>
-              <a:t>マスター テキストの書式設定</a:t>
-            </a:r>
-          </a:p>
-          <a:p>
-            <a:pPr lvl="1"/>
-            <a:r>
-              <a:rPr kumimoji="1" lang="ja-JP" altLang="en-US"/>
-              <a:t>第 </a:t>
-            </a:r>
-            <a:r>
-              <a:rPr kumimoji="1" lang="en-US" altLang="ja-JP"/>
-              <a:t>2 </a:t>
-            </a:r>
-            <a:r>
-              <a:rPr kumimoji="1" lang="ja-JP" altLang="en-US"/>
-              <a:t>レベル</a:t>
-            </a:r>
-          </a:p>
-          <a:p>
-            <a:pPr lvl="2"/>
-            <a:r>
-              <a:rPr kumimoji="1" lang="ja-JP" altLang="en-US"/>
-              <a:t>第 </a:t>
-            </a:r>
-            <a:r>
-              <a:rPr kumimoji="1" lang="en-US" altLang="ja-JP"/>
-              <a:t>3 </a:t>
-            </a:r>
-            <a:r>
-              <a:rPr kumimoji="1" lang="ja-JP" altLang="en-US"/>
-              <a:t>レベル</a:t>
-            </a:r>
-          </a:p>
-          <a:p>
-            <a:pPr lvl="3"/>
-            <a:r>
-              <a:rPr kumimoji="1" lang="ja-JP" altLang="en-US"/>
-              <a:t>第 </a:t>
-            </a:r>
-            <a:r>
-              <a:rPr kumimoji="1" lang="en-US" altLang="ja-JP"/>
-              <a:t>4 </a:t>
-            </a:r>
-            <a:r>
-              <a:rPr kumimoji="1" lang="ja-JP" altLang="en-US"/>
-              <a:t>レベル</a:t>
-            </a:r>
-          </a:p>
-          <a:p>
-            <a:pPr lvl="4"/>
-            <a:r>
-              <a:rPr kumimoji="1" lang="ja-JP" altLang="en-US"/>
-              <a:t>第 </a:t>
-            </a:r>
-            <a:r>
-              <a:rPr kumimoji="1" lang="en-US" altLang="ja-JP"/>
-              <a:t>5 </a:t>
-            </a:r>
-            <a:r>
-              <a:rPr kumimoji="1" lang="ja-JP" altLang="en-US"/>
-              <a:t>レベル</a:t>
-            </a:r>
-          </a:p>
-        </p:txBody>
-      </p:sp>
-      <p:sp>
-        <p:nvSpPr>
-          <p:cNvPr id="7" name="日付プレースホルダー 6">
-            <a:extLst>
-              <a:ext uri="{FF2B5EF4-FFF2-40B4-BE49-F238E27FC236}">
-                <a16:creationId xmlns:a16="http://schemas.microsoft.com/office/drawing/2014/main" id="{B4F81492-847C-EE97-CE4E-E34C2A9E0BA0}"/>
-              </a:ext>
-            </a:extLst>
-          </p:cNvPr>
-          <p:cNvSpPr>
-            <a:spLocks noGrp="1"/>
-          </p:cNvSpPr>
-          <p:nvPr>
-            <p:ph type="dt" sz="half" idx="10"/>
-          </p:nvPr>
-        </p:nvSpPr>
-        <p:spPr/>
-        <p:txBody>
-          <a:bodyPr/>
-          <a:lstStyle/>
-          <a:p>
-            <a:fld id="{E3EFBC31-9ECA-48C0-910F-E09377915FB8}" type="datetimeFigureOut">
-              <a:rPr kumimoji="1" lang="ja-JP" altLang="en-US" smtClean="0"/>
-              <a:t>2026/7/5</a:t>
-            </a:fld>
-            <a:endParaRPr kumimoji="1" lang="ja-JP" altLang="en-US"/>
-          </a:p>
-        </p:txBody>
-      </p:sp>
-      <p:sp>
-        <p:nvSpPr>
-          <p:cNvPr id="8" name="フッター プレースホルダー 7">
-            <a:extLst>
-              <a:ext uri="{FF2B5EF4-FFF2-40B4-BE49-F238E27FC236}">
-                <a16:creationId xmlns:a16="http://schemas.microsoft.com/office/drawing/2014/main" id="{508207F7-1FE0-73EF-D402-872A8833CAEE}"/>
-              </a:ext>
-            </a:extLst>
-          </p:cNvPr>
-          <p:cNvSpPr>
-            <a:spLocks noGrp="1"/>
-          </p:cNvSpPr>
-          <p:nvPr>
-            <p:ph type="ftr" sz="quarter" idx="11"/>
-          </p:nvPr>
-        </p:nvSpPr>
-        <p:spPr/>
-        <p:txBody>
-          <a:bodyPr/>
-          <a:lstStyle/>
-          <a:p>
-            <a:endParaRPr kumimoji="1" lang="ja-JP" altLang="en-US"/>
-          </a:p>
-        </p:txBody>
-      </p:sp>
-      <p:sp>
-        <p:nvSpPr>
-          <p:cNvPr id="9" name="スライド番号プレースホルダー 8">
-            <a:extLst>
-              <a:ext uri="{FF2B5EF4-FFF2-40B4-BE49-F238E27FC236}">
-                <a16:creationId xmlns:a16="http://schemas.microsoft.com/office/drawing/2014/main" id="{8F6F3EF7-641F-90DB-332E-E52417E39F7B}"/>
-              </a:ext>
-            </a:extLst>
-          </p:cNvPr>
-          <p:cNvSpPr>
-            <a:spLocks noGrp="1"/>
-          </p:cNvSpPr>
-          <p:nvPr>
-            <p:ph type="sldNum" sz="quarter" idx="12"/>
-          </p:nvPr>
-        </p:nvSpPr>
-        <p:spPr/>
-        <p:txBody>
-          <a:bodyPr/>
-          <a:lstStyle/>
-          <a:p>
-            <a:fld id="{9EBFBC76-F46F-4ADD-8228-9529630895ED}" type="slidenum">
-              <a:rPr kumimoji="1" lang="ja-JP" altLang="en-US" smtClean="0"/>
-              <a:t>‹#›</a:t>
-            </a:fld>
-            <a:endParaRPr kumimoji="1" lang="ja-JP" altLang="en-US"/>
-          </a:p>
-        </p:txBody>
-      </p:sp>
-    </p:spTree>
-    <p:extLst>
-      <p:ext uri="{BB962C8B-B14F-4D97-AF65-F5344CB8AC3E}">
-        <p14:creationId xmlns:p14="http://schemas.microsoft.com/office/powerpoint/2010/main" val="1465333793"/>
-      </p:ext>
-    </p:extLst>
-  </p:cSld>
-  <p:clrMapOvr>
-    <a:masterClrMapping/>
-  </p:clrMapOvr>
-</p:sldLayout>
-</file>
-
-<file path=ppt/slideLayouts/slideLayout6.xml><?xml version="1.0" encoding="utf-8"?>
-<p:sldLayout xmlns:a="http://schemas.openxmlformats.org/drawingml/2006/main" xmlns:r="http://schemas.openxmlformats.org/officeDocument/2006/relationships" xmlns:p="http://schemas.openxmlformats.org/presentationml/2006/main" type="titleOnly" preserve="1">
-  <p:cSld name="タイトルのみ">
-    <p:spTree>
-      <p:nvGrpSpPr>
-        <p:cNvPr id="1" name=""/>
-        <p:cNvGrpSpPr/>
-        <p:nvPr/>
-      </p:nvGrpSpPr>
-      <p:grpSpPr>
-        <a:xfrm>
-          <a:off x="0" y="0"/>
-          <a:ext cx="0" cy="0"/>
-          <a:chOff x="0" y="0"/>
-          <a:chExt cx="0" cy="0"/>
-        </a:xfrm>
-      </p:grpSpPr>
-      <p:sp>
-        <p:nvSpPr>
-          <p:cNvPr id="2" name="タイトル 1">
-            <a:extLst>
-              <a:ext uri="{FF2B5EF4-FFF2-40B4-BE49-F238E27FC236}">
-                <a16:creationId xmlns:a16="http://schemas.microsoft.com/office/drawing/2014/main" id="{0533C488-7001-3614-BBDB-52F57B051E21}"/>
-              </a:ext>
-            </a:extLst>
-          </p:cNvPr>
-          <p:cNvSpPr>
-            <a:spLocks noGrp="1"/>
-          </p:cNvSpPr>
-          <p:nvPr>
-            <p:ph type="title"/>
-          </p:nvPr>
-        </p:nvSpPr>
-        <p:spPr/>
-        <p:txBody>
-          <a:bodyPr/>
-          <a:lstStyle/>
-          <a:p>
-            <a:r>
-              <a:rPr kumimoji="1" lang="ja-JP" altLang="en-US"/>
-              <a:t>マスター タイトルの書式設定</a:t>
-            </a:r>
-          </a:p>
-        </p:txBody>
-      </p:sp>
-      <p:sp>
-        <p:nvSpPr>
-          <p:cNvPr id="3" name="日付プレースホルダー 2">
-            <a:extLst>
-              <a:ext uri="{FF2B5EF4-FFF2-40B4-BE49-F238E27FC236}">
-                <a16:creationId xmlns:a16="http://schemas.microsoft.com/office/drawing/2014/main" id="{67F87A66-C96C-D4FF-9241-9CE679FE2AA9}"/>
-              </a:ext>
-            </a:extLst>
-          </p:cNvPr>
-          <p:cNvSpPr>
-            <a:spLocks noGrp="1"/>
-          </p:cNvSpPr>
-          <p:nvPr>
-            <p:ph type="dt" sz="half" idx="10"/>
-          </p:nvPr>
-        </p:nvSpPr>
-        <p:spPr/>
-        <p:txBody>
-          <a:bodyPr/>
-          <a:lstStyle/>
-          <a:p>
-            <a:fld id="{E3EFBC31-9ECA-48C0-910F-E09377915FB8}" type="datetimeFigureOut">
-              <a:rPr kumimoji="1" lang="ja-JP" altLang="en-US" smtClean="0"/>
-              <a:t>2026/7/5</a:t>
-            </a:fld>
-            <a:endParaRPr kumimoji="1" lang="ja-JP" altLang="en-US"/>
-          </a:p>
-        </p:txBody>
-      </p:sp>
-      <p:sp>
-        <p:nvSpPr>
-          <p:cNvPr id="4" name="フッター プレースホルダー 3">
-            <a:extLst>
-              <a:ext uri="{FF2B5EF4-FFF2-40B4-BE49-F238E27FC236}">
-                <a16:creationId xmlns:a16="http://schemas.microsoft.com/office/drawing/2014/main" id="{93116E27-0034-7717-9FEE-82777DE206A0}"/>
-              </a:ext>
-            </a:extLst>
-          </p:cNvPr>
-          <p:cNvSpPr>
-            <a:spLocks noGrp="1"/>
-          </p:cNvSpPr>
-          <p:nvPr>
-            <p:ph type="ftr" sz="quarter" idx="11"/>
-          </p:nvPr>
-        </p:nvSpPr>
-        <p:spPr/>
-        <p:txBody>
-          <a:bodyPr/>
-          <a:lstStyle/>
-          <a:p>
-            <a:endParaRPr kumimoji="1" lang="ja-JP" altLang="en-US"/>
-          </a:p>
-        </p:txBody>
-      </p:sp>
-      <p:sp>
-        <p:nvSpPr>
-          <p:cNvPr id="5" name="スライド番号プレースホルダー 4">
-            <a:extLst>
-              <a:ext uri="{FF2B5EF4-FFF2-40B4-BE49-F238E27FC236}">
-                <a16:creationId xmlns:a16="http://schemas.microsoft.com/office/drawing/2014/main" id="{B21BDC13-BC57-56EC-7696-822A94E13DCA}"/>
-              </a:ext>
-            </a:extLst>
-          </p:cNvPr>
-          <p:cNvSpPr>
-            <a:spLocks noGrp="1"/>
-          </p:cNvSpPr>
-          <p:nvPr>
-            <p:ph type="sldNum" sz="quarter" idx="12"/>
-          </p:nvPr>
-        </p:nvSpPr>
-        <p:spPr/>
-        <p:txBody>
-          <a:bodyPr/>
-          <a:lstStyle/>
-          <a:p>
-            <a:fld id="{9EBFBC76-F46F-4ADD-8228-9529630895ED}" type="slidenum">
-              <a:rPr kumimoji="1" lang="ja-JP" altLang="en-US" smtClean="0"/>
-              <a:t>‹#›</a:t>
-            </a:fld>
-            <a:endParaRPr kumimoji="1" lang="ja-JP" altLang="en-US"/>
-          </a:p>
-        </p:txBody>
-      </p:sp>
-    </p:spTree>
-    <p:extLst>
-      <p:ext uri="{BB962C8B-B14F-4D97-AF65-F5344CB8AC3E}">
-        <p14:creationId xmlns:p14="http://schemas.microsoft.com/office/powerpoint/2010/main" val="3285570792"/>
-      </p:ext>
-    </p:extLst>
-  </p:cSld>
-  <p:clrMapOvr>
-    <a:masterClrMapping/>
-  </p:clrMapOvr>
-</p:sldLayout>
-</file>
-
-<file path=ppt/slideLayouts/slideLayout7.xml><?xml version="1.0" encoding="utf-8"?>
-<p:sldLayout xmlns:a="http://schemas.openxmlformats.org/drawingml/2006/main" xmlns:r="http://schemas.openxmlformats.org/officeDocument/2006/relationships" xmlns:p="http://schemas.openxmlformats.org/presentationml/2006/main" type="blank" preserve="1">
-  <p:cSld name="白紙">
-    <p:spTree>
-      <p:nvGrpSpPr>
-        <p:cNvPr id="1" name=""/>
-        <p:cNvGrpSpPr/>
-        <p:nvPr/>
-      </p:nvGrpSpPr>
-      <p:grpSpPr>
-        <a:xfrm>
-          <a:off x="0" y="0"/>
-          <a:ext cx="0" cy="0"/>
-          <a:chOff x="0" y="0"/>
-          <a:chExt cx="0" cy="0"/>
-        </a:xfrm>
-      </p:grpSpPr>
-      <p:sp>
-        <p:nvSpPr>
-          <p:cNvPr id="2" name="日付プレースホルダー 1">
-            <a:extLst>
-              <a:ext uri="{FF2B5EF4-FFF2-40B4-BE49-F238E27FC236}">
-                <a16:creationId xmlns:a16="http://schemas.microsoft.com/office/drawing/2014/main" id="{2C96747D-199C-DB70-796B-D7AD9498DAAD}"/>
-              </a:ext>
-            </a:extLst>
-          </p:cNvPr>
-          <p:cNvSpPr>
-            <a:spLocks noGrp="1"/>
-          </p:cNvSpPr>
-          <p:nvPr>
-            <p:ph type="dt" sz="half" idx="10"/>
-          </p:nvPr>
-        </p:nvSpPr>
-        <p:spPr/>
-        <p:txBody>
-          <a:bodyPr/>
-          <a:lstStyle/>
-          <a:p>
-            <a:fld id="{E3EFBC31-9ECA-48C0-910F-E09377915FB8}" type="datetimeFigureOut">
-              <a:rPr kumimoji="1" lang="ja-JP" altLang="en-US" smtClean="0"/>
-              <a:t>2026/7/5</a:t>
-            </a:fld>
-            <a:endParaRPr kumimoji="1" lang="ja-JP" altLang="en-US"/>
-          </a:p>
-        </p:txBody>
-      </p:sp>
-      <p:sp>
-        <p:nvSpPr>
-          <p:cNvPr id="3" name="フッター プレースホルダー 2">
-            <a:extLst>
-              <a:ext uri="{FF2B5EF4-FFF2-40B4-BE49-F238E27FC236}">
-                <a16:creationId xmlns:a16="http://schemas.microsoft.com/office/drawing/2014/main" id="{D95DF319-00BA-725F-BC6A-27C0CA6C687A}"/>
-              </a:ext>
-            </a:extLst>
-          </p:cNvPr>
-          <p:cNvSpPr>
-            <a:spLocks noGrp="1"/>
-          </p:cNvSpPr>
-          <p:nvPr>
-            <p:ph type="ftr" sz="quarter" idx="11"/>
-          </p:nvPr>
-        </p:nvSpPr>
-        <p:spPr/>
-        <p:txBody>
-          <a:bodyPr/>
-          <a:lstStyle/>
-          <a:p>
-            <a:endParaRPr kumimoji="1" lang="ja-JP" altLang="en-US"/>
-          </a:p>
-        </p:txBody>
-      </p:sp>
-      <p:sp>
-        <p:nvSpPr>
-          <p:cNvPr id="4" name="スライド番号プレースホルダー 3">
-            <a:extLst>
-              <a:ext uri="{FF2B5EF4-FFF2-40B4-BE49-F238E27FC236}">
-                <a16:creationId xmlns:a16="http://schemas.microsoft.com/office/drawing/2014/main" id="{F3F24241-0D68-5DC6-E45A-B7BBC9246733}"/>
-              </a:ext>
-            </a:extLst>
-          </p:cNvPr>
-          <p:cNvSpPr>
-            <a:spLocks noGrp="1"/>
-          </p:cNvSpPr>
-          <p:nvPr>
-            <p:ph type="sldNum" sz="quarter" idx="12"/>
-          </p:nvPr>
-        </p:nvSpPr>
-        <p:spPr/>
-        <p:txBody>
-          <a:bodyPr/>
-          <a:lstStyle/>
-          <a:p>
-            <a:fld id="{9EBFBC76-F46F-4ADD-8228-9529630895ED}" type="slidenum">
-              <a:rPr kumimoji="1" lang="ja-JP" altLang="en-US" smtClean="0"/>
-              <a:t>‹#›</a:t>
-            </a:fld>
-            <a:endParaRPr kumimoji="1" lang="ja-JP" altLang="en-US"/>
-          </a:p>
-        </p:txBody>
-      </p:sp>
-    </p:spTree>
-    <p:extLst>
-      <p:ext uri="{BB962C8B-B14F-4D97-AF65-F5344CB8AC3E}">
-        <p14:creationId xmlns:p14="http://schemas.microsoft.com/office/powerpoint/2010/main" val="1924275464"/>
-      </p:ext>
-    </p:extLst>
-  </p:cSld>
-  <p:clrMapOvr>
-    <a:masterClrMapping/>
-  </p:clrMapOvr>
-</p:sldLayout>
-</file>
-
-<file path=ppt/slideLayouts/slideLayout8.xml><?xml version="1.0" encoding="utf-8"?>
-<p:sldLayout xmlns:a="http://schemas.openxmlformats.org/drawingml/2006/main" xmlns:r="http://schemas.openxmlformats.org/officeDocument/2006/relationships" xmlns:p="http://schemas.openxmlformats.org/presentationml/2006/main" type="objTx" preserve="1">
-  <p:cSld name="タイトル付きのコンテンツ">
-    <p:spTree>
-      <p:nvGrpSpPr>
-        <p:cNvPr id="1" name=""/>
-        <p:cNvGrpSpPr/>
-        <p:nvPr/>
-      </p:nvGrpSpPr>
-      <p:grpSpPr>
-        <a:xfrm>
-          <a:off x="0" y="0"/>
-          <a:ext cx="0" cy="0"/>
-          <a:chOff x="0" y="0"/>
-          <a:chExt cx="0" cy="0"/>
-        </a:xfrm>
-      </p:grpSpPr>
-      <p:sp>
-        <p:nvSpPr>
-          <p:cNvPr id="2" name="タイトル 1">
-            <a:extLst>
-              <a:ext uri="{FF2B5EF4-FFF2-40B4-BE49-F238E27FC236}">
-                <a16:creationId xmlns:a16="http://schemas.microsoft.com/office/drawing/2014/main" id="{6583C645-DBBF-EBC8-73A4-9590C9AA4578}"/>
-              </a:ext>
-            </a:extLst>
-          </p:cNvPr>
-          <p:cNvSpPr>
-            <a:spLocks noGrp="1"/>
-          </p:cNvSpPr>
-          <p:nvPr>
-            <p:ph type="title"/>
-          </p:nvPr>
-        </p:nvSpPr>
-        <p:spPr>
-          <a:xfrm>
-            <a:off x="839788" y="457200"/>
-            <a:ext cx="3932237" cy="1600200"/>
-          </a:xfrm>
-        </p:spPr>
-        <p:txBody>
-          <a:bodyPr anchor="b"/>
-          <a:lstStyle>
-            <a:lvl1pPr>
-              <a:defRPr sz="3200"/>
-            </a:lvl1pPr>
-          </a:lstStyle>
-          <a:p>
-            <a:r>
-              <a:rPr kumimoji="1" lang="ja-JP" altLang="en-US"/>
-              <a:t>マスター タイトルの書式設定</a:t>
-            </a:r>
-          </a:p>
-        </p:txBody>
-      </p:sp>
-      <p:sp>
-        <p:nvSpPr>
-          <p:cNvPr id="3" name="コンテンツ プレースホルダー 2">
-            <a:extLst>
-              <a:ext uri="{FF2B5EF4-FFF2-40B4-BE49-F238E27FC236}">
-                <a16:creationId xmlns:a16="http://schemas.microsoft.com/office/drawing/2014/main" id="{2981406B-DD2E-D5D3-AE10-E0AB4E154E5A}"/>
-              </a:ext>
-            </a:extLst>
-          </p:cNvPr>
-          <p:cNvSpPr>
-            <a:spLocks noGrp="1"/>
-          </p:cNvSpPr>
-          <p:nvPr>
-            <p:ph idx="1"/>
-          </p:nvPr>
-        </p:nvSpPr>
-        <p:spPr>
-          <a:xfrm>
-            <a:off x="5183188" y="987425"/>
-            <a:ext cx="6172200" cy="4873625"/>
-          </a:xfrm>
-        </p:spPr>
-        <p:txBody>
-          <a:bodyPr/>
-          <a:lstStyle>
-            <a:lvl1pPr>
-              <a:defRPr sz="3200"/>
-            </a:lvl1pPr>
-            <a:lvl2pPr>
-              <a:defRPr sz="2800"/>
-            </a:lvl2pPr>
-            <a:lvl3pPr>
-              <a:defRPr sz="2400"/>
-            </a:lvl3pPr>
-            <a:lvl4pPr>
-              <a:defRPr sz="2000"/>
-            </a:lvl4pPr>
-            <a:lvl5pPr>
-              <a:defRPr sz="2000"/>
-            </a:lvl5pPr>
-            <a:lvl6pPr>
-              <a:defRPr sz="2000"/>
-            </a:lvl6pPr>
-            <a:lvl7pPr>
-              <a:defRPr sz="2000"/>
-            </a:lvl7pPr>
-            <a:lvl8pPr>
-              <a:defRPr sz="2000"/>
-            </a:lvl8pPr>
-            <a:lvl9pPr>
-              <a:defRPr sz="2000"/>
-            </a:lvl9pPr>
-          </a:lstStyle>
-          <a:p>
-            <a:pPr lvl="0"/>
-            <a:r>
-              <a:rPr kumimoji="1" lang="ja-JP" altLang="en-US"/>
-              <a:t>マスター テキストの書式設定</a:t>
-            </a:r>
-          </a:p>
-          <a:p>
-            <a:pPr lvl="1"/>
-            <a:r>
-              <a:rPr kumimoji="1" lang="ja-JP" altLang="en-US"/>
-              <a:t>第 </a:t>
-            </a:r>
-            <a:r>
-              <a:rPr kumimoji="1" lang="en-US" altLang="ja-JP"/>
-              <a:t>2 </a:t>
-            </a:r>
-            <a:r>
-              <a:rPr kumimoji="1" lang="ja-JP" altLang="en-US"/>
-              <a:t>レベル</a:t>
-            </a:r>
-          </a:p>
-          <a:p>
-            <a:pPr lvl="2"/>
-            <a:r>
-              <a:rPr kumimoji="1" lang="ja-JP" altLang="en-US"/>
-              <a:t>第 </a:t>
-            </a:r>
-            <a:r>
-              <a:rPr kumimoji="1" lang="en-US" altLang="ja-JP"/>
-              <a:t>3 </a:t>
-            </a:r>
-            <a:r>
-              <a:rPr kumimoji="1" lang="ja-JP" altLang="en-US"/>
-              <a:t>レベル</a:t>
-            </a:r>
-          </a:p>
-          <a:p>
-            <a:pPr lvl="3"/>
-            <a:r>
-              <a:rPr kumimoji="1" lang="ja-JP" altLang="en-US"/>
-              <a:t>第 </a:t>
-            </a:r>
-            <a:r>
-              <a:rPr kumimoji="1" lang="en-US" altLang="ja-JP"/>
-              <a:t>4 </a:t>
-            </a:r>
-            <a:r>
-              <a:rPr kumimoji="1" lang="ja-JP" altLang="en-US"/>
-              <a:t>レベル</a:t>
-            </a:r>
-          </a:p>
-          <a:p>
-            <a:pPr lvl="4"/>
-            <a:r>
-              <a:rPr kumimoji="1" lang="ja-JP" altLang="en-US"/>
-              <a:t>第 </a:t>
-            </a:r>
-            <a:r>
-              <a:rPr kumimoji="1" lang="en-US" altLang="ja-JP"/>
-              <a:t>5 </a:t>
-            </a:r>
-            <a:r>
-              <a:rPr kumimoji="1" lang="ja-JP" altLang="en-US"/>
-              <a:t>レベル</a:t>
-            </a:r>
-          </a:p>
-        </p:txBody>
-      </p:sp>
-      <p:sp>
-        <p:nvSpPr>
-          <p:cNvPr id="4" name="テキスト プレースホルダー 3">
-            <a:extLst>
-              <a:ext uri="{FF2B5EF4-FFF2-40B4-BE49-F238E27FC236}">
-                <a16:creationId xmlns:a16="http://schemas.microsoft.com/office/drawing/2014/main" id="{E11620FD-5FFA-4826-B001-35BBC49CA67D}"/>
-              </a:ext>
-            </a:extLst>
-          </p:cNvPr>
-          <p:cNvSpPr>
-            <a:spLocks noGrp="1"/>
-          </p:cNvSpPr>
-          <p:nvPr>
-            <p:ph type="body" sz="half" idx="2"/>
-          </p:nvPr>
-        </p:nvSpPr>
-        <p:spPr>
-          <a:xfrm>
-            <a:off x="839788" y="2057400"/>
-            <a:ext cx="3932237" cy="3811588"/>
-          </a:xfrm>
-        </p:spPr>
-        <p:txBody>
-          <a:bodyPr/>
-          <a:lstStyle>
-            <a:lvl1pPr marL="0" indent="0">
-              <a:buNone/>
-              <a:defRPr sz="1600"/>
-            </a:lvl1pPr>
-            <a:lvl2pPr marL="457200" indent="0">
-              <a:buNone/>
-              <a:defRPr sz="1400"/>
-            </a:lvl2pPr>
-            <a:lvl3pPr marL="914400" indent="0">
-              <a:buNone/>
-              <a:defRPr sz="1200"/>
-            </a:lvl3pPr>
-            <a:lvl4pPr marL="1371600" indent="0">
-              <a:buNone/>
-              <a:defRPr sz="1000"/>
-            </a:lvl4pPr>
-            <a:lvl5pPr marL="1828800" indent="0">
-              <a:buNone/>
-              <a:defRPr sz="1000"/>
-            </a:lvl5pPr>
-            <a:lvl6pPr marL="2286000" indent="0">
-              <a:buNone/>
-              <a:defRPr sz="1000"/>
-            </a:lvl6pPr>
-            <a:lvl7pPr marL="2743200" indent="0">
-              <a:buNone/>
-              <a:defRPr sz="1000"/>
-            </a:lvl7pPr>
-            <a:lvl8pPr marL="3200400" indent="0">
-              <a:buNone/>
-              <a:defRPr sz="1000"/>
-            </a:lvl8pPr>
-            <a:lvl9pPr marL="3657600" indent="0">
-              <a:buNone/>
-              <a:defRPr sz="1000"/>
-            </a:lvl9pPr>
-          </a:lstStyle>
-          <a:p>
-            <a:pPr lvl="0"/>
-            <a:r>
-              <a:rPr kumimoji="1" lang="ja-JP" altLang="en-US"/>
-              <a:t>マスター テキストの書式設定</a:t>
-            </a:r>
-          </a:p>
-        </p:txBody>
-      </p:sp>
-      <p:sp>
-        <p:nvSpPr>
-          <p:cNvPr id="5" name="日付プレースホルダー 4">
-            <a:extLst>
-              <a:ext uri="{FF2B5EF4-FFF2-40B4-BE49-F238E27FC236}">
-                <a16:creationId xmlns:a16="http://schemas.microsoft.com/office/drawing/2014/main" id="{A0484110-46BB-014D-41FF-BB1422C973DB}"/>
-              </a:ext>
-            </a:extLst>
-          </p:cNvPr>
-          <p:cNvSpPr>
-            <a:spLocks noGrp="1"/>
-          </p:cNvSpPr>
-          <p:nvPr>
-            <p:ph type="dt" sz="half" idx="10"/>
-          </p:nvPr>
-        </p:nvSpPr>
-        <p:spPr/>
-        <p:txBody>
-          <a:bodyPr/>
-          <a:lstStyle/>
-          <a:p>
-            <a:fld id="{E3EFBC31-9ECA-48C0-910F-E09377915FB8}" type="datetimeFigureOut">
-              <a:rPr kumimoji="1" lang="ja-JP" altLang="en-US" smtClean="0"/>
-              <a:t>2026/7/5</a:t>
-            </a:fld>
-            <a:endParaRPr kumimoji="1" lang="ja-JP" altLang="en-US"/>
-          </a:p>
-        </p:txBody>
-      </p:sp>
-      <p:sp>
-        <p:nvSpPr>
-          <p:cNvPr id="6" name="フッター プレースホルダー 5">
-            <a:extLst>
-              <a:ext uri="{FF2B5EF4-FFF2-40B4-BE49-F238E27FC236}">
-                <a16:creationId xmlns:a16="http://schemas.microsoft.com/office/drawing/2014/main" id="{D0568A18-5ED2-ABB4-0951-B33EF4C593EA}"/>
-              </a:ext>
-            </a:extLst>
-          </p:cNvPr>
-          <p:cNvSpPr>
-            <a:spLocks noGrp="1"/>
-          </p:cNvSpPr>
-          <p:nvPr>
-            <p:ph type="ftr" sz="quarter" idx="11"/>
-          </p:nvPr>
-        </p:nvSpPr>
-        <p:spPr/>
-        <p:txBody>
-          <a:bodyPr/>
-          <a:lstStyle/>
-          <a:p>
-            <a:endParaRPr kumimoji="1" lang="ja-JP" altLang="en-US"/>
-          </a:p>
-        </p:txBody>
-      </p:sp>
-      <p:sp>
-        <p:nvSpPr>
-          <p:cNvPr id="7" name="スライド番号プレースホルダー 6">
-            <a:extLst>
-              <a:ext uri="{FF2B5EF4-FFF2-40B4-BE49-F238E27FC236}">
-                <a16:creationId xmlns:a16="http://schemas.microsoft.com/office/drawing/2014/main" id="{C85EACC3-A6F9-B01D-47D1-98D369617A11}"/>
-              </a:ext>
-            </a:extLst>
-          </p:cNvPr>
-          <p:cNvSpPr>
-            <a:spLocks noGrp="1"/>
-          </p:cNvSpPr>
-          <p:nvPr>
-            <p:ph type="sldNum" sz="quarter" idx="12"/>
-          </p:nvPr>
-        </p:nvSpPr>
-        <p:spPr/>
-        <p:txBody>
-          <a:bodyPr/>
-          <a:lstStyle/>
-          <a:p>
-            <a:fld id="{9EBFBC76-F46F-4ADD-8228-9529630895ED}" type="slidenum">
-              <a:rPr kumimoji="1" lang="ja-JP" altLang="en-US" smtClean="0"/>
-              <a:t>‹#›</a:t>
-            </a:fld>
-            <a:endParaRPr kumimoji="1" lang="ja-JP" altLang="en-US"/>
-          </a:p>
-        </p:txBody>
-      </p:sp>
-    </p:spTree>
-    <p:extLst>
-      <p:ext uri="{BB962C8B-B14F-4D97-AF65-F5344CB8AC3E}">
-        <p14:creationId xmlns:p14="http://schemas.microsoft.com/office/powerpoint/2010/main" val="783369085"/>
-      </p:ext>
-    </p:extLst>
-  </p:cSld>
-  <p:clrMapOvr>
-    <a:masterClrMapping/>
-  </p:clrMapOvr>
-</p:sldLayout>
-</file>
-
-<file path=ppt/slideLayouts/slideLayout9.xml><?xml version="1.0" encoding="utf-8"?>
-<p:sldLayout xmlns:a="http://schemas.openxmlformats.org/drawingml/2006/main" xmlns:r="http://schemas.openxmlformats.org/officeDocument/2006/relationships" xmlns:p="http://schemas.openxmlformats.org/presentationml/2006/main" type="picTx" preserve="1">
-  <p:cSld name="タイトル付きの図">
-    <p:spTree>
-      <p:nvGrpSpPr>
-        <p:cNvPr id="1" name=""/>
-        <p:cNvGrpSpPr/>
-        <p:nvPr/>
-      </p:nvGrpSpPr>
-      <p:grpSpPr>
-        <a:xfrm>
-          <a:off x="0" y="0"/>
-          <a:ext cx="0" cy="0"/>
-          <a:chOff x="0" y="0"/>
-          <a:chExt cx="0" cy="0"/>
-        </a:xfrm>
-      </p:grpSpPr>
-      <p:sp>
-        <p:nvSpPr>
-          <p:cNvPr id="2" name="タイトル 1">
-            <a:extLst>
-              <a:ext uri="{FF2B5EF4-FFF2-40B4-BE49-F238E27FC236}">
-                <a16:creationId xmlns:a16="http://schemas.microsoft.com/office/drawing/2014/main" id="{10E69773-B60F-F99E-7259-84C025920DA5}"/>
-              </a:ext>
-            </a:extLst>
-          </p:cNvPr>
-          <p:cNvSpPr>
-            <a:spLocks noGrp="1"/>
-          </p:cNvSpPr>
-          <p:nvPr>
-            <p:ph type="title"/>
-          </p:nvPr>
-        </p:nvSpPr>
-        <p:spPr>
-          <a:xfrm>
-            <a:off x="839788" y="457200"/>
-            <a:ext cx="3932237" cy="1600200"/>
-          </a:xfrm>
-        </p:spPr>
-        <p:txBody>
-          <a:bodyPr anchor="b"/>
-          <a:lstStyle>
-            <a:lvl1pPr>
-              <a:defRPr sz="3200"/>
-            </a:lvl1pPr>
-          </a:lstStyle>
-          <a:p>
-            <a:r>
-              <a:rPr kumimoji="1" lang="ja-JP" altLang="en-US"/>
-              <a:t>マスター タイトルの書式設定</a:t>
-            </a:r>
-          </a:p>
-        </p:txBody>
-      </p:sp>
-      <p:sp>
-        <p:nvSpPr>
-          <p:cNvPr id="3" name="図プレースホルダー 2">
-            <a:extLst>
-              <a:ext uri="{FF2B5EF4-FFF2-40B4-BE49-F238E27FC236}">
-                <a16:creationId xmlns:a16="http://schemas.microsoft.com/office/drawing/2014/main" id="{2492595E-8F9F-0A64-3DEB-8E74E0AC3E93}"/>
-              </a:ext>
-            </a:extLst>
-          </p:cNvPr>
-          <p:cNvSpPr>
-            <a:spLocks noGrp="1"/>
-          </p:cNvSpPr>
-          <p:nvPr>
-            <p:ph type="pic" idx="1"/>
-          </p:nvPr>
-        </p:nvSpPr>
-        <p:spPr>
-          <a:xfrm>
-            <a:off x="5183188" y="987425"/>
-            <a:ext cx="6172200" cy="4873625"/>
-          </a:xfrm>
-        </p:spPr>
-        <p:txBody>
-          <a:bodyPr/>
-          <a:lstStyle>
-            <a:lvl1pPr marL="0" indent="0">
-              <a:buNone/>
-              <a:defRPr sz="3200"/>
-            </a:lvl1pPr>
-            <a:lvl2pPr marL="457200" indent="0">
-              <a:buNone/>
-              <a:defRPr sz="2800"/>
-            </a:lvl2pPr>
-            <a:lvl3pPr marL="914400" indent="0">
-              <a:buNone/>
-              <a:defRPr sz="2400"/>
-            </a:lvl3pPr>
-            <a:lvl4pPr marL="1371600" indent="0">
-              <a:buNone/>
-              <a:defRPr sz="2000"/>
-            </a:lvl4pPr>
-            <a:lvl5pPr marL="1828800" indent="0">
-              <a:buNone/>
-              <a:defRPr sz="2000"/>
-            </a:lvl5pPr>
-            <a:lvl6pPr marL="2286000" indent="0">
-              <a:buNone/>
-              <a:defRPr sz="2000"/>
-            </a:lvl6pPr>
-            <a:lvl7pPr marL="2743200" indent="0">
-              <a:buNone/>
-              <a:defRPr sz="2000"/>
-            </a:lvl7pPr>
-            <a:lvl8pPr marL="3200400" indent="0">
-              <a:buNone/>
-              <a:defRPr sz="2000"/>
-            </a:lvl8pPr>
-            <a:lvl9pPr marL="3657600" indent="0">
-              <a:buNone/>
-              <a:defRPr sz="2000"/>
-            </a:lvl9pPr>
-          </a:lstStyle>
-          <a:p>
-            <a:endParaRPr kumimoji="1" lang="ja-JP" altLang="en-US"/>
-          </a:p>
-        </p:txBody>
-      </p:sp>
-      <p:sp>
-        <p:nvSpPr>
-          <p:cNvPr id="4" name="テキスト プレースホルダー 3">
-            <a:extLst>
-              <a:ext uri="{FF2B5EF4-FFF2-40B4-BE49-F238E27FC236}">
-                <a16:creationId xmlns:a16="http://schemas.microsoft.com/office/drawing/2014/main" id="{20BCF0B5-1DAA-A506-3226-5F5AAE8E2214}"/>
-              </a:ext>
-            </a:extLst>
-          </p:cNvPr>
-          <p:cNvSpPr>
-            <a:spLocks noGrp="1"/>
-          </p:cNvSpPr>
-          <p:nvPr>
-            <p:ph type="body" sz="half" idx="2"/>
-          </p:nvPr>
-        </p:nvSpPr>
-        <p:spPr>
-          <a:xfrm>
-            <a:off x="839788" y="2057400"/>
-            <a:ext cx="3932237" cy="3811588"/>
-          </a:xfrm>
-        </p:spPr>
-        <p:txBody>
-          <a:bodyPr/>
-          <a:lstStyle>
-            <a:lvl1pPr marL="0" indent="0">
-              <a:buNone/>
-              <a:defRPr sz="1600"/>
-            </a:lvl1pPr>
-            <a:lvl2pPr marL="457200" indent="0">
-              <a:buNone/>
-              <a:defRPr sz="1400"/>
-            </a:lvl2pPr>
-            <a:lvl3pPr marL="914400" indent="0">
-              <a:buNone/>
-              <a:defRPr sz="1200"/>
-            </a:lvl3pPr>
-            <a:lvl4pPr marL="1371600" indent="0">
-              <a:buNone/>
-              <a:defRPr sz="1000"/>
-            </a:lvl4pPr>
-            <a:lvl5pPr marL="1828800" indent="0">
-              <a:buNone/>
-              <a:defRPr sz="1000"/>
-            </a:lvl5pPr>
-            <a:lvl6pPr marL="2286000" indent="0">
-              <a:buNone/>
-              <a:defRPr sz="1000"/>
-            </a:lvl6pPr>
-            <a:lvl7pPr marL="2743200" indent="0">
-              <a:buNone/>
-              <a:defRPr sz="1000"/>
-            </a:lvl7pPr>
-            <a:lvl8pPr marL="3200400" indent="0">
-              <a:buNone/>
-              <a:defRPr sz="1000"/>
-            </a:lvl8pPr>
-            <a:lvl9pPr marL="3657600" indent="0">
-              <a:buNone/>
-              <a:defRPr sz="1000"/>
-            </a:lvl9pPr>
-          </a:lstStyle>
-          <a:p>
-            <a:pPr lvl="0"/>
-            <a:r>
-              <a:rPr kumimoji="1" lang="ja-JP" altLang="en-US"/>
-              <a:t>マスター テキストの書式設定</a:t>
-            </a:r>
-          </a:p>
-        </p:txBody>
-      </p:sp>
-      <p:sp>
-        <p:nvSpPr>
-          <p:cNvPr id="5" name="日付プレースホルダー 4">
-            <a:extLst>
-              <a:ext uri="{FF2B5EF4-FFF2-40B4-BE49-F238E27FC236}">
-                <a16:creationId xmlns:a16="http://schemas.microsoft.com/office/drawing/2014/main" id="{07D2088E-9319-A7DB-F799-C26F55084C68}"/>
-              </a:ext>
-            </a:extLst>
-          </p:cNvPr>
-          <p:cNvSpPr>
-            <a:spLocks noGrp="1"/>
-          </p:cNvSpPr>
-          <p:nvPr>
-            <p:ph type="dt" sz="half" idx="10"/>
-          </p:nvPr>
-        </p:nvSpPr>
-        <p:spPr/>
-        <p:txBody>
-          <a:bodyPr/>
-          <a:lstStyle/>
-          <a:p>
-            <a:fld id="{E3EFBC31-9ECA-48C0-910F-E09377915FB8}" type="datetimeFigureOut">
-              <a:rPr kumimoji="1" lang="ja-JP" altLang="en-US" smtClean="0"/>
-              <a:t>2026/7/5</a:t>
-            </a:fld>
-            <a:endParaRPr kumimoji="1" lang="ja-JP" altLang="en-US"/>
-          </a:p>
-        </p:txBody>
-      </p:sp>
-      <p:sp>
-        <p:nvSpPr>
-          <p:cNvPr id="6" name="フッター プレースホルダー 5">
-            <a:extLst>
-              <a:ext uri="{FF2B5EF4-FFF2-40B4-BE49-F238E27FC236}">
-                <a16:creationId xmlns:a16="http://schemas.microsoft.com/office/drawing/2014/main" id="{A07741E9-DB06-1561-7A20-0A626D9DD42A}"/>
-              </a:ext>
-            </a:extLst>
-          </p:cNvPr>
-          <p:cNvSpPr>
-            <a:spLocks noGrp="1"/>
-          </p:cNvSpPr>
-          <p:nvPr>
-            <p:ph type="ftr" sz="quarter" idx="11"/>
-          </p:nvPr>
-        </p:nvSpPr>
-        <p:spPr/>
-        <p:txBody>
-          <a:bodyPr/>
-          <a:lstStyle/>
-          <a:p>
-            <a:endParaRPr kumimoji="1" lang="ja-JP" altLang="en-US"/>
-          </a:p>
-        </p:txBody>
-      </p:sp>
-      <p:sp>
-        <p:nvSpPr>
-          <p:cNvPr id="7" name="スライド番号プレースホルダー 6">
-            <a:extLst>
-              <a:ext uri="{FF2B5EF4-FFF2-40B4-BE49-F238E27FC236}">
-                <a16:creationId xmlns:a16="http://schemas.microsoft.com/office/drawing/2014/main" id="{FA71377C-7AF9-AAE2-2C83-B36C5B200143}"/>
-              </a:ext>
-            </a:extLst>
-          </p:cNvPr>
-          <p:cNvSpPr>
-            <a:spLocks noGrp="1"/>
-          </p:cNvSpPr>
-          <p:nvPr>
-            <p:ph type="sldNum" sz="quarter" idx="12"/>
-          </p:nvPr>
-        </p:nvSpPr>
-        <p:spPr/>
-        <p:txBody>
-          <a:bodyPr/>
-          <a:lstStyle/>
-          <a:p>
-            <a:fld id="{9EBFBC76-F46F-4ADD-8228-9529630895ED}" type="slidenum">
-              <a:rPr kumimoji="1" lang="ja-JP" altLang="en-US" smtClean="0"/>
-              <a:t>‹#›</a:t>
-            </a:fld>
-            <a:endParaRPr kumimoji="1" lang="ja-JP" altLang="en-US"/>
-          </a:p>
-        </p:txBody>
-      </p:sp>
-    </p:spTree>
-    <p:extLst>
-      <p:ext uri="{BB962C8B-B14F-4D97-AF65-F5344CB8AC3E}">
-        <p14:creationId xmlns:p14="http://schemas.microsoft.com/office/powerpoint/2010/main" val="3249773560"/>
       </p:ext>
     </p:extLst>
   </p:cSld>
@@ -4119,7 +2044,7 @@
             </a:lvl1pPr>
           </a:lstStyle>
           <a:p>
-            <a:fld id="{E3EFBC31-9ECA-48C0-910F-E09377915FB8}" type="datetimeFigureOut">
+            <a:fld id="{2E0DAD46-3E7E-4E8C-BA70-752182BEDFD1}" type="datetime1">
               <a:rPr kumimoji="1" lang="ja-JP" altLang="en-US" smtClean="0"/>
               <a:t>2026/7/5</a:t>
             </a:fld>
@@ -4228,16 +2153,10 @@
   <p:sldLayoutIdLst>
     <p:sldLayoutId id="2147483649" r:id="rId1"/>
     <p:sldLayoutId id="2147483650" r:id="rId2"/>
-    <p:sldLayoutId id="2147483651" r:id="rId3"/>
-    <p:sldLayoutId id="2147483652" r:id="rId4"/>
-    <p:sldLayoutId id="2147483653" r:id="rId5"/>
-    <p:sldLayoutId id="2147483654" r:id="rId6"/>
-    <p:sldLayoutId id="2147483655" r:id="rId7"/>
-    <p:sldLayoutId id="2147483656" r:id="rId8"/>
-    <p:sldLayoutId id="2147483657" r:id="rId9"/>
-    <p:sldLayoutId id="2147483658" r:id="rId10"/>
-    <p:sldLayoutId id="2147483659" r:id="rId11"/>
+    <p:sldLayoutId id="2147483652" r:id="rId3"/>
+    <p:sldLayoutId id="2147483651" r:id="rId4"/>
   </p:sldLayoutIdLst>
+  <p:hf hdr="0" ftr="0" dt="0"/>
   <p:txStyles>
     <p:titleStyle>
       <a:lvl1pPr algn="l" defTabSz="914400" rtl="0" eaLnBrk="1" latinLnBrk="0" hangingPunct="1">
@@ -4589,6 +2508,35 @@
           <a:lstStyle/>
           <a:p>
             <a:endParaRPr kumimoji="1" lang="ja-JP" altLang="en-US"/>
+          </a:p>
+        </p:txBody>
+      </p:sp>
+      <p:sp>
+        <p:nvSpPr>
+          <p:cNvPr id="4" name="スライド番号プレースホルダー 3">
+            <a:extLst>
+              <a:ext uri="{FF2B5EF4-FFF2-40B4-BE49-F238E27FC236}">
+                <a16:creationId xmlns:a16="http://schemas.microsoft.com/office/drawing/2014/main" id="{A656E950-7634-F7E4-4F77-F9AD5D2D9C95}"/>
+              </a:ext>
+            </a:extLst>
+          </p:cNvPr>
+          <p:cNvSpPr>
+            <a:spLocks noGrp="1"/>
+          </p:cNvSpPr>
+          <p:nvPr>
+            <p:ph type="sldNum" sz="quarter" idx="12"/>
+          </p:nvPr>
+        </p:nvSpPr>
+        <p:spPr/>
+        <p:txBody>
+          <a:bodyPr/>
+          <a:lstStyle/>
+          <a:p>
+            <a:fld id="{9EBFBC76-F46F-4ADD-8228-9529630895ED}" type="slidenum">
+              <a:rPr kumimoji="1" lang="ja-JP" altLang="en-US" smtClean="0"/>
+              <a:t>1</a:t>
+            </a:fld>
+            <a:endParaRPr kumimoji="1" lang="ja-JP" altLang="en-US" dirty="0"/>
           </a:p>
         </p:txBody>
       </p:sp>
@@ -7813,6 +5761,66 @@
           </a:p>
         </p:txBody>
       </p:sp>
+      <p:sp>
+        <p:nvSpPr>
+          <p:cNvPr id="6" name="コンテンツ プレースホルダー 5">
+            <a:extLst>
+              <a:ext uri="{FF2B5EF4-FFF2-40B4-BE49-F238E27FC236}">
+                <a16:creationId xmlns:a16="http://schemas.microsoft.com/office/drawing/2014/main" id="{54608B67-DBA5-2A08-B161-8028FFECE715}"/>
+              </a:ext>
+            </a:extLst>
+          </p:cNvPr>
+          <p:cNvSpPr>
+            <a:spLocks noGrp="1"/>
+          </p:cNvSpPr>
+          <p:nvPr>
+            <p:ph idx="1"/>
+          </p:nvPr>
+        </p:nvSpPr>
+        <p:spPr/>
+        <p:txBody>
+          <a:bodyPr/>
+          <a:lstStyle/>
+          <a:p>
+            <a:endParaRPr lang="ja-JP" altLang="en-US"/>
+          </a:p>
+        </p:txBody>
+      </p:sp>
+      <p:sp>
+        <p:nvSpPr>
+          <p:cNvPr id="3" name="スライド番号プレースホルダー 2">
+            <a:extLst>
+              <a:ext uri="{FF2B5EF4-FFF2-40B4-BE49-F238E27FC236}">
+                <a16:creationId xmlns:a16="http://schemas.microsoft.com/office/drawing/2014/main" id="{A2439E25-54A6-F83A-3181-054B1AA430C9}"/>
+              </a:ext>
+            </a:extLst>
+          </p:cNvPr>
+          <p:cNvSpPr>
+            <a:spLocks noGrp="1"/>
+          </p:cNvSpPr>
+          <p:nvPr>
+            <p:ph type="sldNum" sz="quarter" idx="12"/>
+          </p:nvPr>
+        </p:nvSpPr>
+        <p:spPr>
+          <a:xfrm>
+            <a:off x="8610600" y="6421667"/>
+            <a:ext cx="2743200" cy="365125"/>
+          </a:xfrm>
+        </p:spPr>
+        <p:txBody>
+          <a:bodyPr/>
+          <a:lstStyle/>
+          <a:p>
+            <a:fld id="{9EBFBC76-F46F-4ADD-8228-9529630895ED}" type="slidenum">
+              <a:rPr lang="ja-JP" altLang="en-US" smtClean="0"/>
+              <a:pPr/>
+              <a:t>2</a:t>
+            </a:fld>
+            <a:endParaRPr lang="ja-JP" altLang="en-US" dirty="0"/>
+          </a:p>
+        </p:txBody>
+      </p:sp>
     </p:spTree>
     <p:extLst>
       <p:ext uri="{BB962C8B-B14F-4D97-AF65-F5344CB8AC3E}">
@@ -8121,6 +6129,41 @@
               <a:rPr lang="en-US" altLang="ja-JP" dirty="0"/>
               <a:t>XXX</a:t>
             </a:r>
+          </a:p>
+        </p:txBody>
+      </p:sp>
+      <p:sp>
+        <p:nvSpPr>
+          <p:cNvPr id="7" name="スライド番号プレースホルダー 6">
+            <a:extLst>
+              <a:ext uri="{FF2B5EF4-FFF2-40B4-BE49-F238E27FC236}">
+                <a16:creationId xmlns:a16="http://schemas.microsoft.com/office/drawing/2014/main" id="{BA6E3DFF-FEDB-3CA8-6057-3C65F040ED26}"/>
+              </a:ext>
+            </a:extLst>
+          </p:cNvPr>
+          <p:cNvSpPr>
+            <a:spLocks noGrp="1"/>
+          </p:cNvSpPr>
+          <p:nvPr>
+            <p:ph type="sldNum" sz="quarter" idx="12"/>
+          </p:nvPr>
+        </p:nvSpPr>
+        <p:spPr>
+          <a:xfrm>
+            <a:off x="8610600" y="6421667"/>
+            <a:ext cx="2743200" cy="365125"/>
+          </a:xfrm>
+        </p:spPr>
+        <p:txBody>
+          <a:bodyPr/>
+          <a:lstStyle/>
+          <a:p>
+            <a:fld id="{9EBFBC76-F46F-4ADD-8228-9529630895ED}" type="slidenum">
+              <a:rPr lang="ja-JP" altLang="en-US" smtClean="0"/>
+              <a:pPr/>
+              <a:t>3</a:t>
+            </a:fld>
+            <a:endParaRPr lang="ja-JP" altLang="en-US" dirty="0"/>
           </a:p>
         </p:txBody>
       </p:sp>
@@ -8206,7 +6249,12 @@
             <p:ph type="title"/>
           </p:nvPr>
         </p:nvSpPr>
-        <p:spPr/>
+        <p:spPr>
+          <a:xfrm>
+            <a:off x="167951" y="365124"/>
+            <a:ext cx="11877869" cy="540000"/>
+          </a:xfrm>
+        </p:spPr>
         <p:txBody>
           <a:bodyPr>
             <a:normAutofit/>
@@ -8214,13 +6262,7 @@
           <a:lstStyle/>
           <a:p>
             <a:r>
-              <a:rPr lang="ja-JP" altLang="en-US" dirty="0">
-                <a:solidFill>
-                  <a:srgbClr val="070F26"/>
-                </a:solidFill>
-                <a:latin typeface="Meiryo UI"/>
-                <a:ea typeface="Meiryo UI"/>
-              </a:rPr>
+              <a:rPr lang="ja-JP" altLang="en-US"/>
               <a:t>提案資料の作成について</a:t>
             </a:r>
             <a:endParaRPr lang="ja-JP" altLang="en-US" dirty="0"/>
@@ -8246,12 +6288,12 @@
         <p:spPr>
           <a:xfrm>
             <a:off x="168275" y="1073150"/>
-            <a:ext cx="11877675" cy="5103813"/>
+            <a:ext cx="11877675" cy="5419725"/>
           </a:xfrm>
         </p:spPr>
         <p:txBody>
           <a:bodyPr>
-            <a:normAutofit lnSpcReduction="10000"/>
+            <a:normAutofit/>
           </a:bodyPr>
           <a:lstStyle/>
           <a:p>
@@ -8262,10 +6304,7 @@
             <a:endParaRPr lang="en-US" altLang="ja-JP" dirty="0"/>
           </a:p>
           <a:p>
-            <a:pPr marL="914400" lvl="1" indent="-457200">
-              <a:buFont typeface="+mj-lt"/>
-              <a:buAutoNum type="arabicPeriod"/>
-            </a:pPr>
+            <a:pPr lvl="1"/>
             <a:r>
               <a:rPr lang="ja-JP" altLang="en-US" dirty="0"/>
               <a:t>提案テーマの検討</a:t>
@@ -8281,10 +6320,7 @@
             <a:endParaRPr lang="en-US" altLang="ja-JP" dirty="0"/>
           </a:p>
           <a:p>
-            <a:pPr marL="914400" lvl="1" indent="-457200">
-              <a:buFont typeface="+mj-lt"/>
-              <a:buAutoNum type="arabicPeriod"/>
-            </a:pPr>
+            <a:pPr lvl="1"/>
             <a:r>
               <a:rPr lang="ja-JP" altLang="en-US" dirty="0"/>
               <a:t>提案テーマの意見交換</a:t>
@@ -8300,10 +6336,7 @@
             <a:endParaRPr lang="en-US" altLang="ja-JP" dirty="0"/>
           </a:p>
           <a:p>
-            <a:pPr marL="914400" lvl="1" indent="-457200">
-              <a:buFont typeface="+mj-lt"/>
-              <a:buAutoNum type="arabicPeriod"/>
-            </a:pPr>
+            <a:pPr lvl="1"/>
             <a:r>
               <a:rPr lang="ja-JP" altLang="en-US" dirty="0"/>
               <a:t>提案内容の調査</a:t>
@@ -8327,10 +6360,7 @@
             <a:endParaRPr lang="en-US" altLang="ja-JP" dirty="0"/>
           </a:p>
           <a:p>
-            <a:pPr marL="914400" lvl="1" indent="-457200">
-              <a:buFont typeface="+mj-lt"/>
-              <a:buAutoNum type="arabicPeriod"/>
-            </a:pPr>
+            <a:pPr lvl="1"/>
             <a:r>
               <a:rPr lang="ja-JP" altLang="en-US" dirty="0"/>
               <a:t>提案内容の具体化</a:t>
@@ -8361,10 +6391,7 @@
             <a:endParaRPr lang="en-US" altLang="ja-JP" dirty="0"/>
           </a:p>
           <a:p>
-            <a:pPr marL="914400" lvl="1" indent="-457200">
-              <a:buFont typeface="+mj-lt"/>
-              <a:buAutoNum type="arabicPeriod"/>
-            </a:pPr>
+            <a:pPr lvl="1"/>
             <a:r>
               <a:rPr lang="ja-JP" altLang="en-US" dirty="0"/>
               <a:t>提案資料の作成</a:t>
@@ -8388,10 +6415,7 @@
             <a:endParaRPr lang="en-US" altLang="ja-JP" dirty="0"/>
           </a:p>
           <a:p>
-            <a:pPr marL="914400" lvl="1" indent="-457200">
-              <a:buFont typeface="+mj-lt"/>
-              <a:buAutoNum type="arabicPeriod"/>
-            </a:pPr>
+            <a:pPr lvl="1"/>
             <a:r>
               <a:rPr lang="ja-JP" altLang="en-US" dirty="0"/>
               <a:t>提案資料の提出</a:t>
@@ -8405,6 +6429,41 @@
               <a:t>指定の場所に提案資料を提出する。</a:t>
             </a:r>
             <a:endParaRPr lang="en-US" altLang="ja-JP" dirty="0"/>
+          </a:p>
+        </p:txBody>
+      </p:sp>
+      <p:sp>
+        <p:nvSpPr>
+          <p:cNvPr id="7" name="スライド番号プレースホルダー 6">
+            <a:extLst>
+              <a:ext uri="{FF2B5EF4-FFF2-40B4-BE49-F238E27FC236}">
+                <a16:creationId xmlns:a16="http://schemas.microsoft.com/office/drawing/2014/main" id="{8B202C39-A360-1EF2-0B08-739B3CE88A64}"/>
+              </a:ext>
+            </a:extLst>
+          </p:cNvPr>
+          <p:cNvSpPr>
+            <a:spLocks noGrp="1"/>
+          </p:cNvSpPr>
+          <p:nvPr>
+            <p:ph type="sldNum" sz="quarter" idx="12"/>
+          </p:nvPr>
+        </p:nvSpPr>
+        <p:spPr>
+          <a:xfrm>
+            <a:off x="8610600" y="6421667"/>
+            <a:ext cx="2743200" cy="365125"/>
+          </a:xfrm>
+        </p:spPr>
+        <p:txBody>
+          <a:bodyPr/>
+          <a:lstStyle/>
+          <a:p>
+            <a:fld id="{9EBFBC76-F46F-4ADD-8228-9529630895ED}" type="slidenum">
+              <a:rPr lang="ja-JP" altLang="en-US" smtClean="0"/>
+              <a:pPr/>
+              <a:t>4</a:t>
+            </a:fld>
+            <a:endParaRPr lang="ja-JP" altLang="en-US" dirty="0"/>
           </a:p>
         </p:txBody>
       </p:sp>
@@ -8490,7 +6549,12 @@
             <p:ph type="title"/>
           </p:nvPr>
         </p:nvSpPr>
-        <p:spPr/>
+        <p:spPr>
+          <a:xfrm>
+            <a:off x="167951" y="365124"/>
+            <a:ext cx="11877869" cy="540000"/>
+          </a:xfrm>
+        </p:spPr>
         <p:txBody>
           <a:bodyPr>
             <a:normAutofit/>
@@ -8498,13 +6562,7 @@
           <a:lstStyle/>
           <a:p>
             <a:r>
-              <a:rPr lang="ja-JP" altLang="en-US" dirty="0">
-                <a:solidFill>
-                  <a:srgbClr val="070F26"/>
-                </a:solidFill>
-                <a:latin typeface="Meiryo UI"/>
-                <a:ea typeface="Meiryo UI"/>
-              </a:rPr>
+              <a:rPr lang="ja-JP" altLang="en-US"/>
               <a:t>提案の実施について</a:t>
             </a:r>
             <a:endParaRPr lang="ja-JP" altLang="en-US" dirty="0"/>
@@ -8529,8 +6587,8 @@
         </p:nvSpPr>
         <p:spPr>
           <a:xfrm>
-            <a:off x="168275" y="1073150"/>
-            <a:ext cx="11877675" cy="5103813"/>
+            <a:off x="167951" y="1073020"/>
+            <a:ext cx="11877869" cy="5103943"/>
           </a:xfrm>
         </p:spPr>
         <p:txBody>
@@ -8540,74 +6598,100 @@
           <a:lstStyle/>
           <a:p>
             <a:r>
-              <a:rPr lang="ja-JP" altLang="en-US" dirty="0"/>
+              <a:rPr lang="ja-JP" altLang="en-US"/>
               <a:t>提案の実施の流れ</a:t>
             </a:r>
+            <a:endParaRPr lang="en-US" altLang="ja-JP"/>
+          </a:p>
+          <a:p>
+            <a:pPr lvl="1"/>
+            <a:r>
+              <a:rPr lang="ja-JP" altLang="en-US"/>
+              <a:t>発表順の決定</a:t>
+            </a:r>
+            <a:endParaRPr lang="en-US" altLang="ja-JP"/>
+          </a:p>
+          <a:p>
+            <a:pPr lvl="2"/>
+            <a:r>
+              <a:rPr lang="ja-JP" altLang="en-US"/>
+              <a:t>チーム内で発表順を決める。</a:t>
+            </a:r>
+            <a:endParaRPr lang="en-US" altLang="ja-JP"/>
+          </a:p>
+          <a:p>
+            <a:pPr lvl="1"/>
+            <a:r>
+              <a:rPr lang="ja-JP" altLang="en-US"/>
+              <a:t>提案の実施</a:t>
+            </a:r>
+            <a:endParaRPr lang="en-US" altLang="ja-JP"/>
+          </a:p>
+          <a:p>
+            <a:pPr lvl="2"/>
+            <a:r>
+              <a:rPr lang="ja-JP" altLang="en-US"/>
+              <a:t>提案資料を用いて提案を実施する。</a:t>
+            </a:r>
+            <a:endParaRPr lang="en-US" altLang="ja-JP"/>
+          </a:p>
+          <a:p>
+            <a:pPr lvl="1"/>
+            <a:r>
+              <a:rPr lang="ja-JP" altLang="en-US"/>
+              <a:t>提案のフィードバック</a:t>
+            </a:r>
+            <a:endParaRPr lang="en-US" altLang="ja-JP"/>
+          </a:p>
+          <a:p>
+            <a:pPr lvl="2"/>
+            <a:r>
+              <a:rPr lang="ja-JP" altLang="en-US"/>
+              <a:t>提案資料や提案方法についての</a:t>
+            </a:r>
+            <a:br>
+              <a:rPr lang="en-US" altLang="ja-JP"/>
+            </a:br>
+            <a:r>
+              <a:rPr lang="ja-JP" altLang="en-US"/>
+              <a:t>フィードバック（改善点、アドバイス）を受ける。</a:t>
+            </a:r>
             <a:endParaRPr lang="en-US" altLang="ja-JP" dirty="0"/>
           </a:p>
-          <a:p>
-            <a:pPr marL="914400" lvl="1" indent="-457200">
-              <a:buFont typeface="+mj-lt"/>
-              <a:buAutoNum type="arabicPeriod"/>
-            </a:pPr>
-            <a:r>
-              <a:rPr lang="ja-JP" altLang="en-US" dirty="0"/>
-              <a:t>発表順の決定</a:t>
-            </a:r>
-            <a:endParaRPr lang="en-US" altLang="ja-JP" dirty="0"/>
-          </a:p>
-          <a:p>
-            <a:pPr lvl="2"/>
-            <a:r>
-              <a:rPr lang="ja-JP" altLang="en-US" dirty="0"/>
-              <a:t>チーム内で発表順を決める。</a:t>
-            </a:r>
-            <a:endParaRPr lang="en-US" altLang="ja-JP" dirty="0"/>
-          </a:p>
-          <a:p>
-            <a:pPr marL="914400" lvl="1" indent="-457200">
-              <a:buFont typeface="+mj-lt"/>
-              <a:buAutoNum type="arabicPeriod"/>
-            </a:pPr>
-            <a:r>
-              <a:rPr lang="ja-JP" altLang="en-US" dirty="0"/>
-              <a:t>提案の実施</a:t>
-            </a:r>
-            <a:endParaRPr lang="en-US" altLang="ja-JP" dirty="0"/>
-          </a:p>
-          <a:p>
-            <a:pPr lvl="2"/>
-            <a:r>
-              <a:rPr lang="ja-JP" altLang="en-US" dirty="0"/>
-              <a:t>提案資料を用いて提案を実施する。</a:t>
-            </a:r>
-            <a:endParaRPr lang="en-US" altLang="ja-JP" dirty="0"/>
-          </a:p>
-          <a:p>
-            <a:pPr marL="914400" lvl="1" indent="-457200">
-              <a:buFont typeface="+mj-lt"/>
-              <a:buAutoNum type="arabicPeriod"/>
-            </a:pPr>
-            <a:r>
-              <a:rPr lang="ja-JP" altLang="en-US" dirty="0"/>
-              <a:t>提案のフィードバック</a:t>
-            </a:r>
-            <a:endParaRPr lang="en-US" altLang="ja-JP" dirty="0"/>
-          </a:p>
-          <a:p>
-            <a:pPr lvl="2"/>
-            <a:r>
-              <a:rPr lang="ja-JP" altLang="en-US" dirty="0"/>
-              <a:t>提案資料や提案方法についての</a:t>
-            </a:r>
-            <a:br>
-              <a:rPr lang="en-US" altLang="ja-JP" dirty="0"/>
-            </a:br>
-            <a:r>
-              <a:rPr lang="ja-JP" altLang="en-US" dirty="0"/>
-              <a:t>フィードバック（改善点、アドバイス）を受ける。</a:t>
-            </a:r>
-            <a:endParaRPr lang="en-US" altLang="ja-JP" dirty="0"/>
+        </p:txBody>
+      </p:sp>
+      <p:sp>
+        <p:nvSpPr>
+          <p:cNvPr id="8" name="スライド番号プレースホルダー 7">
+            <a:extLst>
+              <a:ext uri="{FF2B5EF4-FFF2-40B4-BE49-F238E27FC236}">
+                <a16:creationId xmlns:a16="http://schemas.microsoft.com/office/drawing/2014/main" id="{51794224-3427-C939-F83C-99865602E755}"/>
+              </a:ext>
+            </a:extLst>
+          </p:cNvPr>
+          <p:cNvSpPr>
+            <a:spLocks noGrp="1"/>
+          </p:cNvSpPr>
+          <p:nvPr>
+            <p:ph type="sldNum" sz="quarter" idx="12"/>
+          </p:nvPr>
+        </p:nvSpPr>
+        <p:spPr>
+          <a:xfrm>
+            <a:off x="8610600" y="6421667"/>
+            <a:ext cx="2743200" cy="365125"/>
+          </a:xfrm>
+        </p:spPr>
+        <p:txBody>
+          <a:bodyPr/>
+          <a:lstStyle/>
+          <a:p>
+            <a:fld id="{9EBFBC76-F46F-4ADD-8228-9529630895ED}" type="slidenum">
+              <a:rPr lang="ja-JP" altLang="en-US" smtClean="0"/>
+              <a:pPr/>
+              <a:t>5</a:t>
+            </a:fld>
+            <a:endParaRPr lang="ja-JP" altLang="en-US" dirty="0"/>
           </a:p>
         </p:txBody>
       </p:sp>
@@ -8803,73 +6887,151 @@
             </a:lvl9pPr>
           </a:lstStyle>
           <a:p>
-            <a:pPr lvl="1"/>
-            <a:r>
-              <a:rPr lang="ja-JP" altLang="en-US" dirty="0"/>
+            <a:pPr marL="457200" lvl="1" indent="0">
+              <a:buNone/>
+            </a:pPr>
+            <a:r>
+              <a:rPr lang="en-US" altLang="ja-JP" dirty="0">
+                <a:solidFill>
+                  <a:srgbClr val="FF0000"/>
+                </a:solidFill>
+              </a:rPr>
+              <a:t>※</a:t>
+            </a:r>
+            <a:r>
+              <a:rPr lang="ja-JP" altLang="en-US" dirty="0">
+                <a:solidFill>
+                  <a:srgbClr val="FF0000"/>
+                </a:solidFill>
+              </a:rPr>
               <a:t>手順</a:t>
             </a:r>
             <a:r>
-              <a:rPr lang="en-US" altLang="ja-JP" dirty="0"/>
+              <a:rPr lang="en-US" altLang="ja-JP" dirty="0">
+                <a:solidFill>
+                  <a:srgbClr val="FF0000"/>
+                </a:solidFill>
+              </a:rPr>
               <a:t>2~</a:t>
             </a:r>
             <a:r>
-              <a:rPr lang="ja-JP" altLang="en-US" dirty="0"/>
+              <a:rPr lang="ja-JP" altLang="en-US" dirty="0">
+                <a:solidFill>
+                  <a:srgbClr val="FF0000"/>
+                </a:solidFill>
+              </a:rPr>
               <a:t>手順</a:t>
             </a:r>
             <a:r>
-              <a:rPr lang="en-US" altLang="ja-JP" dirty="0"/>
+              <a:rPr lang="en-US" altLang="ja-JP" dirty="0">
+                <a:solidFill>
+                  <a:srgbClr val="FF0000"/>
+                </a:solidFill>
+              </a:rPr>
               <a:t>3</a:t>
             </a:r>
             <a:r>
-              <a:rPr lang="ja-JP" altLang="en-US" dirty="0"/>
+              <a:rPr lang="ja-JP" altLang="en-US" dirty="0">
+                <a:solidFill>
+                  <a:srgbClr val="FF0000"/>
+                </a:solidFill>
+              </a:rPr>
               <a:t>をチーム内で繰り返してください。</a:t>
             </a:r>
-            <a:endParaRPr lang="en-US" altLang="ja-JP" dirty="0"/>
+            <a:endParaRPr lang="en-US" altLang="ja-JP" dirty="0">
+              <a:solidFill>
+                <a:srgbClr val="FF0000"/>
+              </a:solidFill>
+            </a:endParaRPr>
           </a:p>
           <a:p>
             <a:pPr lvl="2"/>
             <a:r>
-              <a:rPr lang="ja-JP" altLang="en-US" dirty="0"/>
+              <a:rPr lang="ja-JP" altLang="en-US" dirty="0">
+                <a:solidFill>
+                  <a:srgbClr val="FF0000"/>
+                </a:solidFill>
+              </a:rPr>
               <a:t>手順</a:t>
             </a:r>
             <a:r>
-              <a:rPr lang="en-US" altLang="ja-JP" dirty="0"/>
+              <a:rPr lang="en-US" altLang="ja-JP" dirty="0">
+                <a:solidFill>
+                  <a:srgbClr val="FF0000"/>
+                </a:solidFill>
+              </a:rPr>
               <a:t>2</a:t>
             </a:r>
             <a:r>
-              <a:rPr lang="ja-JP" altLang="en-US" dirty="0"/>
+              <a:rPr lang="ja-JP" altLang="en-US" dirty="0">
+                <a:solidFill>
+                  <a:srgbClr val="FF0000"/>
+                </a:solidFill>
+              </a:rPr>
               <a:t>：</a:t>
             </a:r>
             <a:r>
-              <a:rPr lang="en-US" altLang="ja-JP" dirty="0"/>
+              <a:rPr lang="en-US" altLang="ja-JP" dirty="0">
+                <a:solidFill>
+                  <a:srgbClr val="FF0000"/>
+                </a:solidFill>
+              </a:rPr>
               <a:t>15</a:t>
             </a:r>
             <a:r>
-              <a:rPr lang="ja-JP" altLang="en-US" dirty="0"/>
+              <a:rPr lang="ja-JP" altLang="en-US" dirty="0">
+                <a:solidFill>
+                  <a:srgbClr val="FF0000"/>
+                </a:solidFill>
+              </a:rPr>
               <a:t>分</a:t>
             </a:r>
-            <a:endParaRPr lang="en-US" altLang="ja-JP" dirty="0"/>
+            <a:endParaRPr lang="en-US" altLang="ja-JP" dirty="0">
+              <a:solidFill>
+                <a:srgbClr val="FF0000"/>
+              </a:solidFill>
+            </a:endParaRPr>
           </a:p>
           <a:p>
             <a:pPr lvl="2"/>
             <a:r>
-              <a:rPr lang="ja-JP" altLang="en-US" dirty="0"/>
+              <a:rPr lang="ja-JP" altLang="en-US" dirty="0">
+                <a:solidFill>
+                  <a:srgbClr val="FF0000"/>
+                </a:solidFill>
+              </a:rPr>
               <a:t>手順</a:t>
             </a:r>
             <a:r>
-              <a:rPr lang="en-US" altLang="ja-JP" dirty="0"/>
+              <a:rPr lang="en-US" altLang="ja-JP" dirty="0">
+                <a:solidFill>
+                  <a:srgbClr val="FF0000"/>
+                </a:solidFill>
+              </a:rPr>
               <a:t>3</a:t>
             </a:r>
             <a:r>
-              <a:rPr lang="ja-JP" altLang="en-US" dirty="0"/>
+              <a:rPr lang="ja-JP" altLang="en-US" dirty="0">
+                <a:solidFill>
+                  <a:srgbClr val="FF0000"/>
+                </a:solidFill>
+              </a:rPr>
               <a:t>：</a:t>
             </a:r>
             <a:r>
-              <a:rPr lang="en-US" altLang="ja-JP" dirty="0"/>
+              <a:rPr lang="en-US" altLang="ja-JP" dirty="0">
+                <a:solidFill>
+                  <a:srgbClr val="FF0000"/>
+                </a:solidFill>
+              </a:rPr>
               <a:t>5</a:t>
             </a:r>
             <a:r>
-              <a:rPr lang="ja-JP" altLang="en-US" dirty="0"/>
+              <a:rPr lang="ja-JP" altLang="en-US" dirty="0">
+                <a:solidFill>
+                  <a:srgbClr val="FF0000"/>
+                </a:solidFill>
+              </a:rPr>
               <a:t>分</a:t>
             </a:r>
           </a:p>
@@ -8957,7 +7119,12 @@
             <p:ph type="title"/>
           </p:nvPr>
         </p:nvSpPr>
-        <p:spPr/>
+        <p:spPr>
+          <a:xfrm>
+            <a:off x="167951" y="365124"/>
+            <a:ext cx="11877869" cy="540000"/>
+          </a:xfrm>
+        </p:spPr>
         <p:txBody>
           <a:bodyPr>
             <a:normAutofit/>
@@ -8965,16 +7132,9 @@
           <a:lstStyle/>
           <a:p>
             <a:r>
-              <a:rPr lang="ja-JP" altLang="en-US" dirty="0">
-                <a:solidFill>
-                  <a:srgbClr val="070F26"/>
-                </a:solidFill>
-                <a:latin typeface="Meiryo UI"/>
-                <a:ea typeface="Meiryo UI"/>
-              </a:rPr>
+              <a:rPr lang="ja-JP" altLang="en-US" dirty="0"/>
               <a:t>提案の改善について</a:t>
             </a:r>
-            <a:endParaRPr lang="ja-JP" altLang="en-US" dirty="0"/>
           </a:p>
         </p:txBody>
       </p:sp>
@@ -8996,8 +7156,8 @@
         </p:nvSpPr>
         <p:spPr>
           <a:xfrm>
-            <a:off x="168275" y="1073150"/>
-            <a:ext cx="11877675" cy="5103813"/>
+            <a:off x="167951" y="1073020"/>
+            <a:ext cx="11877869" cy="5103943"/>
           </a:xfrm>
         </p:spPr>
         <p:txBody>
@@ -9013,10 +7173,7 @@
             <a:endParaRPr lang="en-US" altLang="ja-JP" dirty="0"/>
           </a:p>
           <a:p>
-            <a:pPr marL="914400" lvl="1" indent="-457200">
-              <a:buFont typeface="+mj-lt"/>
-              <a:buAutoNum type="arabicPeriod"/>
-            </a:pPr>
+            <a:pPr lvl="1"/>
             <a:r>
               <a:rPr lang="ja-JP" altLang="en-US" dirty="0"/>
               <a:t>フィードバック内容の整理</a:t>
@@ -9039,10 +7196,7 @@
             <a:endParaRPr lang="en-US" altLang="ja-JP" dirty="0"/>
           </a:p>
           <a:p>
-            <a:pPr marL="914400" lvl="1" indent="-457200">
-              <a:buFont typeface="+mj-lt"/>
-              <a:buAutoNum type="arabicPeriod"/>
-            </a:pPr>
+            <a:pPr lvl="1"/>
             <a:r>
               <a:rPr lang="ja-JP" altLang="en-US" dirty="0"/>
               <a:t>提案資料の修正</a:t>
@@ -9058,10 +7212,7 @@
             <a:endParaRPr lang="en-US" altLang="ja-JP" dirty="0"/>
           </a:p>
           <a:p>
-            <a:pPr marL="914400" lvl="1" indent="-457200">
-              <a:buFont typeface="+mj-lt"/>
-              <a:buAutoNum type="arabicPeriod"/>
-            </a:pPr>
+            <a:pPr lvl="1"/>
             <a:r>
               <a:rPr lang="ja-JP" altLang="en-US" dirty="0"/>
               <a:t>提案資料の確認（任意）</a:t>
@@ -9092,10 +7243,7 @@
             <a:endParaRPr lang="en-US" altLang="ja-JP" dirty="0"/>
           </a:p>
           <a:p>
-            <a:pPr marL="914400" lvl="1" indent="-457200">
-              <a:buFont typeface="+mj-lt"/>
-              <a:buAutoNum type="arabicPeriod"/>
-            </a:pPr>
+            <a:pPr lvl="1"/>
             <a:r>
               <a:rPr lang="ja-JP" altLang="en-US" dirty="0"/>
               <a:t>提案資料の提出</a:t>
@@ -9111,36 +7259,19 @@
             <a:endParaRPr lang="en-US" altLang="ja-JP" dirty="0"/>
           </a:p>
           <a:p>
-            <a:pPr marL="1371600" lvl="3" indent="0">
-              <a:buNone/>
-            </a:pPr>
-            <a:r>
-              <a:rPr lang="en-US" altLang="ja-JP" dirty="0">
-                <a:solidFill>
-                  <a:srgbClr val="FF0000"/>
-                </a:solidFill>
-              </a:rPr>
+            <a:pPr lvl="3"/>
+            <a:r>
+              <a:rPr lang="en-US" altLang="ja-JP" dirty="0"/>
               <a:t>※</a:t>
             </a:r>
             <a:r>
-              <a:rPr lang="ja-JP" altLang="en-US" dirty="0">
-                <a:solidFill>
-                  <a:srgbClr val="FF0000"/>
-                </a:solidFill>
-              </a:rPr>
+              <a:rPr lang="ja-JP" altLang="en-US" dirty="0"/>
               <a:t>修正前の提案資料は不要です。</a:t>
             </a:r>
-            <a:endParaRPr lang="en-US" altLang="ja-JP" dirty="0">
-              <a:solidFill>
-                <a:srgbClr val="FF0000"/>
-              </a:solidFill>
-            </a:endParaRPr>
-          </a:p>
-          <a:p>
-            <a:pPr marL="914400" lvl="1" indent="-457200">
-              <a:buFont typeface="+mj-lt"/>
-              <a:buAutoNum type="arabicPeriod"/>
-            </a:pPr>
+            <a:endParaRPr lang="en-US" altLang="ja-JP" dirty="0"/>
+          </a:p>
+          <a:p>
+            <a:pPr lvl="1"/>
             <a:r>
               <a:rPr lang="ja-JP" altLang="en-US" dirty="0"/>
               <a:t>最終発表の準備</a:t>
@@ -9154,6 +7285,41 @@
               <a:t>最終発表（研修終了後に事業部で実施する成果発表）に向けた準備を行います。</a:t>
             </a:r>
             <a:endParaRPr lang="en-US" altLang="ja-JP" dirty="0"/>
+          </a:p>
+        </p:txBody>
+      </p:sp>
+      <p:sp>
+        <p:nvSpPr>
+          <p:cNvPr id="2" name="スライド番号プレースホルダー 1">
+            <a:extLst>
+              <a:ext uri="{FF2B5EF4-FFF2-40B4-BE49-F238E27FC236}">
+                <a16:creationId xmlns:a16="http://schemas.microsoft.com/office/drawing/2014/main" id="{EC925ADA-44A1-80C6-C5E6-B4095F277D52}"/>
+              </a:ext>
+            </a:extLst>
+          </p:cNvPr>
+          <p:cNvSpPr>
+            <a:spLocks noGrp="1"/>
+          </p:cNvSpPr>
+          <p:nvPr>
+            <p:ph type="sldNum" sz="quarter" idx="12"/>
+          </p:nvPr>
+        </p:nvSpPr>
+        <p:spPr>
+          <a:xfrm>
+            <a:off x="8610600" y="6421667"/>
+            <a:ext cx="2743200" cy="365125"/>
+          </a:xfrm>
+        </p:spPr>
+        <p:txBody>
+          <a:bodyPr/>
+          <a:lstStyle/>
+          <a:p>
+            <a:fld id="{9EBFBC76-F46F-4ADD-8228-9529630895ED}" type="slidenum">
+              <a:rPr lang="ja-JP" altLang="en-US" smtClean="0"/>
+              <a:pPr/>
+              <a:t>6</a:t>
+            </a:fld>
+            <a:endParaRPr lang="ja-JP" altLang="en-US" dirty="0"/>
           </a:p>
         </p:txBody>
       </p:sp>

--- a/00_オリエンテーション/【AI Native研修-提案】研修の概要.pptx
+++ b/00_オリエンテーション/【AI Native研修-提案】研修の概要.pptx
@@ -5,7 +5,7 @@
     <p:sldMasterId id="2147483648" r:id="rId1"/>
   </p:sldMasterIdLst>
   <p:notesMasterIdLst>
-    <p:notesMasterId r:id="rId8"/>
+    <p:notesMasterId r:id="rId9"/>
   </p:notesMasterIdLst>
   <p:sldIdLst>
     <p:sldId id="256" r:id="rId2"/>
@@ -14,6 +14,7 @@
     <p:sldId id="258" r:id="rId5"/>
     <p:sldId id="259" r:id="rId6"/>
     <p:sldId id="260" r:id="rId7"/>
+    <p:sldId id="262" r:id="rId8"/>
   </p:sldIdLst>
   <p:sldSz cx="12192000" cy="6858000"/>
   <p:notesSz cx="6858000" cy="9144000"/>
@@ -1008,6 +1009,114 @@
     <p:extLst>
       <p:ext uri="{BB962C8B-B14F-4D97-AF65-F5344CB8AC3E}">
         <p14:creationId xmlns:p14="http://schemas.microsoft.com/office/powerpoint/2010/main" val="1675767578"/>
+      </p:ext>
+    </p:extLst>
+  </p:cSld>
+  <p:clrMapOvr>
+    <a:masterClrMapping/>
+  </p:clrMapOvr>
+</p:notes>
+</file>
+
+<file path=ppt/notesSlides/notesSlide6.xml><?xml version="1.0" encoding="utf-8"?>
+<p:notes xmlns:a="http://schemas.openxmlformats.org/drawingml/2006/main" xmlns:r="http://schemas.openxmlformats.org/officeDocument/2006/relationships" xmlns:p="http://schemas.openxmlformats.org/presentationml/2006/main">
+  <p:cSld>
+    <p:spTree>
+      <p:nvGrpSpPr>
+        <p:cNvPr id="1" name="">
+          <a:extLst>
+            <a:ext uri="{FF2B5EF4-FFF2-40B4-BE49-F238E27FC236}">
+              <a16:creationId xmlns:a16="http://schemas.microsoft.com/office/drawing/2014/main" id="{2BF04D45-836F-4C02-C12D-B909AF35C12D}"/>
+            </a:ext>
+          </a:extLst>
+        </p:cNvPr>
+        <p:cNvGrpSpPr/>
+        <p:nvPr/>
+      </p:nvGrpSpPr>
+      <p:grpSpPr>
+        <a:xfrm>
+          <a:off x="0" y="0"/>
+          <a:ext cx="0" cy="0"/>
+          <a:chOff x="0" y="0"/>
+          <a:chExt cx="0" cy="0"/>
+        </a:xfrm>
+      </p:grpSpPr>
+      <p:sp>
+        <p:nvSpPr>
+          <p:cNvPr id="2" name="スライド イメージ プレースホルダー 1">
+            <a:extLst>
+              <a:ext uri="{FF2B5EF4-FFF2-40B4-BE49-F238E27FC236}">
+                <a16:creationId xmlns:a16="http://schemas.microsoft.com/office/drawing/2014/main" id="{F9A0B078-CB48-7766-A529-A40AA99CB2CC}"/>
+              </a:ext>
+            </a:extLst>
+          </p:cNvPr>
+          <p:cNvSpPr>
+            <a:spLocks noGrp="1" noRot="1" noChangeAspect="1"/>
+          </p:cNvSpPr>
+          <p:nvPr>
+            <p:ph type="sldImg"/>
+          </p:nvPr>
+        </p:nvSpPr>
+        <p:spPr/>
+      </p:sp>
+      <p:sp>
+        <p:nvSpPr>
+          <p:cNvPr id="3" name="ノート プレースホルダー 2">
+            <a:extLst>
+              <a:ext uri="{FF2B5EF4-FFF2-40B4-BE49-F238E27FC236}">
+                <a16:creationId xmlns:a16="http://schemas.microsoft.com/office/drawing/2014/main" id="{5E288ED5-6D3A-4E94-77FC-A6C1B0D02303}"/>
+              </a:ext>
+            </a:extLst>
+          </p:cNvPr>
+          <p:cNvSpPr>
+            <a:spLocks noGrp="1"/>
+          </p:cNvSpPr>
+          <p:nvPr>
+            <p:ph type="body" idx="1"/>
+          </p:nvPr>
+        </p:nvSpPr>
+        <p:spPr/>
+        <p:txBody>
+          <a:bodyPr/>
+          <a:lstStyle/>
+          <a:p>
+            <a:endParaRPr kumimoji="1" lang="ja-JP" altLang="en-US" dirty="0"/>
+          </a:p>
+        </p:txBody>
+      </p:sp>
+      <p:sp>
+        <p:nvSpPr>
+          <p:cNvPr id="4" name="スライド番号プレースホルダー 3">
+            <a:extLst>
+              <a:ext uri="{FF2B5EF4-FFF2-40B4-BE49-F238E27FC236}">
+                <a16:creationId xmlns:a16="http://schemas.microsoft.com/office/drawing/2014/main" id="{C6E6FD42-49CC-9B82-E38A-4E6CD8A41E72}"/>
+              </a:ext>
+            </a:extLst>
+          </p:cNvPr>
+          <p:cNvSpPr>
+            <a:spLocks noGrp="1"/>
+          </p:cNvSpPr>
+          <p:nvPr>
+            <p:ph type="sldNum" sz="quarter" idx="5"/>
+          </p:nvPr>
+        </p:nvSpPr>
+        <p:spPr/>
+        <p:txBody>
+          <a:bodyPr/>
+          <a:lstStyle/>
+          <a:p>
+            <a:fld id="{A58A0B64-6D67-42B8-83A5-133498884D56}" type="slidenum">
+              <a:rPr kumimoji="1" lang="ja-JP" altLang="en-US" smtClean="0"/>
+              <a:t>7</a:t>
+            </a:fld>
+            <a:endParaRPr kumimoji="1" lang="ja-JP" altLang="en-US"/>
+          </a:p>
+        </p:txBody>
+      </p:sp>
+    </p:spTree>
+    <p:extLst>
+      <p:ext uri="{BB962C8B-B14F-4D97-AF65-F5344CB8AC3E}">
+        <p14:creationId xmlns:p14="http://schemas.microsoft.com/office/powerpoint/2010/main" val="3602195643"/>
       </p:ext>
     </p:extLst>
   </p:cSld>
@@ -5873,12 +5982,7 @@
             <p:ph type="title"/>
           </p:nvPr>
         </p:nvSpPr>
-        <p:spPr>
-          <a:xfrm>
-            <a:off x="167951" y="365124"/>
-            <a:ext cx="11877869" cy="540000"/>
-          </a:xfrm>
-        </p:spPr>
+        <p:spPr/>
         <p:txBody>
           <a:bodyPr>
             <a:normAutofit/>
@@ -5908,12 +6012,7 @@
             <p:ph idx="1"/>
           </p:nvPr>
         </p:nvSpPr>
-        <p:spPr>
-          <a:xfrm>
-            <a:off x="167951" y="1073020"/>
-            <a:ext cx="11877869" cy="5103943"/>
-          </a:xfrm>
-        </p:spPr>
+        <p:spPr/>
         <p:txBody>
           <a:bodyPr>
             <a:normAutofit/>
@@ -5930,8 +6029,28 @@
             <a:pPr lvl="1"/>
             <a:r>
               <a:rPr lang="ja-JP" altLang="en-US" dirty="0"/>
-              <a:t>形式：</a:t>
-            </a:r>
+              <a:t>内容</a:t>
+            </a:r>
+            <a:endParaRPr lang="en-US" altLang="ja-JP" dirty="0"/>
+          </a:p>
+          <a:p>
+            <a:pPr lvl="2"/>
+            <a:r>
+              <a:rPr lang="ja-JP" altLang="en-US" dirty="0"/>
+              <a:t>本研修の目的や要件をまとめた提案資料</a:t>
+            </a:r>
+            <a:endParaRPr lang="en-US" altLang="ja-JP" dirty="0"/>
+          </a:p>
+          <a:p>
+            <a:pPr lvl="1"/>
+            <a:r>
+              <a:rPr lang="ja-JP" altLang="en-US" dirty="0"/>
+              <a:t>形式</a:t>
+            </a:r>
+            <a:endParaRPr lang="en-US" altLang="ja-JP" dirty="0"/>
+          </a:p>
+          <a:p>
+            <a:pPr lvl="2"/>
             <a:r>
               <a:rPr lang="en-US" altLang="ja-JP" dirty="0"/>
               <a:t>PowerPoint</a:t>
@@ -5951,66 +6070,8 @@
             <a:endParaRPr lang="en-US" altLang="ja-JP" dirty="0"/>
           </a:p>
           <a:p>
-            <a:pPr lvl="1"/>
-            <a:r>
-              <a:rPr lang="ja-JP" altLang="en-US" dirty="0"/>
-              <a:t>命名規則：受講者</a:t>
-            </a:r>
-            <a:r>
-              <a:rPr lang="en-US" altLang="ja-JP" dirty="0"/>
-              <a:t>ID_</a:t>
-            </a:r>
-            <a:r>
-              <a:rPr lang="ja-JP" altLang="en-US" dirty="0"/>
-              <a:t>氏名</a:t>
-            </a:r>
-            <a:r>
-              <a:rPr lang="en-US" altLang="ja-JP" dirty="0"/>
-              <a:t>_</a:t>
-            </a:r>
-            <a:r>
-              <a:rPr lang="ja-JP" altLang="en-US" dirty="0"/>
-              <a:t>企画提案書</a:t>
-            </a:r>
-            <a:r>
-              <a:rPr lang="en-US" altLang="ja-JP" dirty="0"/>
-              <a:t>.pptx</a:t>
-            </a:r>
-          </a:p>
-          <a:p>
             <a:pPr lvl="2"/>
-            <a:r>
-              <a:rPr lang="ja-JP" altLang="en-US" dirty="0"/>
-              <a:t>例：</a:t>
-            </a:r>
-            <a:r>
-              <a:rPr lang="en-US" altLang="ja-JP" dirty="0"/>
-              <a:t>S-00_</a:t>
-            </a:r>
-            <a:r>
-              <a:rPr lang="ja-JP" altLang="en-US" dirty="0"/>
-              <a:t>佐藤</a:t>
-            </a:r>
-            <a:r>
-              <a:rPr lang="en-US" altLang="ja-JP" dirty="0"/>
-              <a:t>A</a:t>
-            </a:r>
-            <a:r>
-              <a:rPr lang="ja-JP" altLang="en-US" dirty="0"/>
-              <a:t>子</a:t>
-            </a:r>
-            <a:r>
-              <a:rPr lang="en-US" altLang="ja-JP" dirty="0"/>
-              <a:t>_</a:t>
-            </a:r>
-            <a:r>
-              <a:rPr lang="ja-JP" altLang="en-US" dirty="0"/>
-              <a:t>企画提案書</a:t>
-            </a:r>
-            <a:r>
-              <a:rPr lang="en-US" altLang="ja-JP" dirty="0"/>
-              <a:t>.pptx</a:t>
-            </a:r>
+            <a:endParaRPr lang="en-US" altLang="ja-JP" dirty="0"/>
           </a:p>
           <a:p>
             <a:r>
@@ -6023,7 +6084,39 @@
             <a:pPr lvl="1"/>
             <a:r>
               <a:rPr lang="ja-JP" altLang="en-US" dirty="0"/>
-              <a:t>形式：ソースコード一式（</a:t>
+              <a:t>内容</a:t>
+            </a:r>
+            <a:endParaRPr lang="en-US" altLang="ja-JP" dirty="0"/>
+          </a:p>
+          <a:p>
+            <a:pPr lvl="2"/>
+            <a:r>
+              <a:rPr lang="ja-JP" altLang="en-US" dirty="0"/>
+              <a:t>要件に基づいて作成した</a:t>
+            </a:r>
+            <a:r>
+              <a:rPr lang="en-US" altLang="ja-JP" dirty="0"/>
+              <a:t>Web</a:t>
+            </a:r>
+            <a:r>
+              <a:rPr lang="ja-JP" altLang="en-US" dirty="0"/>
+              <a:t>アプリケーションのソースコード一式</a:t>
+            </a:r>
+            <a:endParaRPr lang="en-US" altLang="ja-JP" dirty="0"/>
+          </a:p>
+          <a:p>
+            <a:pPr lvl="1"/>
+            <a:r>
+              <a:rPr lang="ja-JP" altLang="en-US" dirty="0"/>
+              <a:t>形式</a:t>
+            </a:r>
+            <a:endParaRPr lang="en-US" altLang="ja-JP" dirty="0"/>
+          </a:p>
+          <a:p>
+            <a:pPr lvl="2"/>
+            <a:r>
+              <a:rPr lang="ja-JP" altLang="en-US" dirty="0"/>
+              <a:t>ソースコード一式（</a:t>
             </a:r>
             <a:r>
               <a:rPr lang="en-US" altLang="ja-JP" dirty="0"/>
@@ -6034,101 +6127,6 @@
               <a:t>形式）</a:t>
             </a:r>
             <a:endParaRPr lang="en-US" altLang="ja-JP" dirty="0"/>
-          </a:p>
-          <a:p>
-            <a:pPr lvl="2"/>
-            <a:r>
-              <a:rPr lang="ja-JP" altLang="en-US" dirty="0"/>
-              <a:t>ルートディレクトリをそのまま</a:t>
-            </a:r>
-            <a:r>
-              <a:rPr lang="en-US" altLang="ja-JP" dirty="0"/>
-              <a:t>ZIP</a:t>
-            </a:r>
-            <a:r>
-              <a:rPr lang="ja-JP" altLang="en-US" dirty="0"/>
-              <a:t>形式で圧縮する。</a:t>
-            </a:r>
-            <a:endParaRPr lang="en-US" altLang="ja-JP" dirty="0"/>
-          </a:p>
-          <a:p>
-            <a:pPr lvl="1"/>
-            <a:r>
-              <a:rPr lang="ja-JP" altLang="en-US" dirty="0"/>
-              <a:t>命名規則：受講者</a:t>
-            </a:r>
-            <a:r>
-              <a:rPr lang="en-US" altLang="ja-JP" dirty="0"/>
-              <a:t>ID_</a:t>
-            </a:r>
-            <a:r>
-              <a:rPr lang="ja-JP" altLang="en-US" dirty="0"/>
-              <a:t>氏名</a:t>
-            </a:r>
-            <a:r>
-              <a:rPr lang="en-US" altLang="ja-JP" dirty="0"/>
-              <a:t>_</a:t>
-            </a:r>
-            <a:r>
-              <a:rPr lang="ja-JP" altLang="en-US" dirty="0"/>
-              <a:t>プロトタイプ</a:t>
-            </a:r>
-            <a:r>
-              <a:rPr lang="en-US" altLang="ja-JP" dirty="0"/>
-              <a:t>.zip</a:t>
-            </a:r>
-          </a:p>
-          <a:p>
-            <a:pPr lvl="2"/>
-            <a:r>
-              <a:rPr lang="ja-JP" altLang="en-US" dirty="0"/>
-              <a:t>例：</a:t>
-            </a:r>
-            <a:r>
-              <a:rPr lang="en-US" altLang="ja-JP" dirty="0"/>
-              <a:t>S-00_</a:t>
-            </a:r>
-            <a:r>
-              <a:rPr lang="ja-JP" altLang="en-US" dirty="0"/>
-              <a:t>佐藤</a:t>
-            </a:r>
-            <a:r>
-              <a:rPr lang="en-US" altLang="ja-JP" dirty="0"/>
-              <a:t>A</a:t>
-            </a:r>
-            <a:r>
-              <a:rPr lang="ja-JP" altLang="en-US" dirty="0"/>
-              <a:t>子</a:t>
-            </a:r>
-            <a:r>
-              <a:rPr lang="en-US" altLang="ja-JP" dirty="0"/>
-              <a:t>_</a:t>
-            </a:r>
-            <a:r>
-              <a:rPr lang="ja-JP" altLang="en-US" dirty="0"/>
-              <a:t>プロトタイプ</a:t>
-            </a:r>
-            <a:r>
-              <a:rPr lang="en-US" altLang="ja-JP" dirty="0"/>
-              <a:t>.zip</a:t>
-            </a:r>
-          </a:p>
-          <a:p>
-            <a:endParaRPr lang="en-US" altLang="ja-JP" dirty="0"/>
-          </a:p>
-          <a:p>
-            <a:r>
-              <a:rPr lang="ja-JP" altLang="en-US" dirty="0"/>
-              <a:t>提出先</a:t>
-            </a:r>
-            <a:endParaRPr lang="en-US" altLang="ja-JP" dirty="0"/>
-          </a:p>
-          <a:p>
-            <a:pPr lvl="1"/>
-            <a:r>
-              <a:rPr lang="en-US" altLang="ja-JP" dirty="0"/>
-              <a:t>XXX</a:t>
-            </a:r>
           </a:p>
         </p:txBody>
       </p:sp>
@@ -6148,12 +6146,7 @@
             <p:ph type="sldNum" sz="quarter" idx="12"/>
           </p:nvPr>
         </p:nvSpPr>
-        <p:spPr>
-          <a:xfrm>
-            <a:off x="8610600" y="6421667"/>
-            <a:ext cx="2743200" cy="365125"/>
-          </a:xfrm>
-        </p:spPr>
+        <p:spPr/>
         <p:txBody>
           <a:bodyPr/>
           <a:lstStyle/>
@@ -7259,18 +7252,6 @@
             <a:endParaRPr lang="en-US" altLang="ja-JP" dirty="0"/>
           </a:p>
           <a:p>
-            <a:pPr lvl="3"/>
-            <a:r>
-              <a:rPr lang="en-US" altLang="ja-JP" dirty="0"/>
-              <a:t>※</a:t>
-            </a:r>
-            <a:r>
-              <a:rPr lang="ja-JP" altLang="en-US" dirty="0"/>
-              <a:t>修正前の提案資料は不要です。</a:t>
-            </a:r>
-            <a:endParaRPr lang="en-US" altLang="ja-JP" dirty="0"/>
-          </a:p>
-          <a:p>
             <a:pPr lvl="1"/>
             <a:r>
               <a:rPr lang="ja-JP" altLang="en-US" dirty="0"/>
@@ -7357,6 +7338,532 @@
     <p:extLst>
       <p:ext uri="{BB962C8B-B14F-4D97-AF65-F5344CB8AC3E}">
         <p14:creationId xmlns:p14="http://schemas.microsoft.com/office/powerpoint/2010/main" val="4168238584"/>
+      </p:ext>
+    </p:extLst>
+  </p:cSld>
+  <p:clrMapOvr>
+    <a:masterClrMapping/>
+  </p:clrMapOvr>
+</p:sld>
+</file>
+
+<file path=ppt/slides/slide7.xml><?xml version="1.0" encoding="utf-8"?>
+<p:sld xmlns:a="http://schemas.openxmlformats.org/drawingml/2006/main" xmlns:r="http://schemas.openxmlformats.org/officeDocument/2006/relationships" xmlns:p="http://schemas.openxmlformats.org/presentationml/2006/main">
+  <p:cSld>
+    <p:spTree>
+      <p:nvGrpSpPr>
+        <p:cNvPr id="1" name="">
+          <a:extLst>
+            <a:ext uri="{FF2B5EF4-FFF2-40B4-BE49-F238E27FC236}">
+              <a16:creationId xmlns:a16="http://schemas.microsoft.com/office/drawing/2014/main" id="{AF1A1E67-85B5-EC4D-9EFA-2964154C43C1}"/>
+            </a:ext>
+          </a:extLst>
+        </p:cNvPr>
+        <p:cNvGrpSpPr/>
+        <p:nvPr/>
+      </p:nvGrpSpPr>
+      <p:grpSpPr>
+        <a:xfrm>
+          <a:off x="0" y="0"/>
+          <a:ext cx="0" cy="0"/>
+          <a:chOff x="0" y="0"/>
+          <a:chExt cx="0" cy="0"/>
+        </a:xfrm>
+      </p:grpSpPr>
+      <p:sp>
+        <p:nvSpPr>
+          <p:cNvPr id="5" name="タイトル 4">
+            <a:extLst>
+              <a:ext uri="{FF2B5EF4-FFF2-40B4-BE49-F238E27FC236}">
+                <a16:creationId xmlns:a16="http://schemas.microsoft.com/office/drawing/2014/main" id="{EEAEBD30-BD98-C34F-DFA1-BDA768EE67FF}"/>
+              </a:ext>
+            </a:extLst>
+          </p:cNvPr>
+          <p:cNvSpPr>
+            <a:spLocks noGrp="1"/>
+          </p:cNvSpPr>
+          <p:nvPr>
+            <p:ph type="title"/>
+          </p:nvPr>
+        </p:nvSpPr>
+        <p:spPr/>
+        <p:txBody>
+          <a:bodyPr>
+            <a:normAutofit/>
+          </a:bodyPr>
+          <a:lstStyle/>
+          <a:p>
+            <a:r>
+              <a:rPr lang="ja-JP" altLang="en-US" dirty="0"/>
+              <a:t>提案資料の提出ついて</a:t>
+            </a:r>
+          </a:p>
+        </p:txBody>
+      </p:sp>
+      <p:sp>
+        <p:nvSpPr>
+          <p:cNvPr id="3" name="コンテンツ プレースホルダー 2">
+            <a:extLst>
+              <a:ext uri="{FF2B5EF4-FFF2-40B4-BE49-F238E27FC236}">
+                <a16:creationId xmlns:a16="http://schemas.microsoft.com/office/drawing/2014/main" id="{9D189349-C6C7-E3C8-18AD-16C30EBBC440}"/>
+              </a:ext>
+            </a:extLst>
+          </p:cNvPr>
+          <p:cNvSpPr>
+            <a:spLocks noGrp="1"/>
+          </p:cNvSpPr>
+          <p:nvPr>
+            <p:ph idx="1"/>
+          </p:nvPr>
+        </p:nvSpPr>
+        <p:spPr/>
+        <p:txBody>
+          <a:bodyPr>
+            <a:normAutofit/>
+          </a:bodyPr>
+          <a:lstStyle/>
+          <a:p>
+            <a:r>
+              <a:rPr lang="ja-JP" altLang="en-US" dirty="0"/>
+              <a:t>提出のルール</a:t>
+            </a:r>
+            <a:endParaRPr lang="en-US" altLang="ja-JP" dirty="0"/>
+          </a:p>
+          <a:p>
+            <a:pPr lvl="1"/>
+            <a:r>
+              <a:rPr lang="ja-JP" altLang="en-US" dirty="0"/>
+              <a:t>企画提案書</a:t>
+            </a:r>
+            <a:endParaRPr lang="en-US" altLang="ja-JP" dirty="0"/>
+          </a:p>
+          <a:p>
+            <a:pPr lvl="2"/>
+            <a:r>
+              <a:rPr lang="ja-JP" altLang="en-US" dirty="0"/>
+              <a:t>命名規則</a:t>
+            </a:r>
+            <a:endParaRPr lang="en-US" altLang="ja-JP" dirty="0"/>
+          </a:p>
+          <a:p>
+            <a:pPr lvl="3"/>
+            <a:r>
+              <a:rPr lang="ja-JP" altLang="en-US" dirty="0"/>
+              <a:t>受講者</a:t>
+            </a:r>
+            <a:r>
+              <a:rPr lang="en-US" altLang="ja-JP" dirty="0"/>
+              <a:t>ID_</a:t>
+            </a:r>
+            <a:r>
+              <a:rPr lang="ja-JP" altLang="en-US" dirty="0"/>
+              <a:t>氏名</a:t>
+            </a:r>
+            <a:r>
+              <a:rPr lang="en-US" altLang="ja-JP" dirty="0"/>
+              <a:t>_</a:t>
+            </a:r>
+            <a:r>
+              <a:rPr lang="ja-JP" altLang="en-US" dirty="0"/>
+              <a:t>企画提案書</a:t>
+            </a:r>
+            <a:r>
+              <a:rPr lang="en-US" altLang="ja-JP" dirty="0"/>
+              <a:t>.pptx</a:t>
+            </a:r>
+          </a:p>
+          <a:p>
+            <a:pPr lvl="4"/>
+            <a:r>
+              <a:rPr lang="ja-JP" altLang="en-US" dirty="0"/>
+              <a:t>例：</a:t>
+            </a:r>
+            <a:r>
+              <a:rPr lang="en-US" altLang="ja-JP" dirty="0"/>
+              <a:t>XXX_</a:t>
+            </a:r>
+            <a:r>
+              <a:rPr lang="ja-JP" altLang="en-US" dirty="0"/>
+              <a:t>ユニバ花子</a:t>
+            </a:r>
+            <a:r>
+              <a:rPr lang="en-US" altLang="ja-JP" dirty="0"/>
+              <a:t>_</a:t>
+            </a:r>
+            <a:r>
+              <a:rPr lang="ja-JP" altLang="en-US" dirty="0"/>
+              <a:t>企画提案書</a:t>
+            </a:r>
+            <a:r>
+              <a:rPr lang="en-US" altLang="ja-JP" dirty="0"/>
+              <a:t>.pptx</a:t>
+            </a:r>
+          </a:p>
+          <a:p>
+            <a:pPr lvl="1"/>
+            <a:r>
+              <a:rPr lang="ja-JP" altLang="en-US" dirty="0"/>
+              <a:t>プロトタイプ</a:t>
+            </a:r>
+            <a:endParaRPr lang="en-US" altLang="ja-JP" dirty="0"/>
+          </a:p>
+          <a:p>
+            <a:pPr lvl="2"/>
+            <a:r>
+              <a:rPr lang="ja-JP" altLang="en-US" dirty="0"/>
+              <a:t>命名規則</a:t>
+            </a:r>
+            <a:endParaRPr lang="en-US" altLang="ja-JP" dirty="0"/>
+          </a:p>
+          <a:p>
+            <a:pPr lvl="3"/>
+            <a:r>
+              <a:rPr lang="ja-JP" altLang="en-US" dirty="0"/>
+              <a:t>受講者</a:t>
+            </a:r>
+            <a:r>
+              <a:rPr lang="en-US" altLang="ja-JP" dirty="0"/>
+              <a:t>ID_</a:t>
+            </a:r>
+            <a:r>
+              <a:rPr lang="ja-JP" altLang="en-US" dirty="0"/>
+              <a:t>氏名</a:t>
+            </a:r>
+            <a:r>
+              <a:rPr lang="en-US" altLang="ja-JP" dirty="0"/>
+              <a:t>_</a:t>
+            </a:r>
+            <a:r>
+              <a:rPr lang="ja-JP" altLang="en-US" dirty="0"/>
+              <a:t>プロトタイプ</a:t>
+            </a:r>
+            <a:r>
+              <a:rPr lang="en-US" altLang="ja-JP" dirty="0"/>
+              <a:t>.zip</a:t>
+            </a:r>
+          </a:p>
+          <a:p>
+            <a:pPr lvl="4"/>
+            <a:r>
+              <a:rPr lang="ja-JP" altLang="en-US" dirty="0"/>
+              <a:t>例：</a:t>
+            </a:r>
+            <a:r>
+              <a:rPr lang="en-US" altLang="ja-JP" dirty="0"/>
+              <a:t> XXX _</a:t>
+            </a:r>
+            <a:r>
+              <a:rPr lang="ja-JP" altLang="en-US" dirty="0"/>
+              <a:t>ユニバ花子</a:t>
+            </a:r>
+            <a:r>
+              <a:rPr lang="en-US" altLang="ja-JP" dirty="0"/>
+              <a:t>_</a:t>
+            </a:r>
+            <a:r>
+              <a:rPr lang="ja-JP" altLang="en-US" dirty="0"/>
+              <a:t>プロトタイプ</a:t>
+            </a:r>
+            <a:r>
+              <a:rPr lang="en-US" altLang="ja-JP" dirty="0"/>
+              <a:t>.zip</a:t>
+            </a:r>
+          </a:p>
+          <a:p>
+            <a:endParaRPr lang="en-US" altLang="ja-JP" dirty="0"/>
+          </a:p>
+          <a:p>
+            <a:r>
+              <a:rPr lang="ja-JP" altLang="en-US" dirty="0"/>
+              <a:t>提出先</a:t>
+            </a:r>
+            <a:endParaRPr lang="en-US" altLang="ja-JP" dirty="0"/>
+          </a:p>
+          <a:p>
+            <a:pPr lvl="1"/>
+            <a:r>
+              <a:rPr lang="en-US" altLang="ja-JP" dirty="0"/>
+              <a:t>\\YYY\\</a:t>
+            </a:r>
+            <a:r>
+              <a:rPr lang="ja-JP" altLang="en-US" dirty="0"/>
+              <a:t>修正前</a:t>
+            </a:r>
+            <a:endParaRPr lang="en-US" altLang="ja-JP" dirty="0"/>
+          </a:p>
+          <a:p>
+            <a:pPr lvl="1"/>
+            <a:r>
+              <a:rPr lang="en-US" altLang="ja-JP" dirty="0"/>
+              <a:t>\\YYY\\</a:t>
+            </a:r>
+            <a:r>
+              <a:rPr lang="ja-JP" altLang="en-US" dirty="0"/>
+              <a:t>修正後</a:t>
+            </a:r>
+            <a:endParaRPr lang="en-US" altLang="ja-JP" dirty="0"/>
+          </a:p>
+          <a:p>
+            <a:pPr lvl="1"/>
+            <a:endParaRPr lang="en-US" altLang="ja-JP" dirty="0"/>
+          </a:p>
+        </p:txBody>
+      </p:sp>
+      <p:sp>
+        <p:nvSpPr>
+          <p:cNvPr id="7" name="スライド番号プレースホルダー 6">
+            <a:extLst>
+              <a:ext uri="{FF2B5EF4-FFF2-40B4-BE49-F238E27FC236}">
+                <a16:creationId xmlns:a16="http://schemas.microsoft.com/office/drawing/2014/main" id="{69416F18-D0D6-ED4C-325E-91BA9E754CF2}"/>
+              </a:ext>
+            </a:extLst>
+          </p:cNvPr>
+          <p:cNvSpPr>
+            <a:spLocks noGrp="1"/>
+          </p:cNvSpPr>
+          <p:nvPr>
+            <p:ph type="sldNum" sz="quarter" idx="12"/>
+          </p:nvPr>
+        </p:nvSpPr>
+        <p:spPr/>
+        <p:txBody>
+          <a:bodyPr/>
+          <a:lstStyle/>
+          <a:p>
+            <a:fld id="{9EBFBC76-F46F-4ADD-8228-9529630895ED}" type="slidenum">
+              <a:rPr lang="ja-JP" altLang="en-US" smtClean="0"/>
+              <a:pPr/>
+              <a:t>7</a:t>
+            </a:fld>
+            <a:endParaRPr lang="ja-JP" altLang="en-US" dirty="0"/>
+          </a:p>
+        </p:txBody>
+      </p:sp>
+      <p:grpSp>
+        <p:nvGrpSpPr>
+          <p:cNvPr id="13" name="グループ化 12">
+            <a:extLst>
+              <a:ext uri="{FF2B5EF4-FFF2-40B4-BE49-F238E27FC236}">
+                <a16:creationId xmlns:a16="http://schemas.microsoft.com/office/drawing/2014/main" id="{77C1663D-7CF0-98D5-D56B-566170018C6A}"/>
+              </a:ext>
+            </a:extLst>
+          </p:cNvPr>
+          <p:cNvGrpSpPr/>
+          <p:nvPr/>
+        </p:nvGrpSpPr>
+        <p:grpSpPr>
+          <a:xfrm>
+            <a:off x="7779855" y="1739690"/>
+            <a:ext cx="2686050" cy="1013449"/>
+            <a:chOff x="7779855" y="1739690"/>
+            <a:chExt cx="2686050" cy="1013449"/>
+          </a:xfrm>
+        </p:grpSpPr>
+        <p:pic>
+          <p:nvPicPr>
+            <p:cNvPr id="6" name="図 5">
+              <a:extLst>
+                <a:ext uri="{FF2B5EF4-FFF2-40B4-BE49-F238E27FC236}">
+                  <a16:creationId xmlns:a16="http://schemas.microsoft.com/office/drawing/2014/main" id="{86A6D3C3-35C0-EDA0-AD62-5474B6053F57}"/>
+                </a:ext>
+              </a:extLst>
+            </p:cNvPr>
+            <p:cNvPicPr>
+              <a:picLocks noChangeAspect="1"/>
+            </p:cNvPicPr>
+            <p:nvPr/>
+          </p:nvPicPr>
+          <p:blipFill>
+            <a:blip r:embed="rId3">
+              <a:extLst>
+                <a:ext uri="{28A0092B-C50C-407E-A947-70E740481C1C}">
+                  <a14:useLocalDpi xmlns:a14="http://schemas.microsoft.com/office/drawing/2010/main" val="0"/>
+                </a:ext>
+              </a:extLst>
+            </a:blip>
+            <a:stretch>
+              <a:fillRect/>
+            </a:stretch>
+          </p:blipFill>
+          <p:spPr>
+            <a:xfrm>
+              <a:off x="8604389" y="1739690"/>
+              <a:ext cx="1036982" cy="777737"/>
+            </a:xfrm>
+            <a:prstGeom prst="rect">
+              <a:avLst/>
+            </a:prstGeom>
+          </p:spPr>
+        </p:pic>
+        <p:sp>
+          <p:nvSpPr>
+            <p:cNvPr id="11" name="テキスト ボックス 10">
+              <a:extLst>
+                <a:ext uri="{FF2B5EF4-FFF2-40B4-BE49-F238E27FC236}">
+                  <a16:creationId xmlns:a16="http://schemas.microsoft.com/office/drawing/2014/main" id="{13FAF8D5-91B7-FC91-09B7-A5DDAC1F5DF2}"/>
+                </a:ext>
+              </a:extLst>
+            </p:cNvPr>
+            <p:cNvSpPr txBox="1"/>
+            <p:nvPr/>
+          </p:nvSpPr>
+          <p:spPr>
+            <a:xfrm>
+              <a:off x="7779855" y="2471181"/>
+              <a:ext cx="2686050" cy="281958"/>
+            </a:xfrm>
+            <a:prstGeom prst="rect">
+              <a:avLst/>
+            </a:prstGeom>
+            <a:noFill/>
+          </p:spPr>
+          <p:txBody>
+            <a:bodyPr wrap="square">
+              <a:spAutoFit/>
+            </a:bodyPr>
+            <a:lstStyle/>
+            <a:p>
+              <a:r>
+                <a:rPr lang="en-US" altLang="ja-JP" sz="1200" b="1" dirty="0"/>
+                <a:t>XXX_</a:t>
+              </a:r>
+              <a:r>
+                <a:rPr lang="ja-JP" altLang="en-US" sz="1200" b="1" dirty="0"/>
+                <a:t>ユニバ花子</a:t>
+              </a:r>
+              <a:r>
+                <a:rPr lang="en-US" altLang="ja-JP" sz="1200" b="1" dirty="0"/>
+                <a:t>_</a:t>
+              </a:r>
+              <a:r>
+                <a:rPr lang="ja-JP" altLang="en-US" sz="1200" b="1" dirty="0"/>
+                <a:t>企画提案書</a:t>
+              </a:r>
+              <a:r>
+                <a:rPr lang="en-US" altLang="ja-JP" sz="1200" b="1" dirty="0"/>
+                <a:t>.pptx</a:t>
+              </a:r>
+              <a:endParaRPr lang="ja-JP" altLang="en-US" sz="1200" b="1" dirty="0"/>
+            </a:p>
+          </p:txBody>
+        </p:sp>
+      </p:grpSp>
+      <p:grpSp>
+        <p:nvGrpSpPr>
+          <p:cNvPr id="14" name="グループ化 13">
+            <a:extLst>
+              <a:ext uri="{FF2B5EF4-FFF2-40B4-BE49-F238E27FC236}">
+                <a16:creationId xmlns:a16="http://schemas.microsoft.com/office/drawing/2014/main" id="{BDE8311A-E7DE-B144-07F3-B58423119400}"/>
+              </a:ext>
+            </a:extLst>
+          </p:cNvPr>
+          <p:cNvGrpSpPr/>
+          <p:nvPr/>
+        </p:nvGrpSpPr>
+        <p:grpSpPr>
+          <a:xfrm>
+            <a:off x="7779855" y="3484630"/>
+            <a:ext cx="2686050" cy="1066422"/>
+            <a:chOff x="7296150" y="3398629"/>
+            <a:chExt cx="2686050" cy="1066422"/>
+          </a:xfrm>
+        </p:grpSpPr>
+        <p:pic>
+          <p:nvPicPr>
+            <p:cNvPr id="9" name="図 8">
+              <a:extLst>
+                <a:ext uri="{FF2B5EF4-FFF2-40B4-BE49-F238E27FC236}">
+                  <a16:creationId xmlns:a16="http://schemas.microsoft.com/office/drawing/2014/main" id="{D3BEE649-4593-1C2D-E4F8-125EC81215E0}"/>
+                </a:ext>
+              </a:extLst>
+            </p:cNvPr>
+            <p:cNvPicPr>
+              <a:picLocks noChangeAspect="1"/>
+            </p:cNvPicPr>
+            <p:nvPr/>
+          </p:nvPicPr>
+          <p:blipFill>
+            <a:blip r:embed="rId4">
+              <a:extLst>
+                <a:ext uri="{28A0092B-C50C-407E-A947-70E740481C1C}">
+                  <a14:useLocalDpi xmlns:a14="http://schemas.microsoft.com/office/drawing/2010/main" val="0"/>
+                </a:ext>
+              </a:extLst>
+            </a:blip>
+            <a:stretch>
+              <a:fillRect/>
+            </a:stretch>
+          </p:blipFill>
+          <p:spPr>
+            <a:xfrm>
+              <a:off x="8172533" y="3398629"/>
+              <a:ext cx="933285" cy="777737"/>
+            </a:xfrm>
+            <a:prstGeom prst="rect">
+              <a:avLst/>
+            </a:prstGeom>
+          </p:spPr>
+        </p:pic>
+        <p:sp>
+          <p:nvSpPr>
+            <p:cNvPr id="12" name="テキスト ボックス 11">
+              <a:extLst>
+                <a:ext uri="{FF2B5EF4-FFF2-40B4-BE49-F238E27FC236}">
+                  <a16:creationId xmlns:a16="http://schemas.microsoft.com/office/drawing/2014/main" id="{EDF7E828-6FB1-4D0C-CFDB-D0DC9FAA241D}"/>
+                </a:ext>
+              </a:extLst>
+            </p:cNvPr>
+            <p:cNvSpPr txBox="1"/>
+            <p:nvPr/>
+          </p:nvSpPr>
+          <p:spPr>
+            <a:xfrm>
+              <a:off x="7296150" y="4183093"/>
+              <a:ext cx="2686050" cy="281958"/>
+            </a:xfrm>
+            <a:prstGeom prst="rect">
+              <a:avLst/>
+            </a:prstGeom>
+            <a:noFill/>
+          </p:spPr>
+          <p:txBody>
+            <a:bodyPr wrap="square">
+              <a:spAutoFit/>
+            </a:bodyPr>
+            <a:lstStyle/>
+            <a:p>
+              <a:r>
+                <a:rPr lang="ja-JP" altLang="en-US" sz="1200" b="1" dirty="0"/>
+                <a:t> </a:t>
+              </a:r>
+              <a:r>
+                <a:rPr lang="en-US" altLang="ja-JP" sz="1200" b="1" dirty="0"/>
+                <a:t>XXX _</a:t>
+              </a:r>
+              <a:r>
+                <a:rPr lang="ja-JP" altLang="en-US" sz="1200" b="1" dirty="0"/>
+                <a:t>ユニバ花子</a:t>
+              </a:r>
+              <a:r>
+                <a:rPr lang="en-US" altLang="ja-JP" sz="1200" b="1" dirty="0"/>
+                <a:t>_</a:t>
+              </a:r>
+              <a:r>
+                <a:rPr lang="ja-JP" altLang="en-US" sz="1200" b="1" dirty="0"/>
+                <a:t>プロトタイプ</a:t>
+              </a:r>
+              <a:r>
+                <a:rPr lang="en-US" altLang="ja-JP" sz="1200" b="1" dirty="0"/>
+                <a:t>.zip</a:t>
+              </a:r>
+            </a:p>
+          </p:txBody>
+        </p:sp>
+      </p:grpSp>
+    </p:spTree>
+    <p:extLst>
+      <p:ext uri="{BB962C8B-B14F-4D97-AF65-F5344CB8AC3E}">
+        <p14:creationId xmlns:p14="http://schemas.microsoft.com/office/powerpoint/2010/main" val="1923121361"/>
       </p:ext>
     </p:extLst>
   </p:cSld>

--- a/00_オリエンテーション/【AI Native研修-提案】研修の概要.pptx
+++ b/00_オリエンテーション/【AI Native研修-提案】研修の概要.pptx
@@ -11,10 +11,10 @@
     <p:sldId id="256" r:id="rId2"/>
     <p:sldId id="257" r:id="rId3"/>
     <p:sldId id="261" r:id="rId4"/>
-    <p:sldId id="258" r:id="rId5"/>
-    <p:sldId id="259" r:id="rId6"/>
-    <p:sldId id="260" r:id="rId7"/>
-    <p:sldId id="262" r:id="rId8"/>
+    <p:sldId id="262" r:id="rId5"/>
+    <p:sldId id="258" r:id="rId6"/>
+    <p:sldId id="259" r:id="rId7"/>
+    <p:sldId id="260" r:id="rId8"/>
   </p:sldIdLst>
   <p:sldSz cx="12192000" cy="6858000"/>
   <p:notesSz cx="6858000" cy="9144000"/>
@@ -702,6 +702,114 @@
         <p:cNvPr id="1" name="">
           <a:extLst>
             <a:ext uri="{FF2B5EF4-FFF2-40B4-BE49-F238E27FC236}">
+              <a16:creationId xmlns:a16="http://schemas.microsoft.com/office/drawing/2014/main" id="{2BF04D45-836F-4C02-C12D-B909AF35C12D}"/>
+            </a:ext>
+          </a:extLst>
+        </p:cNvPr>
+        <p:cNvGrpSpPr/>
+        <p:nvPr/>
+      </p:nvGrpSpPr>
+      <p:grpSpPr>
+        <a:xfrm>
+          <a:off x="0" y="0"/>
+          <a:ext cx="0" cy="0"/>
+          <a:chOff x="0" y="0"/>
+          <a:chExt cx="0" cy="0"/>
+        </a:xfrm>
+      </p:grpSpPr>
+      <p:sp>
+        <p:nvSpPr>
+          <p:cNvPr id="2" name="スライド イメージ プレースホルダー 1">
+            <a:extLst>
+              <a:ext uri="{FF2B5EF4-FFF2-40B4-BE49-F238E27FC236}">
+                <a16:creationId xmlns:a16="http://schemas.microsoft.com/office/drawing/2014/main" id="{F9A0B078-CB48-7766-A529-A40AA99CB2CC}"/>
+              </a:ext>
+            </a:extLst>
+          </p:cNvPr>
+          <p:cNvSpPr>
+            <a:spLocks noGrp="1" noRot="1" noChangeAspect="1"/>
+          </p:cNvSpPr>
+          <p:nvPr>
+            <p:ph type="sldImg"/>
+          </p:nvPr>
+        </p:nvSpPr>
+        <p:spPr/>
+      </p:sp>
+      <p:sp>
+        <p:nvSpPr>
+          <p:cNvPr id="3" name="ノート プレースホルダー 2">
+            <a:extLst>
+              <a:ext uri="{FF2B5EF4-FFF2-40B4-BE49-F238E27FC236}">
+                <a16:creationId xmlns:a16="http://schemas.microsoft.com/office/drawing/2014/main" id="{5E288ED5-6D3A-4E94-77FC-A6C1B0D02303}"/>
+              </a:ext>
+            </a:extLst>
+          </p:cNvPr>
+          <p:cNvSpPr>
+            <a:spLocks noGrp="1"/>
+          </p:cNvSpPr>
+          <p:nvPr>
+            <p:ph type="body" idx="1"/>
+          </p:nvPr>
+        </p:nvSpPr>
+        <p:spPr/>
+        <p:txBody>
+          <a:bodyPr/>
+          <a:lstStyle/>
+          <a:p>
+            <a:endParaRPr kumimoji="1" lang="ja-JP" altLang="en-US" dirty="0"/>
+          </a:p>
+        </p:txBody>
+      </p:sp>
+      <p:sp>
+        <p:nvSpPr>
+          <p:cNvPr id="4" name="スライド番号プレースホルダー 3">
+            <a:extLst>
+              <a:ext uri="{FF2B5EF4-FFF2-40B4-BE49-F238E27FC236}">
+                <a16:creationId xmlns:a16="http://schemas.microsoft.com/office/drawing/2014/main" id="{C6E6FD42-49CC-9B82-E38A-4E6CD8A41E72}"/>
+              </a:ext>
+            </a:extLst>
+          </p:cNvPr>
+          <p:cNvSpPr>
+            <a:spLocks noGrp="1"/>
+          </p:cNvSpPr>
+          <p:nvPr>
+            <p:ph type="sldNum" sz="quarter" idx="5"/>
+          </p:nvPr>
+        </p:nvSpPr>
+        <p:spPr/>
+        <p:txBody>
+          <a:bodyPr/>
+          <a:lstStyle/>
+          <a:p>
+            <a:fld id="{A58A0B64-6D67-42B8-83A5-133498884D56}" type="slidenum">
+              <a:rPr kumimoji="1" lang="ja-JP" altLang="en-US" smtClean="0"/>
+              <a:t>4</a:t>
+            </a:fld>
+            <a:endParaRPr kumimoji="1" lang="ja-JP" altLang="en-US"/>
+          </a:p>
+        </p:txBody>
+      </p:sp>
+    </p:spTree>
+    <p:extLst>
+      <p:ext uri="{BB962C8B-B14F-4D97-AF65-F5344CB8AC3E}">
+        <p14:creationId xmlns:p14="http://schemas.microsoft.com/office/powerpoint/2010/main" val="3602195643"/>
+      </p:ext>
+    </p:extLst>
+  </p:cSld>
+  <p:clrMapOvr>
+    <a:masterClrMapping/>
+  </p:clrMapOvr>
+</p:notes>
+</file>
+
+<file path=ppt/notesSlides/notesSlide4.xml><?xml version="1.0" encoding="utf-8"?>
+<p:notes xmlns:a="http://schemas.openxmlformats.org/drawingml/2006/main" xmlns:r="http://schemas.openxmlformats.org/officeDocument/2006/relationships" xmlns:p="http://schemas.openxmlformats.org/presentationml/2006/main">
+  <p:cSld>
+    <p:spTree>
+      <p:nvGrpSpPr>
+        <p:cNvPr id="1" name="">
+          <a:extLst>
+            <a:ext uri="{FF2B5EF4-FFF2-40B4-BE49-F238E27FC236}">
               <a16:creationId xmlns:a16="http://schemas.microsoft.com/office/drawing/2014/main" id="{E583F549-E74F-41DE-B3AA-CC3A97BC75F8}"/>
             </a:ext>
           </a:extLst>
@@ -783,7 +891,7 @@
           <a:p>
             <a:fld id="{A58A0B64-6D67-42B8-83A5-133498884D56}" type="slidenum">
               <a:rPr kumimoji="1" lang="ja-JP" altLang="en-US" smtClean="0"/>
-              <a:t>4</a:t>
+              <a:t>5</a:t>
             </a:fld>
             <a:endParaRPr kumimoji="1" lang="ja-JP" altLang="en-US"/>
           </a:p>
@@ -802,7 +910,7 @@
 </p:notes>
 </file>
 
-<file path=ppt/notesSlides/notesSlide4.xml><?xml version="1.0" encoding="utf-8"?>
+<file path=ppt/notesSlides/notesSlide5.xml><?xml version="1.0" encoding="utf-8"?>
 <p:notes xmlns:a="http://schemas.openxmlformats.org/drawingml/2006/main" xmlns:r="http://schemas.openxmlformats.org/officeDocument/2006/relationships" xmlns:p="http://schemas.openxmlformats.org/presentationml/2006/main">
   <p:cSld>
     <p:spTree>
@@ -891,7 +999,7 @@
           <a:p>
             <a:fld id="{A58A0B64-6D67-42B8-83A5-133498884D56}" type="slidenum">
               <a:rPr kumimoji="1" lang="ja-JP" altLang="en-US" smtClean="0"/>
-              <a:t>5</a:t>
+              <a:t>6</a:t>
             </a:fld>
             <a:endParaRPr kumimoji="1" lang="ja-JP" altLang="en-US"/>
           </a:p>
@@ -910,7 +1018,7 @@
 </p:notes>
 </file>
 
-<file path=ppt/notesSlides/notesSlide5.xml><?xml version="1.0" encoding="utf-8"?>
+<file path=ppt/notesSlides/notesSlide6.xml><?xml version="1.0" encoding="utf-8"?>
 <p:notes xmlns:a="http://schemas.openxmlformats.org/drawingml/2006/main" xmlns:r="http://schemas.openxmlformats.org/officeDocument/2006/relationships" xmlns:p="http://schemas.openxmlformats.org/presentationml/2006/main">
   <p:cSld>
     <p:spTree>
@@ -999,7 +1107,7 @@
           <a:p>
             <a:fld id="{A58A0B64-6D67-42B8-83A5-133498884D56}" type="slidenum">
               <a:rPr kumimoji="1" lang="ja-JP" altLang="en-US" smtClean="0"/>
-              <a:t>6</a:t>
+              <a:t>7</a:t>
             </a:fld>
             <a:endParaRPr kumimoji="1" lang="ja-JP" altLang="en-US"/>
           </a:p>
@@ -1009,114 +1117,6 @@
     <p:extLst>
       <p:ext uri="{BB962C8B-B14F-4D97-AF65-F5344CB8AC3E}">
         <p14:creationId xmlns:p14="http://schemas.microsoft.com/office/powerpoint/2010/main" val="1675767578"/>
-      </p:ext>
-    </p:extLst>
-  </p:cSld>
-  <p:clrMapOvr>
-    <a:masterClrMapping/>
-  </p:clrMapOvr>
-</p:notes>
-</file>
-
-<file path=ppt/notesSlides/notesSlide6.xml><?xml version="1.0" encoding="utf-8"?>
-<p:notes xmlns:a="http://schemas.openxmlformats.org/drawingml/2006/main" xmlns:r="http://schemas.openxmlformats.org/officeDocument/2006/relationships" xmlns:p="http://schemas.openxmlformats.org/presentationml/2006/main">
-  <p:cSld>
-    <p:spTree>
-      <p:nvGrpSpPr>
-        <p:cNvPr id="1" name="">
-          <a:extLst>
-            <a:ext uri="{FF2B5EF4-FFF2-40B4-BE49-F238E27FC236}">
-              <a16:creationId xmlns:a16="http://schemas.microsoft.com/office/drawing/2014/main" id="{2BF04D45-836F-4C02-C12D-B909AF35C12D}"/>
-            </a:ext>
-          </a:extLst>
-        </p:cNvPr>
-        <p:cNvGrpSpPr/>
-        <p:nvPr/>
-      </p:nvGrpSpPr>
-      <p:grpSpPr>
-        <a:xfrm>
-          <a:off x="0" y="0"/>
-          <a:ext cx="0" cy="0"/>
-          <a:chOff x="0" y="0"/>
-          <a:chExt cx="0" cy="0"/>
-        </a:xfrm>
-      </p:grpSpPr>
-      <p:sp>
-        <p:nvSpPr>
-          <p:cNvPr id="2" name="スライド イメージ プレースホルダー 1">
-            <a:extLst>
-              <a:ext uri="{FF2B5EF4-FFF2-40B4-BE49-F238E27FC236}">
-                <a16:creationId xmlns:a16="http://schemas.microsoft.com/office/drawing/2014/main" id="{F9A0B078-CB48-7766-A529-A40AA99CB2CC}"/>
-              </a:ext>
-            </a:extLst>
-          </p:cNvPr>
-          <p:cNvSpPr>
-            <a:spLocks noGrp="1" noRot="1" noChangeAspect="1"/>
-          </p:cNvSpPr>
-          <p:nvPr>
-            <p:ph type="sldImg"/>
-          </p:nvPr>
-        </p:nvSpPr>
-        <p:spPr/>
-      </p:sp>
-      <p:sp>
-        <p:nvSpPr>
-          <p:cNvPr id="3" name="ノート プレースホルダー 2">
-            <a:extLst>
-              <a:ext uri="{FF2B5EF4-FFF2-40B4-BE49-F238E27FC236}">
-                <a16:creationId xmlns:a16="http://schemas.microsoft.com/office/drawing/2014/main" id="{5E288ED5-6D3A-4E94-77FC-A6C1B0D02303}"/>
-              </a:ext>
-            </a:extLst>
-          </p:cNvPr>
-          <p:cNvSpPr>
-            <a:spLocks noGrp="1"/>
-          </p:cNvSpPr>
-          <p:nvPr>
-            <p:ph type="body" idx="1"/>
-          </p:nvPr>
-        </p:nvSpPr>
-        <p:spPr/>
-        <p:txBody>
-          <a:bodyPr/>
-          <a:lstStyle/>
-          <a:p>
-            <a:endParaRPr kumimoji="1" lang="ja-JP" altLang="en-US" dirty="0"/>
-          </a:p>
-        </p:txBody>
-      </p:sp>
-      <p:sp>
-        <p:nvSpPr>
-          <p:cNvPr id="4" name="スライド番号プレースホルダー 3">
-            <a:extLst>
-              <a:ext uri="{FF2B5EF4-FFF2-40B4-BE49-F238E27FC236}">
-                <a16:creationId xmlns:a16="http://schemas.microsoft.com/office/drawing/2014/main" id="{C6E6FD42-49CC-9B82-E38A-4E6CD8A41E72}"/>
-              </a:ext>
-            </a:extLst>
-          </p:cNvPr>
-          <p:cNvSpPr>
-            <a:spLocks noGrp="1"/>
-          </p:cNvSpPr>
-          <p:nvPr>
-            <p:ph type="sldNum" sz="quarter" idx="5"/>
-          </p:nvPr>
-        </p:nvSpPr>
-        <p:spPr/>
-        <p:txBody>
-          <a:bodyPr/>
-          <a:lstStyle/>
-          <a:p>
-            <a:fld id="{A58A0B64-6D67-42B8-83A5-133498884D56}" type="slidenum">
-              <a:rPr kumimoji="1" lang="ja-JP" altLang="en-US" smtClean="0"/>
-              <a:t>7</a:t>
-            </a:fld>
-            <a:endParaRPr kumimoji="1" lang="ja-JP" altLang="en-US"/>
-          </a:p>
-        </p:txBody>
-      </p:sp>
-    </p:spTree>
-    <p:extLst>
-      <p:ext uri="{BB962C8B-B14F-4D97-AF65-F5344CB8AC3E}">
-        <p14:creationId xmlns:p14="http://schemas.microsoft.com/office/powerpoint/2010/main" val="3602195643"/>
       </p:ext>
     </p:extLst>
   </p:cSld>
@@ -6211,6 +6211,536 @@
         <p:cNvPr id="1" name="">
           <a:extLst>
             <a:ext uri="{FF2B5EF4-FFF2-40B4-BE49-F238E27FC236}">
+              <a16:creationId xmlns:a16="http://schemas.microsoft.com/office/drawing/2014/main" id="{AF1A1E67-85B5-EC4D-9EFA-2964154C43C1}"/>
+            </a:ext>
+          </a:extLst>
+        </p:cNvPr>
+        <p:cNvGrpSpPr/>
+        <p:nvPr/>
+      </p:nvGrpSpPr>
+      <p:grpSpPr>
+        <a:xfrm>
+          <a:off x="0" y="0"/>
+          <a:ext cx="0" cy="0"/>
+          <a:chOff x="0" y="0"/>
+          <a:chExt cx="0" cy="0"/>
+        </a:xfrm>
+      </p:grpSpPr>
+      <p:sp>
+        <p:nvSpPr>
+          <p:cNvPr id="5" name="タイトル 4">
+            <a:extLst>
+              <a:ext uri="{FF2B5EF4-FFF2-40B4-BE49-F238E27FC236}">
+                <a16:creationId xmlns:a16="http://schemas.microsoft.com/office/drawing/2014/main" id="{EEAEBD30-BD98-C34F-DFA1-BDA768EE67FF}"/>
+              </a:ext>
+            </a:extLst>
+          </p:cNvPr>
+          <p:cNvSpPr>
+            <a:spLocks noGrp="1"/>
+          </p:cNvSpPr>
+          <p:nvPr>
+            <p:ph type="title"/>
+          </p:nvPr>
+        </p:nvSpPr>
+        <p:spPr/>
+        <p:txBody>
+          <a:bodyPr>
+            <a:normAutofit/>
+          </a:bodyPr>
+          <a:lstStyle/>
+          <a:p>
+            <a:r>
+              <a:rPr lang="ja-JP" altLang="en-US" dirty="0"/>
+              <a:t>提案資料の提出ついて</a:t>
+            </a:r>
+          </a:p>
+        </p:txBody>
+      </p:sp>
+      <p:sp>
+        <p:nvSpPr>
+          <p:cNvPr id="3" name="コンテンツ プレースホルダー 2">
+            <a:extLst>
+              <a:ext uri="{FF2B5EF4-FFF2-40B4-BE49-F238E27FC236}">
+                <a16:creationId xmlns:a16="http://schemas.microsoft.com/office/drawing/2014/main" id="{9D189349-C6C7-E3C8-18AD-16C30EBBC440}"/>
+              </a:ext>
+            </a:extLst>
+          </p:cNvPr>
+          <p:cNvSpPr>
+            <a:spLocks noGrp="1"/>
+          </p:cNvSpPr>
+          <p:nvPr>
+            <p:ph idx="1"/>
+          </p:nvPr>
+        </p:nvSpPr>
+        <p:spPr/>
+        <p:txBody>
+          <a:bodyPr>
+            <a:normAutofit/>
+          </a:bodyPr>
+          <a:lstStyle/>
+          <a:p>
+            <a:r>
+              <a:rPr lang="ja-JP" altLang="en-US" dirty="0"/>
+              <a:t>提出のルール</a:t>
+            </a:r>
+            <a:endParaRPr lang="en-US" altLang="ja-JP" dirty="0"/>
+          </a:p>
+          <a:p>
+            <a:pPr lvl="1"/>
+            <a:r>
+              <a:rPr lang="ja-JP" altLang="en-US" dirty="0"/>
+              <a:t>企画提案書</a:t>
+            </a:r>
+            <a:endParaRPr lang="en-US" altLang="ja-JP" dirty="0"/>
+          </a:p>
+          <a:p>
+            <a:pPr lvl="2"/>
+            <a:r>
+              <a:rPr lang="ja-JP" altLang="en-US" dirty="0"/>
+              <a:t>命名規則</a:t>
+            </a:r>
+            <a:endParaRPr lang="en-US" altLang="ja-JP" dirty="0"/>
+          </a:p>
+          <a:p>
+            <a:pPr lvl="3"/>
+            <a:r>
+              <a:rPr lang="ja-JP" altLang="en-US" dirty="0"/>
+              <a:t>受講者</a:t>
+            </a:r>
+            <a:r>
+              <a:rPr lang="en-US" altLang="ja-JP" dirty="0"/>
+              <a:t>ID_</a:t>
+            </a:r>
+            <a:r>
+              <a:rPr lang="ja-JP" altLang="en-US" dirty="0"/>
+              <a:t>氏名</a:t>
+            </a:r>
+            <a:r>
+              <a:rPr lang="en-US" altLang="ja-JP" dirty="0"/>
+              <a:t>_</a:t>
+            </a:r>
+            <a:r>
+              <a:rPr lang="ja-JP" altLang="en-US" dirty="0"/>
+              <a:t>企画提案書</a:t>
+            </a:r>
+            <a:r>
+              <a:rPr lang="en-US" altLang="ja-JP" dirty="0"/>
+              <a:t>.pptx</a:t>
+            </a:r>
+          </a:p>
+          <a:p>
+            <a:pPr lvl="4"/>
+            <a:r>
+              <a:rPr lang="ja-JP" altLang="en-US" dirty="0"/>
+              <a:t>例：</a:t>
+            </a:r>
+            <a:r>
+              <a:rPr lang="en-US" altLang="ja-JP" dirty="0"/>
+              <a:t>XXX_</a:t>
+            </a:r>
+            <a:r>
+              <a:rPr lang="ja-JP" altLang="en-US" dirty="0"/>
+              <a:t>ユニバ花子</a:t>
+            </a:r>
+            <a:r>
+              <a:rPr lang="en-US" altLang="ja-JP" dirty="0"/>
+              <a:t>_</a:t>
+            </a:r>
+            <a:r>
+              <a:rPr lang="ja-JP" altLang="en-US" dirty="0"/>
+              <a:t>企画提案書</a:t>
+            </a:r>
+            <a:r>
+              <a:rPr lang="en-US" altLang="ja-JP" dirty="0"/>
+              <a:t>.pptx</a:t>
+            </a:r>
+          </a:p>
+          <a:p>
+            <a:pPr lvl="1"/>
+            <a:r>
+              <a:rPr lang="ja-JP" altLang="en-US" dirty="0"/>
+              <a:t>プロトタイプ</a:t>
+            </a:r>
+            <a:endParaRPr lang="en-US" altLang="ja-JP" dirty="0"/>
+          </a:p>
+          <a:p>
+            <a:pPr lvl="2"/>
+            <a:r>
+              <a:rPr lang="ja-JP" altLang="en-US" dirty="0"/>
+              <a:t>命名規則</a:t>
+            </a:r>
+            <a:endParaRPr lang="en-US" altLang="ja-JP" dirty="0"/>
+          </a:p>
+          <a:p>
+            <a:pPr lvl="3"/>
+            <a:r>
+              <a:rPr lang="ja-JP" altLang="en-US" dirty="0"/>
+              <a:t>受講者</a:t>
+            </a:r>
+            <a:r>
+              <a:rPr lang="en-US" altLang="ja-JP" dirty="0"/>
+              <a:t>ID_</a:t>
+            </a:r>
+            <a:r>
+              <a:rPr lang="ja-JP" altLang="en-US" dirty="0"/>
+              <a:t>氏名</a:t>
+            </a:r>
+            <a:r>
+              <a:rPr lang="en-US" altLang="ja-JP" dirty="0"/>
+              <a:t>_</a:t>
+            </a:r>
+            <a:r>
+              <a:rPr lang="ja-JP" altLang="en-US" dirty="0"/>
+              <a:t>プロトタイプ</a:t>
+            </a:r>
+            <a:r>
+              <a:rPr lang="en-US" altLang="ja-JP" dirty="0"/>
+              <a:t>.zip</a:t>
+            </a:r>
+          </a:p>
+          <a:p>
+            <a:pPr lvl="4"/>
+            <a:r>
+              <a:rPr lang="ja-JP" altLang="en-US" dirty="0"/>
+              <a:t>例：</a:t>
+            </a:r>
+            <a:r>
+              <a:rPr lang="en-US" altLang="ja-JP" dirty="0"/>
+              <a:t> XXX _</a:t>
+            </a:r>
+            <a:r>
+              <a:rPr lang="ja-JP" altLang="en-US" dirty="0"/>
+              <a:t>ユニバ花子</a:t>
+            </a:r>
+            <a:r>
+              <a:rPr lang="en-US" altLang="ja-JP" dirty="0"/>
+              <a:t>_</a:t>
+            </a:r>
+            <a:r>
+              <a:rPr lang="ja-JP" altLang="en-US" dirty="0"/>
+              <a:t>プロトタイプ</a:t>
+            </a:r>
+            <a:r>
+              <a:rPr lang="en-US" altLang="ja-JP" dirty="0"/>
+              <a:t>.zip</a:t>
+            </a:r>
+          </a:p>
+          <a:p>
+            <a:endParaRPr lang="en-US" altLang="ja-JP" dirty="0"/>
+          </a:p>
+          <a:p>
+            <a:r>
+              <a:rPr lang="ja-JP" altLang="en-US" dirty="0"/>
+              <a:t>提出先</a:t>
+            </a:r>
+            <a:endParaRPr lang="en-US" altLang="ja-JP" dirty="0"/>
+          </a:p>
+          <a:p>
+            <a:pPr lvl="1"/>
+            <a:r>
+              <a:rPr lang="en-US" altLang="ja-JP" dirty="0">
+                <a:hlinkClick r:id="rId3" action="ppaction://hlinkfile"/>
+              </a:rPr>
+              <a:t>\\YYY\\</a:t>
+            </a:r>
+            <a:r>
+              <a:rPr lang="ja-JP" altLang="en-US" dirty="0"/>
+              <a:t>改善前</a:t>
+            </a:r>
+            <a:endParaRPr lang="en-US" altLang="ja-JP" dirty="0"/>
+          </a:p>
+          <a:p>
+            <a:pPr lvl="1"/>
+            <a:r>
+              <a:rPr lang="en-US" altLang="ja-JP" dirty="0">
+                <a:hlinkClick r:id="rId3" action="ppaction://hlinkfile"/>
+              </a:rPr>
+              <a:t>\\YYY\\</a:t>
+            </a:r>
+            <a:r>
+              <a:rPr lang="ja-JP" altLang="en-US" dirty="0"/>
+              <a:t>改善後</a:t>
+            </a:r>
+            <a:endParaRPr lang="en-US" altLang="ja-JP" dirty="0"/>
+          </a:p>
+          <a:p>
+            <a:pPr lvl="1"/>
+            <a:endParaRPr lang="en-US" altLang="ja-JP" dirty="0"/>
+          </a:p>
+        </p:txBody>
+      </p:sp>
+      <p:sp>
+        <p:nvSpPr>
+          <p:cNvPr id="7" name="スライド番号プレースホルダー 6">
+            <a:extLst>
+              <a:ext uri="{FF2B5EF4-FFF2-40B4-BE49-F238E27FC236}">
+                <a16:creationId xmlns:a16="http://schemas.microsoft.com/office/drawing/2014/main" id="{69416F18-D0D6-ED4C-325E-91BA9E754CF2}"/>
+              </a:ext>
+            </a:extLst>
+          </p:cNvPr>
+          <p:cNvSpPr>
+            <a:spLocks noGrp="1"/>
+          </p:cNvSpPr>
+          <p:nvPr>
+            <p:ph type="sldNum" sz="quarter" idx="12"/>
+          </p:nvPr>
+        </p:nvSpPr>
+        <p:spPr/>
+        <p:txBody>
+          <a:bodyPr/>
+          <a:lstStyle/>
+          <a:p>
+            <a:fld id="{9EBFBC76-F46F-4ADD-8228-9529630895ED}" type="slidenum">
+              <a:rPr lang="ja-JP" altLang="en-US" smtClean="0"/>
+              <a:pPr/>
+              <a:t>4</a:t>
+            </a:fld>
+            <a:endParaRPr lang="ja-JP" altLang="en-US" dirty="0"/>
+          </a:p>
+        </p:txBody>
+      </p:sp>
+      <p:grpSp>
+        <p:nvGrpSpPr>
+          <p:cNvPr id="13" name="グループ化 12">
+            <a:extLst>
+              <a:ext uri="{FF2B5EF4-FFF2-40B4-BE49-F238E27FC236}">
+                <a16:creationId xmlns:a16="http://schemas.microsoft.com/office/drawing/2014/main" id="{77C1663D-7CF0-98D5-D56B-566170018C6A}"/>
+              </a:ext>
+            </a:extLst>
+          </p:cNvPr>
+          <p:cNvGrpSpPr/>
+          <p:nvPr/>
+        </p:nvGrpSpPr>
+        <p:grpSpPr>
+          <a:xfrm>
+            <a:off x="7779855" y="1739690"/>
+            <a:ext cx="2686050" cy="1013449"/>
+            <a:chOff x="7779855" y="1739690"/>
+            <a:chExt cx="2686050" cy="1013449"/>
+          </a:xfrm>
+        </p:grpSpPr>
+        <p:pic>
+          <p:nvPicPr>
+            <p:cNvPr id="6" name="図 5">
+              <a:extLst>
+                <a:ext uri="{FF2B5EF4-FFF2-40B4-BE49-F238E27FC236}">
+                  <a16:creationId xmlns:a16="http://schemas.microsoft.com/office/drawing/2014/main" id="{86A6D3C3-35C0-EDA0-AD62-5474B6053F57}"/>
+                </a:ext>
+              </a:extLst>
+            </p:cNvPr>
+            <p:cNvPicPr>
+              <a:picLocks noChangeAspect="1"/>
+            </p:cNvPicPr>
+            <p:nvPr/>
+          </p:nvPicPr>
+          <p:blipFill>
+            <a:blip r:embed="rId4">
+              <a:extLst>
+                <a:ext uri="{28A0092B-C50C-407E-A947-70E740481C1C}">
+                  <a14:useLocalDpi xmlns:a14="http://schemas.microsoft.com/office/drawing/2010/main" val="0"/>
+                </a:ext>
+              </a:extLst>
+            </a:blip>
+            <a:stretch>
+              <a:fillRect/>
+            </a:stretch>
+          </p:blipFill>
+          <p:spPr>
+            <a:xfrm>
+              <a:off x="8604389" y="1739690"/>
+              <a:ext cx="1036982" cy="777737"/>
+            </a:xfrm>
+            <a:prstGeom prst="rect">
+              <a:avLst/>
+            </a:prstGeom>
+          </p:spPr>
+        </p:pic>
+        <p:sp>
+          <p:nvSpPr>
+            <p:cNvPr id="11" name="テキスト ボックス 10">
+              <a:extLst>
+                <a:ext uri="{FF2B5EF4-FFF2-40B4-BE49-F238E27FC236}">
+                  <a16:creationId xmlns:a16="http://schemas.microsoft.com/office/drawing/2014/main" id="{13FAF8D5-91B7-FC91-09B7-A5DDAC1F5DF2}"/>
+                </a:ext>
+              </a:extLst>
+            </p:cNvPr>
+            <p:cNvSpPr txBox="1"/>
+            <p:nvPr/>
+          </p:nvSpPr>
+          <p:spPr>
+            <a:xfrm>
+              <a:off x="7779855" y="2471181"/>
+              <a:ext cx="2686050" cy="281958"/>
+            </a:xfrm>
+            <a:prstGeom prst="rect">
+              <a:avLst/>
+            </a:prstGeom>
+            <a:noFill/>
+          </p:spPr>
+          <p:txBody>
+            <a:bodyPr wrap="square">
+              <a:spAutoFit/>
+            </a:bodyPr>
+            <a:lstStyle/>
+            <a:p>
+              <a:r>
+                <a:rPr lang="en-US" altLang="ja-JP" sz="1200" b="1" dirty="0"/>
+                <a:t>XXX_</a:t>
+              </a:r>
+              <a:r>
+                <a:rPr lang="ja-JP" altLang="en-US" sz="1200" b="1" dirty="0"/>
+                <a:t>ユニバ花子</a:t>
+              </a:r>
+              <a:r>
+                <a:rPr lang="en-US" altLang="ja-JP" sz="1200" b="1" dirty="0"/>
+                <a:t>_</a:t>
+              </a:r>
+              <a:r>
+                <a:rPr lang="ja-JP" altLang="en-US" sz="1200" b="1" dirty="0"/>
+                <a:t>企画提案書</a:t>
+              </a:r>
+              <a:r>
+                <a:rPr lang="en-US" altLang="ja-JP" sz="1200" b="1" dirty="0"/>
+                <a:t>.pptx</a:t>
+              </a:r>
+              <a:endParaRPr lang="ja-JP" altLang="en-US" sz="1200" b="1" dirty="0"/>
+            </a:p>
+          </p:txBody>
+        </p:sp>
+      </p:grpSp>
+      <p:grpSp>
+        <p:nvGrpSpPr>
+          <p:cNvPr id="14" name="グループ化 13">
+            <a:extLst>
+              <a:ext uri="{FF2B5EF4-FFF2-40B4-BE49-F238E27FC236}">
+                <a16:creationId xmlns:a16="http://schemas.microsoft.com/office/drawing/2014/main" id="{BDE8311A-E7DE-B144-07F3-B58423119400}"/>
+              </a:ext>
+            </a:extLst>
+          </p:cNvPr>
+          <p:cNvGrpSpPr/>
+          <p:nvPr/>
+        </p:nvGrpSpPr>
+        <p:grpSpPr>
+          <a:xfrm>
+            <a:off x="7779855" y="3484630"/>
+            <a:ext cx="2686050" cy="1066422"/>
+            <a:chOff x="7296150" y="3398629"/>
+            <a:chExt cx="2686050" cy="1066422"/>
+          </a:xfrm>
+        </p:grpSpPr>
+        <p:pic>
+          <p:nvPicPr>
+            <p:cNvPr id="9" name="図 8">
+              <a:extLst>
+                <a:ext uri="{FF2B5EF4-FFF2-40B4-BE49-F238E27FC236}">
+                  <a16:creationId xmlns:a16="http://schemas.microsoft.com/office/drawing/2014/main" id="{D3BEE649-4593-1C2D-E4F8-125EC81215E0}"/>
+                </a:ext>
+              </a:extLst>
+            </p:cNvPr>
+            <p:cNvPicPr>
+              <a:picLocks noChangeAspect="1"/>
+            </p:cNvPicPr>
+            <p:nvPr/>
+          </p:nvPicPr>
+          <p:blipFill>
+            <a:blip r:embed="rId5">
+              <a:extLst>
+                <a:ext uri="{28A0092B-C50C-407E-A947-70E740481C1C}">
+                  <a14:useLocalDpi xmlns:a14="http://schemas.microsoft.com/office/drawing/2010/main" val="0"/>
+                </a:ext>
+              </a:extLst>
+            </a:blip>
+            <a:stretch>
+              <a:fillRect/>
+            </a:stretch>
+          </p:blipFill>
+          <p:spPr>
+            <a:xfrm>
+              <a:off x="8172533" y="3398629"/>
+              <a:ext cx="933285" cy="777737"/>
+            </a:xfrm>
+            <a:prstGeom prst="rect">
+              <a:avLst/>
+            </a:prstGeom>
+          </p:spPr>
+        </p:pic>
+        <p:sp>
+          <p:nvSpPr>
+            <p:cNvPr id="12" name="テキスト ボックス 11">
+              <a:extLst>
+                <a:ext uri="{FF2B5EF4-FFF2-40B4-BE49-F238E27FC236}">
+                  <a16:creationId xmlns:a16="http://schemas.microsoft.com/office/drawing/2014/main" id="{EDF7E828-6FB1-4D0C-CFDB-D0DC9FAA241D}"/>
+                </a:ext>
+              </a:extLst>
+            </p:cNvPr>
+            <p:cNvSpPr txBox="1"/>
+            <p:nvPr/>
+          </p:nvSpPr>
+          <p:spPr>
+            <a:xfrm>
+              <a:off x="7296150" y="4183093"/>
+              <a:ext cx="2686050" cy="281958"/>
+            </a:xfrm>
+            <a:prstGeom prst="rect">
+              <a:avLst/>
+            </a:prstGeom>
+            <a:noFill/>
+          </p:spPr>
+          <p:txBody>
+            <a:bodyPr wrap="square">
+              <a:spAutoFit/>
+            </a:bodyPr>
+            <a:lstStyle/>
+            <a:p>
+              <a:r>
+                <a:rPr lang="ja-JP" altLang="en-US" sz="1200" b="1" dirty="0"/>
+                <a:t> </a:t>
+              </a:r>
+              <a:r>
+                <a:rPr lang="en-US" altLang="ja-JP" sz="1200" b="1" dirty="0"/>
+                <a:t>XXX _</a:t>
+              </a:r>
+              <a:r>
+                <a:rPr lang="ja-JP" altLang="en-US" sz="1200" b="1" dirty="0"/>
+                <a:t>ユニバ花子</a:t>
+              </a:r>
+              <a:r>
+                <a:rPr lang="en-US" altLang="ja-JP" sz="1200" b="1" dirty="0"/>
+                <a:t>_</a:t>
+              </a:r>
+              <a:r>
+                <a:rPr lang="ja-JP" altLang="en-US" sz="1200" b="1" dirty="0"/>
+                <a:t>プロトタイプ</a:t>
+              </a:r>
+              <a:r>
+                <a:rPr lang="en-US" altLang="ja-JP" sz="1200" b="1" dirty="0"/>
+                <a:t>.zip</a:t>
+              </a:r>
+            </a:p>
+          </p:txBody>
+        </p:sp>
+      </p:grpSp>
+    </p:spTree>
+    <p:extLst>
+      <p:ext uri="{BB962C8B-B14F-4D97-AF65-F5344CB8AC3E}">
+        <p14:creationId xmlns:p14="http://schemas.microsoft.com/office/powerpoint/2010/main" val="1923121361"/>
+      </p:ext>
+    </p:extLst>
+  </p:cSld>
+  <p:clrMapOvr>
+    <a:masterClrMapping/>
+  </p:clrMapOvr>
+</p:sld>
+</file>
+
+<file path=ppt/slides/slide5.xml><?xml version="1.0" encoding="utf-8"?>
+<p:sld xmlns:a="http://schemas.openxmlformats.org/drawingml/2006/main" xmlns:r="http://schemas.openxmlformats.org/officeDocument/2006/relationships" xmlns:p="http://schemas.openxmlformats.org/presentationml/2006/main">
+  <p:cSld>
+    <p:spTree>
+      <p:nvGrpSpPr>
+        <p:cNvPr id="1" name="">
+          <a:extLst>
+            <a:ext uri="{FF2B5EF4-FFF2-40B4-BE49-F238E27FC236}">
               <a16:creationId xmlns:a16="http://schemas.microsoft.com/office/drawing/2014/main" id="{C6909F09-97AC-277C-B528-BACF01188811}"/>
             </a:ext>
           </a:extLst>
@@ -6454,7 +6984,7 @@
             <a:fld id="{9EBFBC76-F46F-4ADD-8228-9529630895ED}" type="slidenum">
               <a:rPr lang="ja-JP" altLang="en-US" smtClean="0"/>
               <a:pPr/>
-              <a:t>4</a:t>
+              <a:t>5</a:t>
             </a:fld>
             <a:endParaRPr lang="ja-JP" altLang="en-US" dirty="0"/>
           </a:p>
@@ -6503,7 +7033,7 @@
 </p:sld>
 </file>
 
-<file path=ppt/slides/slide5.xml><?xml version="1.0" encoding="utf-8"?>
+<file path=ppt/slides/slide6.xml><?xml version="1.0" encoding="utf-8"?>
 <p:sld xmlns:a="http://schemas.openxmlformats.org/drawingml/2006/main" xmlns:r="http://schemas.openxmlformats.org/officeDocument/2006/relationships" xmlns:p="http://schemas.openxmlformats.org/presentationml/2006/main">
   <p:cSld>
     <p:spTree>
@@ -6682,7 +7212,7 @@
             <a:fld id="{9EBFBC76-F46F-4ADD-8228-9529630895ED}" type="slidenum">
               <a:rPr lang="ja-JP" altLang="en-US" smtClean="0"/>
               <a:pPr/>
-              <a:t>5</a:t>
+              <a:t>6</a:t>
             </a:fld>
             <a:endParaRPr lang="ja-JP" altLang="en-US" dirty="0"/>
           </a:p>
@@ -7073,7 +7603,7 @@
 </p:sld>
 </file>
 
-<file path=ppt/slides/slide6.xml><?xml version="1.0" encoding="utf-8"?>
+<file path=ppt/slides/slide7.xml><?xml version="1.0" encoding="utf-8"?>
 <p:sld xmlns:a="http://schemas.openxmlformats.org/drawingml/2006/main" xmlns:r="http://schemas.openxmlformats.org/officeDocument/2006/relationships" xmlns:p="http://schemas.openxmlformats.org/presentationml/2006/main">
   <p:cSld>
     <p:spTree>
@@ -7298,7 +7828,7 @@
             <a:fld id="{9EBFBC76-F46F-4ADD-8228-9529630895ED}" type="slidenum">
               <a:rPr lang="ja-JP" altLang="en-US" smtClean="0"/>
               <a:pPr/>
-              <a:t>6</a:t>
+              <a:t>7</a:t>
             </a:fld>
             <a:endParaRPr lang="ja-JP" altLang="en-US" dirty="0"/>
           </a:p>
@@ -7338,532 +7868,6 @@
     <p:extLst>
       <p:ext uri="{BB962C8B-B14F-4D97-AF65-F5344CB8AC3E}">
         <p14:creationId xmlns:p14="http://schemas.microsoft.com/office/powerpoint/2010/main" val="4168238584"/>
-      </p:ext>
-    </p:extLst>
-  </p:cSld>
-  <p:clrMapOvr>
-    <a:masterClrMapping/>
-  </p:clrMapOvr>
-</p:sld>
-</file>
-
-<file path=ppt/slides/slide7.xml><?xml version="1.0" encoding="utf-8"?>
-<p:sld xmlns:a="http://schemas.openxmlformats.org/drawingml/2006/main" xmlns:r="http://schemas.openxmlformats.org/officeDocument/2006/relationships" xmlns:p="http://schemas.openxmlformats.org/presentationml/2006/main">
-  <p:cSld>
-    <p:spTree>
-      <p:nvGrpSpPr>
-        <p:cNvPr id="1" name="">
-          <a:extLst>
-            <a:ext uri="{FF2B5EF4-FFF2-40B4-BE49-F238E27FC236}">
-              <a16:creationId xmlns:a16="http://schemas.microsoft.com/office/drawing/2014/main" id="{AF1A1E67-85B5-EC4D-9EFA-2964154C43C1}"/>
-            </a:ext>
-          </a:extLst>
-        </p:cNvPr>
-        <p:cNvGrpSpPr/>
-        <p:nvPr/>
-      </p:nvGrpSpPr>
-      <p:grpSpPr>
-        <a:xfrm>
-          <a:off x="0" y="0"/>
-          <a:ext cx="0" cy="0"/>
-          <a:chOff x="0" y="0"/>
-          <a:chExt cx="0" cy="0"/>
-        </a:xfrm>
-      </p:grpSpPr>
-      <p:sp>
-        <p:nvSpPr>
-          <p:cNvPr id="5" name="タイトル 4">
-            <a:extLst>
-              <a:ext uri="{FF2B5EF4-FFF2-40B4-BE49-F238E27FC236}">
-                <a16:creationId xmlns:a16="http://schemas.microsoft.com/office/drawing/2014/main" id="{EEAEBD30-BD98-C34F-DFA1-BDA768EE67FF}"/>
-              </a:ext>
-            </a:extLst>
-          </p:cNvPr>
-          <p:cNvSpPr>
-            <a:spLocks noGrp="1"/>
-          </p:cNvSpPr>
-          <p:nvPr>
-            <p:ph type="title"/>
-          </p:nvPr>
-        </p:nvSpPr>
-        <p:spPr/>
-        <p:txBody>
-          <a:bodyPr>
-            <a:normAutofit/>
-          </a:bodyPr>
-          <a:lstStyle/>
-          <a:p>
-            <a:r>
-              <a:rPr lang="ja-JP" altLang="en-US" dirty="0"/>
-              <a:t>提案資料の提出ついて</a:t>
-            </a:r>
-          </a:p>
-        </p:txBody>
-      </p:sp>
-      <p:sp>
-        <p:nvSpPr>
-          <p:cNvPr id="3" name="コンテンツ プレースホルダー 2">
-            <a:extLst>
-              <a:ext uri="{FF2B5EF4-FFF2-40B4-BE49-F238E27FC236}">
-                <a16:creationId xmlns:a16="http://schemas.microsoft.com/office/drawing/2014/main" id="{9D189349-C6C7-E3C8-18AD-16C30EBBC440}"/>
-              </a:ext>
-            </a:extLst>
-          </p:cNvPr>
-          <p:cNvSpPr>
-            <a:spLocks noGrp="1"/>
-          </p:cNvSpPr>
-          <p:nvPr>
-            <p:ph idx="1"/>
-          </p:nvPr>
-        </p:nvSpPr>
-        <p:spPr/>
-        <p:txBody>
-          <a:bodyPr>
-            <a:normAutofit/>
-          </a:bodyPr>
-          <a:lstStyle/>
-          <a:p>
-            <a:r>
-              <a:rPr lang="ja-JP" altLang="en-US" dirty="0"/>
-              <a:t>提出のルール</a:t>
-            </a:r>
-            <a:endParaRPr lang="en-US" altLang="ja-JP" dirty="0"/>
-          </a:p>
-          <a:p>
-            <a:pPr lvl="1"/>
-            <a:r>
-              <a:rPr lang="ja-JP" altLang="en-US" dirty="0"/>
-              <a:t>企画提案書</a:t>
-            </a:r>
-            <a:endParaRPr lang="en-US" altLang="ja-JP" dirty="0"/>
-          </a:p>
-          <a:p>
-            <a:pPr lvl="2"/>
-            <a:r>
-              <a:rPr lang="ja-JP" altLang="en-US" dirty="0"/>
-              <a:t>命名規則</a:t>
-            </a:r>
-            <a:endParaRPr lang="en-US" altLang="ja-JP" dirty="0"/>
-          </a:p>
-          <a:p>
-            <a:pPr lvl="3"/>
-            <a:r>
-              <a:rPr lang="ja-JP" altLang="en-US" dirty="0"/>
-              <a:t>受講者</a:t>
-            </a:r>
-            <a:r>
-              <a:rPr lang="en-US" altLang="ja-JP" dirty="0"/>
-              <a:t>ID_</a:t>
-            </a:r>
-            <a:r>
-              <a:rPr lang="ja-JP" altLang="en-US" dirty="0"/>
-              <a:t>氏名</a:t>
-            </a:r>
-            <a:r>
-              <a:rPr lang="en-US" altLang="ja-JP" dirty="0"/>
-              <a:t>_</a:t>
-            </a:r>
-            <a:r>
-              <a:rPr lang="ja-JP" altLang="en-US" dirty="0"/>
-              <a:t>企画提案書</a:t>
-            </a:r>
-            <a:r>
-              <a:rPr lang="en-US" altLang="ja-JP" dirty="0"/>
-              <a:t>.pptx</a:t>
-            </a:r>
-          </a:p>
-          <a:p>
-            <a:pPr lvl="4"/>
-            <a:r>
-              <a:rPr lang="ja-JP" altLang="en-US" dirty="0"/>
-              <a:t>例：</a:t>
-            </a:r>
-            <a:r>
-              <a:rPr lang="en-US" altLang="ja-JP" dirty="0"/>
-              <a:t>XXX_</a:t>
-            </a:r>
-            <a:r>
-              <a:rPr lang="ja-JP" altLang="en-US" dirty="0"/>
-              <a:t>ユニバ花子</a:t>
-            </a:r>
-            <a:r>
-              <a:rPr lang="en-US" altLang="ja-JP" dirty="0"/>
-              <a:t>_</a:t>
-            </a:r>
-            <a:r>
-              <a:rPr lang="ja-JP" altLang="en-US" dirty="0"/>
-              <a:t>企画提案書</a:t>
-            </a:r>
-            <a:r>
-              <a:rPr lang="en-US" altLang="ja-JP" dirty="0"/>
-              <a:t>.pptx</a:t>
-            </a:r>
-          </a:p>
-          <a:p>
-            <a:pPr lvl="1"/>
-            <a:r>
-              <a:rPr lang="ja-JP" altLang="en-US" dirty="0"/>
-              <a:t>プロトタイプ</a:t>
-            </a:r>
-            <a:endParaRPr lang="en-US" altLang="ja-JP" dirty="0"/>
-          </a:p>
-          <a:p>
-            <a:pPr lvl="2"/>
-            <a:r>
-              <a:rPr lang="ja-JP" altLang="en-US" dirty="0"/>
-              <a:t>命名規則</a:t>
-            </a:r>
-            <a:endParaRPr lang="en-US" altLang="ja-JP" dirty="0"/>
-          </a:p>
-          <a:p>
-            <a:pPr lvl="3"/>
-            <a:r>
-              <a:rPr lang="ja-JP" altLang="en-US" dirty="0"/>
-              <a:t>受講者</a:t>
-            </a:r>
-            <a:r>
-              <a:rPr lang="en-US" altLang="ja-JP" dirty="0"/>
-              <a:t>ID_</a:t>
-            </a:r>
-            <a:r>
-              <a:rPr lang="ja-JP" altLang="en-US" dirty="0"/>
-              <a:t>氏名</a:t>
-            </a:r>
-            <a:r>
-              <a:rPr lang="en-US" altLang="ja-JP" dirty="0"/>
-              <a:t>_</a:t>
-            </a:r>
-            <a:r>
-              <a:rPr lang="ja-JP" altLang="en-US" dirty="0"/>
-              <a:t>プロトタイプ</a:t>
-            </a:r>
-            <a:r>
-              <a:rPr lang="en-US" altLang="ja-JP" dirty="0"/>
-              <a:t>.zip</a:t>
-            </a:r>
-          </a:p>
-          <a:p>
-            <a:pPr lvl="4"/>
-            <a:r>
-              <a:rPr lang="ja-JP" altLang="en-US" dirty="0"/>
-              <a:t>例：</a:t>
-            </a:r>
-            <a:r>
-              <a:rPr lang="en-US" altLang="ja-JP" dirty="0"/>
-              <a:t> XXX _</a:t>
-            </a:r>
-            <a:r>
-              <a:rPr lang="ja-JP" altLang="en-US" dirty="0"/>
-              <a:t>ユニバ花子</a:t>
-            </a:r>
-            <a:r>
-              <a:rPr lang="en-US" altLang="ja-JP" dirty="0"/>
-              <a:t>_</a:t>
-            </a:r>
-            <a:r>
-              <a:rPr lang="ja-JP" altLang="en-US" dirty="0"/>
-              <a:t>プロトタイプ</a:t>
-            </a:r>
-            <a:r>
-              <a:rPr lang="en-US" altLang="ja-JP" dirty="0"/>
-              <a:t>.zip</a:t>
-            </a:r>
-          </a:p>
-          <a:p>
-            <a:endParaRPr lang="en-US" altLang="ja-JP" dirty="0"/>
-          </a:p>
-          <a:p>
-            <a:r>
-              <a:rPr lang="ja-JP" altLang="en-US" dirty="0"/>
-              <a:t>提出先</a:t>
-            </a:r>
-            <a:endParaRPr lang="en-US" altLang="ja-JP" dirty="0"/>
-          </a:p>
-          <a:p>
-            <a:pPr lvl="1"/>
-            <a:r>
-              <a:rPr lang="en-US" altLang="ja-JP" dirty="0"/>
-              <a:t>\\YYY\\</a:t>
-            </a:r>
-            <a:r>
-              <a:rPr lang="ja-JP" altLang="en-US" dirty="0"/>
-              <a:t>修正前</a:t>
-            </a:r>
-            <a:endParaRPr lang="en-US" altLang="ja-JP" dirty="0"/>
-          </a:p>
-          <a:p>
-            <a:pPr lvl="1"/>
-            <a:r>
-              <a:rPr lang="en-US" altLang="ja-JP" dirty="0"/>
-              <a:t>\\YYY\\</a:t>
-            </a:r>
-            <a:r>
-              <a:rPr lang="ja-JP" altLang="en-US" dirty="0"/>
-              <a:t>修正後</a:t>
-            </a:r>
-            <a:endParaRPr lang="en-US" altLang="ja-JP" dirty="0"/>
-          </a:p>
-          <a:p>
-            <a:pPr lvl="1"/>
-            <a:endParaRPr lang="en-US" altLang="ja-JP" dirty="0"/>
-          </a:p>
-        </p:txBody>
-      </p:sp>
-      <p:sp>
-        <p:nvSpPr>
-          <p:cNvPr id="7" name="スライド番号プレースホルダー 6">
-            <a:extLst>
-              <a:ext uri="{FF2B5EF4-FFF2-40B4-BE49-F238E27FC236}">
-                <a16:creationId xmlns:a16="http://schemas.microsoft.com/office/drawing/2014/main" id="{69416F18-D0D6-ED4C-325E-91BA9E754CF2}"/>
-              </a:ext>
-            </a:extLst>
-          </p:cNvPr>
-          <p:cNvSpPr>
-            <a:spLocks noGrp="1"/>
-          </p:cNvSpPr>
-          <p:nvPr>
-            <p:ph type="sldNum" sz="quarter" idx="12"/>
-          </p:nvPr>
-        </p:nvSpPr>
-        <p:spPr/>
-        <p:txBody>
-          <a:bodyPr/>
-          <a:lstStyle/>
-          <a:p>
-            <a:fld id="{9EBFBC76-F46F-4ADD-8228-9529630895ED}" type="slidenum">
-              <a:rPr lang="ja-JP" altLang="en-US" smtClean="0"/>
-              <a:pPr/>
-              <a:t>7</a:t>
-            </a:fld>
-            <a:endParaRPr lang="ja-JP" altLang="en-US" dirty="0"/>
-          </a:p>
-        </p:txBody>
-      </p:sp>
-      <p:grpSp>
-        <p:nvGrpSpPr>
-          <p:cNvPr id="13" name="グループ化 12">
-            <a:extLst>
-              <a:ext uri="{FF2B5EF4-FFF2-40B4-BE49-F238E27FC236}">
-                <a16:creationId xmlns:a16="http://schemas.microsoft.com/office/drawing/2014/main" id="{77C1663D-7CF0-98D5-D56B-566170018C6A}"/>
-              </a:ext>
-            </a:extLst>
-          </p:cNvPr>
-          <p:cNvGrpSpPr/>
-          <p:nvPr/>
-        </p:nvGrpSpPr>
-        <p:grpSpPr>
-          <a:xfrm>
-            <a:off x="7779855" y="1739690"/>
-            <a:ext cx="2686050" cy="1013449"/>
-            <a:chOff x="7779855" y="1739690"/>
-            <a:chExt cx="2686050" cy="1013449"/>
-          </a:xfrm>
-        </p:grpSpPr>
-        <p:pic>
-          <p:nvPicPr>
-            <p:cNvPr id="6" name="図 5">
-              <a:extLst>
-                <a:ext uri="{FF2B5EF4-FFF2-40B4-BE49-F238E27FC236}">
-                  <a16:creationId xmlns:a16="http://schemas.microsoft.com/office/drawing/2014/main" id="{86A6D3C3-35C0-EDA0-AD62-5474B6053F57}"/>
-                </a:ext>
-              </a:extLst>
-            </p:cNvPr>
-            <p:cNvPicPr>
-              <a:picLocks noChangeAspect="1"/>
-            </p:cNvPicPr>
-            <p:nvPr/>
-          </p:nvPicPr>
-          <p:blipFill>
-            <a:blip r:embed="rId3">
-              <a:extLst>
-                <a:ext uri="{28A0092B-C50C-407E-A947-70E740481C1C}">
-                  <a14:useLocalDpi xmlns:a14="http://schemas.microsoft.com/office/drawing/2010/main" val="0"/>
-                </a:ext>
-              </a:extLst>
-            </a:blip>
-            <a:stretch>
-              <a:fillRect/>
-            </a:stretch>
-          </p:blipFill>
-          <p:spPr>
-            <a:xfrm>
-              <a:off x="8604389" y="1739690"/>
-              <a:ext cx="1036982" cy="777737"/>
-            </a:xfrm>
-            <a:prstGeom prst="rect">
-              <a:avLst/>
-            </a:prstGeom>
-          </p:spPr>
-        </p:pic>
-        <p:sp>
-          <p:nvSpPr>
-            <p:cNvPr id="11" name="テキスト ボックス 10">
-              <a:extLst>
-                <a:ext uri="{FF2B5EF4-FFF2-40B4-BE49-F238E27FC236}">
-                  <a16:creationId xmlns:a16="http://schemas.microsoft.com/office/drawing/2014/main" id="{13FAF8D5-91B7-FC91-09B7-A5DDAC1F5DF2}"/>
-                </a:ext>
-              </a:extLst>
-            </p:cNvPr>
-            <p:cNvSpPr txBox="1"/>
-            <p:nvPr/>
-          </p:nvSpPr>
-          <p:spPr>
-            <a:xfrm>
-              <a:off x="7779855" y="2471181"/>
-              <a:ext cx="2686050" cy="281958"/>
-            </a:xfrm>
-            <a:prstGeom prst="rect">
-              <a:avLst/>
-            </a:prstGeom>
-            <a:noFill/>
-          </p:spPr>
-          <p:txBody>
-            <a:bodyPr wrap="square">
-              <a:spAutoFit/>
-            </a:bodyPr>
-            <a:lstStyle/>
-            <a:p>
-              <a:r>
-                <a:rPr lang="en-US" altLang="ja-JP" sz="1200" b="1" dirty="0"/>
-                <a:t>XXX_</a:t>
-              </a:r>
-              <a:r>
-                <a:rPr lang="ja-JP" altLang="en-US" sz="1200" b="1" dirty="0"/>
-                <a:t>ユニバ花子</a:t>
-              </a:r>
-              <a:r>
-                <a:rPr lang="en-US" altLang="ja-JP" sz="1200" b="1" dirty="0"/>
-                <a:t>_</a:t>
-              </a:r>
-              <a:r>
-                <a:rPr lang="ja-JP" altLang="en-US" sz="1200" b="1" dirty="0"/>
-                <a:t>企画提案書</a:t>
-              </a:r>
-              <a:r>
-                <a:rPr lang="en-US" altLang="ja-JP" sz="1200" b="1" dirty="0"/>
-                <a:t>.pptx</a:t>
-              </a:r>
-              <a:endParaRPr lang="ja-JP" altLang="en-US" sz="1200" b="1" dirty="0"/>
-            </a:p>
-          </p:txBody>
-        </p:sp>
-      </p:grpSp>
-      <p:grpSp>
-        <p:nvGrpSpPr>
-          <p:cNvPr id="14" name="グループ化 13">
-            <a:extLst>
-              <a:ext uri="{FF2B5EF4-FFF2-40B4-BE49-F238E27FC236}">
-                <a16:creationId xmlns:a16="http://schemas.microsoft.com/office/drawing/2014/main" id="{BDE8311A-E7DE-B144-07F3-B58423119400}"/>
-              </a:ext>
-            </a:extLst>
-          </p:cNvPr>
-          <p:cNvGrpSpPr/>
-          <p:nvPr/>
-        </p:nvGrpSpPr>
-        <p:grpSpPr>
-          <a:xfrm>
-            <a:off x="7779855" y="3484630"/>
-            <a:ext cx="2686050" cy="1066422"/>
-            <a:chOff x="7296150" y="3398629"/>
-            <a:chExt cx="2686050" cy="1066422"/>
-          </a:xfrm>
-        </p:grpSpPr>
-        <p:pic>
-          <p:nvPicPr>
-            <p:cNvPr id="9" name="図 8">
-              <a:extLst>
-                <a:ext uri="{FF2B5EF4-FFF2-40B4-BE49-F238E27FC236}">
-                  <a16:creationId xmlns:a16="http://schemas.microsoft.com/office/drawing/2014/main" id="{D3BEE649-4593-1C2D-E4F8-125EC81215E0}"/>
-                </a:ext>
-              </a:extLst>
-            </p:cNvPr>
-            <p:cNvPicPr>
-              <a:picLocks noChangeAspect="1"/>
-            </p:cNvPicPr>
-            <p:nvPr/>
-          </p:nvPicPr>
-          <p:blipFill>
-            <a:blip r:embed="rId4">
-              <a:extLst>
-                <a:ext uri="{28A0092B-C50C-407E-A947-70E740481C1C}">
-                  <a14:useLocalDpi xmlns:a14="http://schemas.microsoft.com/office/drawing/2010/main" val="0"/>
-                </a:ext>
-              </a:extLst>
-            </a:blip>
-            <a:stretch>
-              <a:fillRect/>
-            </a:stretch>
-          </p:blipFill>
-          <p:spPr>
-            <a:xfrm>
-              <a:off x="8172533" y="3398629"/>
-              <a:ext cx="933285" cy="777737"/>
-            </a:xfrm>
-            <a:prstGeom prst="rect">
-              <a:avLst/>
-            </a:prstGeom>
-          </p:spPr>
-        </p:pic>
-        <p:sp>
-          <p:nvSpPr>
-            <p:cNvPr id="12" name="テキスト ボックス 11">
-              <a:extLst>
-                <a:ext uri="{FF2B5EF4-FFF2-40B4-BE49-F238E27FC236}">
-                  <a16:creationId xmlns:a16="http://schemas.microsoft.com/office/drawing/2014/main" id="{EDF7E828-6FB1-4D0C-CFDB-D0DC9FAA241D}"/>
-                </a:ext>
-              </a:extLst>
-            </p:cNvPr>
-            <p:cNvSpPr txBox="1"/>
-            <p:nvPr/>
-          </p:nvSpPr>
-          <p:spPr>
-            <a:xfrm>
-              <a:off x="7296150" y="4183093"/>
-              <a:ext cx="2686050" cy="281958"/>
-            </a:xfrm>
-            <a:prstGeom prst="rect">
-              <a:avLst/>
-            </a:prstGeom>
-            <a:noFill/>
-          </p:spPr>
-          <p:txBody>
-            <a:bodyPr wrap="square">
-              <a:spAutoFit/>
-            </a:bodyPr>
-            <a:lstStyle/>
-            <a:p>
-              <a:r>
-                <a:rPr lang="ja-JP" altLang="en-US" sz="1200" b="1" dirty="0"/>
-                <a:t> </a:t>
-              </a:r>
-              <a:r>
-                <a:rPr lang="en-US" altLang="ja-JP" sz="1200" b="1" dirty="0"/>
-                <a:t>XXX _</a:t>
-              </a:r>
-              <a:r>
-                <a:rPr lang="ja-JP" altLang="en-US" sz="1200" b="1" dirty="0"/>
-                <a:t>ユニバ花子</a:t>
-              </a:r>
-              <a:r>
-                <a:rPr lang="en-US" altLang="ja-JP" sz="1200" b="1" dirty="0"/>
-                <a:t>_</a:t>
-              </a:r>
-              <a:r>
-                <a:rPr lang="ja-JP" altLang="en-US" sz="1200" b="1" dirty="0"/>
-                <a:t>プロトタイプ</a:t>
-              </a:r>
-              <a:r>
-                <a:rPr lang="en-US" altLang="ja-JP" sz="1200" b="1" dirty="0"/>
-                <a:t>.zip</a:t>
-              </a:r>
-            </a:p>
-          </p:txBody>
-        </p:sp>
-      </p:grpSp>
-    </p:spTree>
-    <p:extLst>
-      <p:ext uri="{BB962C8B-B14F-4D97-AF65-F5344CB8AC3E}">
-        <p14:creationId xmlns:p14="http://schemas.microsoft.com/office/powerpoint/2010/main" val="1923121361"/>
       </p:ext>
     </p:extLst>
   </p:cSld>

--- a/00_オリエンテーション/【AI Native研修-提案】研修の概要.pptx
+++ b/00_オリエンテーション/【AI Native研修-提案】研修の概要.pptx
@@ -5982,7 +5982,12 @@
             <p:ph type="title"/>
           </p:nvPr>
         </p:nvSpPr>
-        <p:spPr/>
+        <p:spPr>
+          <a:xfrm>
+            <a:off x="167951" y="365124"/>
+            <a:ext cx="11877869" cy="540000"/>
+          </a:xfrm>
+        </p:spPr>
         <p:txBody>
           <a:bodyPr>
             <a:normAutofit/>
@@ -6012,7 +6017,12 @@
             <p:ph idx="1"/>
           </p:nvPr>
         </p:nvSpPr>
-        <p:spPr/>
+        <p:spPr>
+          <a:xfrm>
+            <a:off x="167951" y="1073020"/>
+            <a:ext cx="11877869" cy="5103943"/>
+          </a:xfrm>
+        </p:spPr>
         <p:txBody>
           <a:bodyPr>
             <a:normAutofit/>
@@ -6037,7 +6047,7 @@
             <a:pPr lvl="2"/>
             <a:r>
               <a:rPr lang="ja-JP" altLang="en-US" dirty="0"/>
-              <a:t>本研修の目的や要件をまとめた提案資料</a:t>
+              <a:t>本研修の目的や要件に沿って作成した企画提案書</a:t>
             </a:r>
             <a:endParaRPr lang="en-US" altLang="ja-JP" dirty="0"/>
           </a:p>
@@ -6092,7 +6102,7 @@
             <a:pPr lvl="2"/>
             <a:r>
               <a:rPr lang="ja-JP" altLang="en-US" dirty="0"/>
-              <a:t>要件に基づいて作成した</a:t>
+              <a:t>企画提案書に基づいて作成した</a:t>
             </a:r>
             <a:r>
               <a:rPr lang="en-US" altLang="ja-JP" dirty="0"/>
@@ -6146,7 +6156,12 @@
             <p:ph type="sldNum" sz="quarter" idx="12"/>
           </p:nvPr>
         </p:nvSpPr>
-        <p:spPr/>
+        <p:spPr>
+          <a:xfrm>
+            <a:off x="8610600" y="6421667"/>
+            <a:ext cx="2743200" cy="365125"/>
+          </a:xfrm>
+        </p:spPr>
         <p:txBody>
           <a:bodyPr/>
           <a:lstStyle/>
@@ -6242,7 +6257,12 @@
             <p:ph type="title"/>
           </p:nvPr>
         </p:nvSpPr>
-        <p:spPr/>
+        <p:spPr>
+          <a:xfrm>
+            <a:off x="167951" y="365124"/>
+            <a:ext cx="11877869" cy="540000"/>
+          </a:xfrm>
+        </p:spPr>
         <p:txBody>
           <a:bodyPr>
             <a:normAutofit/>
@@ -6272,7 +6292,12 @@
             <p:ph idx="1"/>
           </p:nvPr>
         </p:nvSpPr>
-        <p:spPr/>
+        <p:spPr>
+          <a:xfrm>
+            <a:off x="167951" y="1073020"/>
+            <a:ext cx="11877869" cy="5103943"/>
+          </a:xfrm>
+        </p:spPr>
         <p:txBody>
           <a:bodyPr>
             <a:normAutofit/>
@@ -6281,7 +6306,7 @@
           <a:p>
             <a:r>
               <a:rPr lang="ja-JP" altLang="en-US" dirty="0"/>
-              <a:t>提出のルール</a:t>
+              <a:t>ファイル名</a:t>
             </a:r>
             <a:endParaRPr lang="en-US" altLang="ja-JP" dirty="0"/>
           </a:p>
@@ -6297,63 +6322,56 @@
             <a:pPr lvl="2"/>
             <a:r>
               <a:rPr lang="ja-JP" altLang="en-US" dirty="0"/>
-              <a:t>命名規則</a:t>
-            </a:r>
-            <a:endParaRPr lang="en-US" altLang="ja-JP" dirty="0"/>
-          </a:p>
-          <a:p>
-            <a:pPr lvl="3"/>
-            <a:r>
-              <a:rPr lang="ja-JP" altLang="en-US" dirty="0"/>
+              <a:t> </a:t>
+            </a:r>
+            <a:r>
+              <a:rPr lang="ja-JP" altLang="en-US" dirty="0">
+                <a:solidFill>
+                  <a:srgbClr val="0070C0"/>
+                </a:solidFill>
+              </a:rPr>
               <a:t>受講者</a:t>
             </a:r>
             <a:r>
-              <a:rPr lang="en-US" altLang="ja-JP" dirty="0"/>
+              <a:rPr lang="en-US" altLang="ja-JP" dirty="0">
+                <a:solidFill>
+                  <a:srgbClr val="0070C0"/>
+                </a:solidFill>
+              </a:rPr>
               <a:t>ID_</a:t>
             </a:r>
             <a:r>
-              <a:rPr lang="ja-JP" altLang="en-US" dirty="0"/>
+              <a:rPr lang="ja-JP" altLang="en-US" dirty="0">
+                <a:solidFill>
+                  <a:srgbClr val="0070C0"/>
+                </a:solidFill>
+              </a:rPr>
               <a:t>氏名</a:t>
             </a:r>
             <a:r>
-              <a:rPr lang="en-US" altLang="ja-JP" dirty="0"/>
+              <a:rPr lang="en-US" altLang="ja-JP" dirty="0">
+                <a:solidFill>
+                  <a:srgbClr val="0070C0"/>
+                </a:solidFill>
+              </a:rPr>
               <a:t>_</a:t>
             </a:r>
             <a:r>
-              <a:rPr lang="ja-JP" altLang="en-US" dirty="0"/>
+              <a:rPr lang="ja-JP" altLang="en-US" dirty="0">
+                <a:solidFill>
+                  <a:srgbClr val="FF0000"/>
+                </a:solidFill>
+              </a:rPr>
               <a:t>企画提案書</a:t>
             </a:r>
             <a:r>
               <a:rPr lang="en-US" altLang="ja-JP" dirty="0"/>
               <a:t>.pptx</a:t>
             </a:r>
-          </a:p>
-          <a:p>
-            <a:pPr lvl="4"/>
-            <a:r>
-              <a:rPr lang="ja-JP" altLang="en-US" dirty="0"/>
-              <a:t>例：</a:t>
-            </a:r>
-            <a:r>
+            <a:br>
               <a:rPr lang="en-US" altLang="ja-JP" dirty="0"/>
-              <a:t>XXX_</a:t>
-            </a:r>
-            <a:r>
-              <a:rPr lang="ja-JP" altLang="en-US" dirty="0"/>
-              <a:t>ユニバ花子</a:t>
-            </a:r>
-            <a:r>
-              <a:rPr lang="en-US" altLang="ja-JP" dirty="0"/>
-              <a:t>_</a:t>
-            </a:r>
-            <a:r>
-              <a:rPr lang="ja-JP" altLang="en-US" dirty="0"/>
-              <a:t>企画提案書</a:t>
-            </a:r>
-            <a:r>
-              <a:rPr lang="en-US" altLang="ja-JP" dirty="0"/>
-              <a:t>.pptx</a:t>
-            </a:r>
+            </a:br>
+            <a:endParaRPr lang="en-US" altLang="ja-JP" dirty="0"/>
           </a:p>
           <a:p>
             <a:pPr lvl="1"/>
@@ -6367,30 +6385,46 @@
             <a:pPr lvl="2"/>
             <a:r>
               <a:rPr lang="ja-JP" altLang="en-US" dirty="0"/>
-              <a:t>命名規則</a:t>
-            </a:r>
-            <a:endParaRPr lang="en-US" altLang="ja-JP" dirty="0"/>
-          </a:p>
-          <a:p>
-            <a:pPr lvl="3"/>
-            <a:r>
-              <a:rPr lang="ja-JP" altLang="en-US" dirty="0"/>
+              <a:t> </a:t>
+            </a:r>
+            <a:r>
+              <a:rPr lang="ja-JP" altLang="en-US" dirty="0">
+                <a:solidFill>
+                  <a:srgbClr val="0070C0"/>
+                </a:solidFill>
+              </a:rPr>
               <a:t>受講者</a:t>
             </a:r>
             <a:r>
-              <a:rPr lang="en-US" altLang="ja-JP" dirty="0"/>
+              <a:rPr lang="en-US" altLang="ja-JP" dirty="0">
+                <a:solidFill>
+                  <a:srgbClr val="0070C0"/>
+                </a:solidFill>
+              </a:rPr>
               <a:t>ID_</a:t>
             </a:r>
             <a:r>
-              <a:rPr lang="ja-JP" altLang="en-US" dirty="0"/>
+              <a:rPr lang="ja-JP" altLang="en-US" dirty="0">
+                <a:solidFill>
+                  <a:srgbClr val="0070C0"/>
+                </a:solidFill>
+              </a:rPr>
               <a:t>氏名</a:t>
             </a:r>
             <a:r>
-              <a:rPr lang="en-US" altLang="ja-JP" dirty="0"/>
+              <a:rPr lang="en-US" altLang="ja-JP" dirty="0">
+                <a:solidFill>
+                  <a:srgbClr val="0070C0"/>
+                </a:solidFill>
+              </a:rPr>
               <a:t>_</a:t>
             </a:r>
             <a:r>
-              <a:rPr lang="ja-JP" altLang="en-US" dirty="0"/>
+              <a:rPr lang="ja-JP" altLang="en-US" dirty="0">
+                <a:solidFill>
+                  <a:srgbClr val="00B050"/>
+                </a:solidFill>
+              </a:rPr>
               <a:t>プロトタイプ</a:t>
             </a:r>
             <a:r>
@@ -6399,33 +6433,6 @@
             </a:r>
           </a:p>
           <a:p>
-            <a:pPr lvl="4"/>
-            <a:r>
-              <a:rPr lang="ja-JP" altLang="en-US" dirty="0"/>
-              <a:t>例：</a:t>
-            </a:r>
-            <a:r>
-              <a:rPr lang="en-US" altLang="ja-JP" dirty="0"/>
-              <a:t> XXX _</a:t>
-            </a:r>
-            <a:r>
-              <a:rPr lang="ja-JP" altLang="en-US" dirty="0"/>
-              <a:t>ユニバ花子</a:t>
-            </a:r>
-            <a:r>
-              <a:rPr lang="en-US" altLang="ja-JP" dirty="0"/>
-              <a:t>_</a:t>
-            </a:r>
-            <a:r>
-              <a:rPr lang="ja-JP" altLang="en-US" dirty="0"/>
-              <a:t>プロトタイプ</a:t>
-            </a:r>
-            <a:r>
-              <a:rPr lang="en-US" altLang="ja-JP" dirty="0"/>
-              <a:t>.zip</a:t>
-            </a:r>
-          </a:p>
-          <a:p>
             <a:endParaRPr lang="en-US" altLang="ja-JP" dirty="0"/>
           </a:p>
           <a:p>
@@ -6437,6 +6444,16 @@
           </a:p>
           <a:p>
             <a:pPr lvl="1"/>
+            <a:r>
+              <a:rPr lang="ja-JP" altLang="en-US" dirty="0"/>
+              <a:t>改善前の提案資料</a:t>
+            </a:r>
+            <a:endParaRPr lang="en-US" altLang="ja-JP" dirty="0">
+              <a:hlinkClick r:id="rId3" action="ppaction://hlinkfile"/>
+            </a:endParaRPr>
+          </a:p>
+          <a:p>
+            <a:pPr lvl="2"/>
             <a:r>
               <a:rPr lang="en-US" altLang="ja-JP" dirty="0">
                 <a:hlinkClick r:id="rId3" action="ppaction://hlinkfile"/>
@@ -6451,6 +6468,14 @@
           </a:p>
           <a:p>
             <a:pPr lvl="1"/>
+            <a:r>
+              <a:rPr lang="ja-JP" altLang="en-US" dirty="0"/>
+              <a:t>改善後の提案資料</a:t>
+            </a:r>
+            <a:endParaRPr lang="en-US" altLang="ja-JP" dirty="0"/>
+          </a:p>
+          <a:p>
+            <a:pPr lvl="2"/>
             <a:r>
               <a:rPr lang="en-US" altLang="ja-JP" dirty="0">
                 <a:hlinkClick r:id="rId3" action="ppaction://hlinkfile"/>
@@ -6485,7 +6510,12 @@
             <p:ph type="sldNum" sz="quarter" idx="12"/>
           </p:nvPr>
         </p:nvSpPr>
-        <p:spPr/>
+        <p:spPr>
+          <a:xfrm>
+            <a:off x="8610600" y="6421667"/>
+            <a:ext cx="2743200" cy="365125"/>
+          </a:xfrm>
+        </p:spPr>
         <p:txBody>
           <a:bodyPr/>
           <a:lstStyle/>
@@ -6513,10 +6543,10 @@
         </p:nvGrpSpPr>
         <p:grpSpPr>
           <a:xfrm>
-            <a:off x="7779855" y="1739690"/>
-            <a:ext cx="2686050" cy="1013449"/>
-            <a:chOff x="7779855" y="1739690"/>
-            <a:chExt cx="2686050" cy="1013449"/>
+            <a:off x="7779855" y="1490040"/>
+            <a:ext cx="2686050" cy="923609"/>
+            <a:chOff x="7779855" y="1857484"/>
+            <a:chExt cx="2686050" cy="923609"/>
           </a:xfrm>
         </p:grpSpPr>
         <p:pic>
@@ -6547,8 +6577,8 @@
           </p:blipFill>
           <p:spPr>
             <a:xfrm>
-              <a:off x="8604389" y="1739690"/>
-              <a:ext cx="1036982" cy="777737"/>
+              <a:off x="8682918" y="1857484"/>
+              <a:ext cx="879925" cy="659944"/>
             </a:xfrm>
             <a:prstGeom prst="rect">
               <a:avLst/>
@@ -6569,7 +6599,7 @@
           </p:nvSpPr>
           <p:spPr>
             <a:xfrm>
-              <a:off x="7779855" y="2471181"/>
+              <a:off x="7779855" y="2499135"/>
               <a:ext cx="2686050" cy="281958"/>
             </a:xfrm>
             <a:prstGeom prst="rect">
@@ -6622,10 +6652,10 @@
         </p:nvGrpSpPr>
         <p:grpSpPr>
           <a:xfrm>
-            <a:off x="7779855" y="3484630"/>
-            <a:ext cx="2686050" cy="1066422"/>
-            <a:chOff x="7296150" y="3398629"/>
-            <a:chExt cx="2686050" cy="1066422"/>
+            <a:off x="7730160" y="2718203"/>
+            <a:ext cx="2686050" cy="773717"/>
+            <a:chOff x="7296150" y="3691334"/>
+            <a:chExt cx="2686050" cy="773717"/>
           </a:xfrm>
         </p:grpSpPr>
         <p:pic>
@@ -6656,8 +6686,8 @@
           </p:blipFill>
           <p:spPr>
             <a:xfrm>
-              <a:off x="8172533" y="3398629"/>
-              <a:ext cx="933285" cy="777737"/>
+              <a:off x="8350569" y="3691334"/>
+              <a:ext cx="577213" cy="481011"/>
             </a:xfrm>
             <a:prstGeom prst="rect">
               <a:avLst/>

--- a/00_オリエンテーション/【AI Native研修-提案】研修の概要.pptx
+++ b/00_オリエンテーション/【AI Native研修-提案】研修の概要.pptx
@@ -203,7 +203,7 @@
           <a:p>
             <a:fld id="{3E092660-A910-48D6-9DD5-B02CDD5983C2}" type="datetimeFigureOut">
               <a:rPr kumimoji="1" lang="ja-JP" altLang="en-US" smtClean="0"/>
-              <a:t>2026/7/5</a:t>
+              <a:t>2026/8/7</a:t>
             </a:fld>
             <a:endParaRPr kumimoji="1" lang="ja-JP" altLang="en-US"/>
           </a:p>
@@ -2155,7 +2155,7 @@
           <a:p>
             <a:fld id="{2E0DAD46-3E7E-4E8C-BA70-752182BEDFD1}" type="datetime1">
               <a:rPr kumimoji="1" lang="ja-JP" altLang="en-US" smtClean="0"/>
-              <a:t>2026/7/5</a:t>
+              <a:t>2026/8/7</a:t>
             </a:fld>
             <a:endParaRPr kumimoji="1" lang="ja-JP" altLang="en-US"/>
           </a:p>
@@ -2694,14 +2694,14 @@
           <p:nvPr>
             <p:extLst>
               <p:ext uri="{D42A27DB-BD31-4B8C-83A1-F6EECF244321}">
-                <p14:modId xmlns:p14="http://schemas.microsoft.com/office/powerpoint/2010/main" val="1833374111"/>
+                <p14:modId xmlns:p14="http://schemas.microsoft.com/office/powerpoint/2010/main" val="2024423899"/>
               </p:ext>
             </p:extLst>
           </p:nvPr>
         </p:nvGraphicFramePr>
         <p:xfrm>
           <a:off x="111443" y="878037"/>
-          <a:ext cx="11966713" cy="5546035"/>
+          <a:ext cx="11966713" cy="5908755"/>
         </p:xfrm>
         <a:graphic>
           <a:graphicData uri="http://schemas.openxmlformats.org/drawingml/2006/table">
@@ -2723,7 +2723,7 @@
                   </a:extLst>
                 </a:gridCol>
               </a:tblGrid>
-              <a:tr h="396936">
+              <a:tr h="422896">
                 <a:tc>
                   <a:txBody>
                     <a:bodyPr/>
@@ -2986,7 +2986,7 @@
                   </a:ext>
                 </a:extLst>
               </a:tr>
-              <a:tr h="5149099">
+              <a:tr h="5485859">
                 <a:tc>
                   <a:txBody>
                     <a:bodyPr/>
@@ -3440,7 +3440,7 @@
         <p:grpSpPr>
           <a:xfrm>
             <a:off x="230678" y="1394089"/>
-            <a:ext cx="3600000" cy="3665292"/>
+            <a:ext cx="3600000" cy="4051324"/>
             <a:chOff x="946296" y="1364275"/>
             <a:chExt cx="4359349" cy="3689675"/>
           </a:xfrm>
@@ -3695,7 +3695,7 @@
         </p:nvSpPr>
         <p:spPr>
           <a:xfrm>
-            <a:off x="1850678" y="5128954"/>
+            <a:off x="1850678" y="5486762"/>
             <a:ext cx="360000" cy="180000"/>
           </a:xfrm>
           <a:prstGeom prst="downArrow">
@@ -3769,7 +3769,7 @@
         </p:nvGrpSpPr>
         <p:grpSpPr>
           <a:xfrm>
-            <a:off x="230678" y="5350303"/>
+            <a:off x="230678" y="5708111"/>
             <a:ext cx="3600000" cy="936522"/>
             <a:chOff x="946296" y="5714099"/>
             <a:chExt cx="4359349" cy="936522"/>
@@ -3985,7 +3985,7 @@
         </p:nvSpPr>
         <p:spPr>
           <a:xfrm>
-            <a:off x="410678" y="2069700"/>
+            <a:off x="410678" y="2566653"/>
             <a:ext cx="3240000" cy="360000"/>
           </a:xfrm>
           <a:prstGeom prst="roundRect">
@@ -4076,7 +4076,7 @@
         </p:nvSpPr>
         <p:spPr>
           <a:xfrm>
-            <a:off x="410678" y="3042258"/>
+            <a:off x="410678" y="3539211"/>
             <a:ext cx="3240000" cy="360000"/>
           </a:xfrm>
           <a:prstGeom prst="roundRect">
@@ -4177,7 +4177,7 @@
         </p:nvSpPr>
         <p:spPr>
           <a:xfrm>
-            <a:off x="410678" y="2555979"/>
+            <a:off x="410678" y="3052932"/>
             <a:ext cx="3240000" cy="360000"/>
           </a:xfrm>
           <a:prstGeom prst="roundRect">
@@ -4582,7 +4582,7 @@
         </p:nvSpPr>
         <p:spPr>
           <a:xfrm>
-            <a:off x="4434053" y="2069700"/>
+            <a:off x="4434053" y="2062547"/>
             <a:ext cx="3240000" cy="360000"/>
           </a:xfrm>
           <a:prstGeom prst="roundRect">
@@ -5084,7 +5084,7 @@
         </p:nvSpPr>
         <p:spPr>
           <a:xfrm>
-            <a:off x="8464135" y="2069700"/>
+            <a:off x="8464135" y="2062547"/>
             <a:ext cx="3240000" cy="360000"/>
           </a:xfrm>
           <a:prstGeom prst="roundRect">
@@ -5147,7 +5147,7 @@
         </p:nvSpPr>
         <p:spPr>
           <a:xfrm>
-            <a:off x="410678" y="4014816"/>
+            <a:off x="410678" y="4511769"/>
             <a:ext cx="3240000" cy="360000"/>
           </a:xfrm>
           <a:prstGeom prst="roundRect">
@@ -5248,7 +5248,7 @@
         </p:nvSpPr>
         <p:spPr>
           <a:xfrm>
-            <a:off x="410678" y="3528537"/>
+            <a:off x="410678" y="4025490"/>
             <a:ext cx="3240000" cy="360000"/>
           </a:xfrm>
           <a:prstGeom prst="roundRect">
@@ -5678,7 +5678,7 @@
         </p:nvSpPr>
         <p:spPr>
           <a:xfrm>
-            <a:off x="410678" y="4501094"/>
+            <a:off x="410678" y="4998047"/>
             <a:ext cx="3240000" cy="360000"/>
           </a:xfrm>
           <a:prstGeom prst="roundRect">
@@ -5872,31 +5872,6 @@
       </p:sp>
       <p:sp>
         <p:nvSpPr>
-          <p:cNvPr id="6" name="コンテンツ プレースホルダー 5">
-            <a:extLst>
-              <a:ext uri="{FF2B5EF4-FFF2-40B4-BE49-F238E27FC236}">
-                <a16:creationId xmlns:a16="http://schemas.microsoft.com/office/drawing/2014/main" id="{54608B67-DBA5-2A08-B161-8028FFECE715}"/>
-              </a:ext>
-            </a:extLst>
-          </p:cNvPr>
-          <p:cNvSpPr>
-            <a:spLocks noGrp="1"/>
-          </p:cNvSpPr>
-          <p:nvPr>
-            <p:ph idx="1"/>
-          </p:nvPr>
-        </p:nvSpPr>
-        <p:spPr/>
-        <p:txBody>
-          <a:bodyPr/>
-          <a:lstStyle/>
-          <a:p>
-            <a:endParaRPr lang="ja-JP" altLang="en-US"/>
-          </a:p>
-        </p:txBody>
-      </p:sp>
-      <p:sp>
-        <p:nvSpPr>
           <p:cNvPr id="3" name="スライド番号プレースホルダー 2">
             <a:extLst>
               <a:ext uri="{FF2B5EF4-FFF2-40B4-BE49-F238E27FC236}">
@@ -5927,6 +5902,100 @@
               <a:t>2</a:t>
             </a:fld>
             <a:endParaRPr lang="ja-JP" altLang="en-US" dirty="0"/>
+          </a:p>
+        </p:txBody>
+      </p:sp>
+      <p:sp>
+        <p:nvSpPr>
+          <p:cNvPr id="5" name="四角形: 角を丸くする 4">
+            <a:extLst>
+              <a:ext uri="{FF2B5EF4-FFF2-40B4-BE49-F238E27FC236}">
+                <a16:creationId xmlns:a16="http://schemas.microsoft.com/office/drawing/2014/main" id="{6A4F8B94-4C13-14C6-0F4D-6550D3AFA98C}"/>
+              </a:ext>
+            </a:extLst>
+          </p:cNvPr>
+          <p:cNvSpPr/>
+          <p:nvPr/>
+        </p:nvSpPr>
+        <p:spPr>
+          <a:xfrm>
+            <a:off x="410678" y="2062547"/>
+            <a:ext cx="3240000" cy="360000"/>
+          </a:xfrm>
+          <a:prstGeom prst="roundRect">
+            <a:avLst/>
+          </a:prstGeom>
+          <a:solidFill>
+            <a:schemeClr val="accent1">
+              <a:lumMod val="20000"/>
+              <a:lumOff val="80000"/>
+            </a:schemeClr>
+          </a:solidFill>
+          <a:ln w="3175" cap="flat" cmpd="sng" algn="ctr">
+            <a:solidFill>
+              <a:srgbClr val="000000"/>
+            </a:solidFill>
+            <a:prstDash val="solid"/>
+          </a:ln>
+          <a:effectLst/>
+        </p:spPr>
+        <p:txBody>
+          <a:bodyPr rot="0" spcFirstLastPara="0" vertOverflow="overflow" horzOverflow="overflow" vert="horz" wrap="square" lIns="36000" tIns="36000" rIns="36000" bIns="36000" numCol="1" spcCol="0" rtlCol="0" fromWordArt="0" anchor="ctr" anchorCtr="0" forceAA="0" compatLnSpc="1">
+            <a:prstTxWarp prst="textNoShape">
+              <a:avLst/>
+            </a:prstTxWarp>
+            <a:noAutofit/>
+          </a:bodyPr>
+          <a:lstStyle/>
+          <a:p>
+            <a:pPr marL="0" marR="0" lvl="0" indent="0" algn="ctr" defTabSz="914400" eaLnBrk="1" fontAlgn="auto" latinLnBrk="0" hangingPunct="1">
+              <a:lnSpc>
+                <a:spcPct val="100000"/>
+              </a:lnSpc>
+              <a:spcBef>
+                <a:spcPts val="0"/>
+              </a:spcBef>
+              <a:spcAft>
+                <a:spcPts val="0"/>
+              </a:spcAft>
+              <a:buClrTx/>
+              <a:buSzTx/>
+              <a:buFontTx/>
+              <a:buNone/>
+              <a:tabLst/>
+              <a:defRPr/>
+            </a:pPr>
+            <a:r>
+              <a:rPr kumimoji="0" lang="ja-JP" altLang="en-US" sz="1200" b="0" i="0" u="none" strike="noStrike" kern="0" cap="none" spc="0" normalizeH="0" baseline="0" noProof="0" dirty="0">
+                <a:ln>
+                  <a:noFill/>
+                </a:ln>
+                <a:solidFill>
+                  <a:srgbClr val="000000"/>
+                </a:solidFill>
+                <a:effectLst/>
+                <a:uLnTx/>
+                <a:uFillTx/>
+                <a:latin typeface="Arial"/>
+                <a:ea typeface="Meiryo UI"/>
+                <a:cs typeface="+mn-cs"/>
+              </a:rPr>
+              <a:t>提案の講義</a:t>
+            </a:r>
+            <a:endParaRPr kumimoji="0" lang="en-US" altLang="ja-JP" sz="1200" b="0" i="0" u="none" strike="noStrike" kern="0" cap="none" spc="0" normalizeH="0" baseline="0" noProof="0" dirty="0">
+              <a:ln>
+                <a:noFill/>
+              </a:ln>
+              <a:solidFill>
+                <a:srgbClr val="000000"/>
+              </a:solidFill>
+              <a:effectLst/>
+              <a:uLnTx/>
+              <a:uFillTx/>
+              <a:latin typeface="Arial"/>
+              <a:ea typeface="Meiryo UI"/>
+              <a:cs typeface="+mn-cs"/>
+            </a:endParaRPr>
           </a:p>
         </p:txBody>
       </p:sp>
@@ -6197,7 +6266,7 @@
         </p:blipFill>
         <p:spPr>
           <a:xfrm>
-            <a:off x="8080619" y="1027662"/>
+            <a:off x="8150193" y="630935"/>
             <a:ext cx="3664014" cy="1005927"/>
           </a:xfrm>
           <a:prstGeom prst="rect">
@@ -6846,13 +6915,29 @@
         </p:spPr>
         <p:txBody>
           <a:bodyPr>
-            <a:normAutofit/>
+            <a:normAutofit lnSpcReduction="10000"/>
           </a:bodyPr>
           <a:lstStyle/>
           <a:p>
             <a:r>
               <a:rPr lang="ja-JP" altLang="en-US" dirty="0"/>
               <a:t>提案資料の作成の流れ</a:t>
+            </a:r>
+            <a:endParaRPr lang="en-US" altLang="ja-JP" dirty="0"/>
+          </a:p>
+          <a:p>
+            <a:pPr lvl="1"/>
+            <a:r>
+              <a:rPr lang="ja-JP" altLang="en-US" dirty="0"/>
+              <a:t>提案の講義</a:t>
+            </a:r>
+            <a:endParaRPr lang="en-US" altLang="ja-JP" dirty="0"/>
+          </a:p>
+          <a:p>
+            <a:pPr lvl="2"/>
+            <a:r>
+              <a:rPr lang="ja-JP" altLang="en-US" dirty="0"/>
+              <a:t>企画提案のステップについて学習する。</a:t>
             </a:r>
             <a:endParaRPr lang="en-US" altLang="ja-JP" dirty="0"/>
           </a:p>
@@ -7022,10 +7107,10 @@
       </p:sp>
       <p:pic>
         <p:nvPicPr>
-          <p:cNvPr id="4" name="図 3">
+          <p:cNvPr id="2" name="図 1">
             <a:extLst>
               <a:ext uri="{FF2B5EF4-FFF2-40B4-BE49-F238E27FC236}">
-                <a16:creationId xmlns:a16="http://schemas.microsoft.com/office/drawing/2014/main" id="{AC9ABA23-1FFA-CEBD-58E2-8A7798AB1607}"/>
+                <a16:creationId xmlns:a16="http://schemas.microsoft.com/office/drawing/2014/main" id="{1F83EB2F-495A-8BBB-4018-FD112AFFDC7B}"/>
               </a:ext>
             </a:extLst>
           </p:cNvPr>
@@ -7042,8 +7127,8 @@
         </p:blipFill>
         <p:spPr>
           <a:xfrm>
-            <a:off x="8420677" y="1073150"/>
-            <a:ext cx="3603048" cy="3712786"/>
+            <a:off x="8180676" y="635124"/>
+            <a:ext cx="3603048" cy="4066384"/>
           </a:xfrm>
           <a:prstGeom prst="rect">
             <a:avLst/>
@@ -7612,7 +7697,7 @@
         </p:blipFill>
         <p:spPr>
           <a:xfrm>
-            <a:off x="8420677" y="1073150"/>
+            <a:off x="8180676" y="635124"/>
             <a:ext cx="3603048" cy="2255716"/>
           </a:xfrm>
           <a:prstGeom prst="rect">
@@ -7886,7 +7971,7 @@
         </p:blipFill>
         <p:spPr>
           <a:xfrm>
-            <a:off x="8420677" y="1073150"/>
+            <a:off x="8180676" y="635124"/>
             <a:ext cx="3603048" cy="3243353"/>
           </a:xfrm>
           <a:prstGeom prst="rect">

--- a/00_オリエンテーション/【AI Native研修-提案】研修の概要.pptx
+++ b/00_オリエンテーション/【AI Native研修-提案】研修の概要.pptx
@@ -203,7 +203,7 @@
           <a:p>
             <a:fld id="{3E092660-A910-48D6-9DD5-B02CDD5983C2}" type="datetimeFigureOut">
               <a:rPr kumimoji="1" lang="ja-JP" altLang="en-US" smtClean="0"/>
-              <a:t>2026/8/7</a:t>
+              <a:t>2026/8/19</a:t>
             </a:fld>
             <a:endParaRPr kumimoji="1" lang="ja-JP" altLang="en-US"/>
           </a:p>
@@ -2155,7 +2155,7 @@
           <a:p>
             <a:fld id="{2E0DAD46-3E7E-4E8C-BA70-752182BEDFD1}" type="datetime1">
               <a:rPr kumimoji="1" lang="ja-JP" altLang="en-US" smtClean="0"/>
-              <a:t>2026/8/7</a:t>
+              <a:t>2026/8/19</a:t>
             </a:fld>
             <a:endParaRPr kumimoji="1" lang="ja-JP" altLang="en-US"/>
           </a:p>
@@ -6340,8 +6340,13 @@
           <a:p>
             <a:r>
               <a:rPr lang="ja-JP" altLang="en-US" dirty="0"/>
-              <a:t>提案資料の提出ついて</a:t>
-            </a:r>
+              <a:t>提案資料の</a:t>
+            </a:r>
+            <a:r>
+              <a:rPr lang="ja-JP" altLang="en-US"/>
+              <a:t>提出について</a:t>
+            </a:r>
+            <a:endParaRPr lang="ja-JP" altLang="en-US" dirty="0"/>
           </a:p>
         </p:txBody>
       </p:sp>
